--- a/assets/docs/Presentation_projet_Symfony_Aureo_Ruffier.pptx
+++ b/assets/docs/Presentation_projet_Symfony_Aureo_Ruffier.pptx
@@ -3972,7 +3972,7 @@
           <a:p>
             <a:fld id="{5BCAD085-E8A6-8845-BD4E-CB4CCA059FC4}" type="datetimeFigureOut">
               <a:rPr lang="en-US" smtClean="0"/>
-              <a:t>8/11/2026</a:t>
+              <a:t>10/1/2026</a:t>
             </a:fld>
             <a:endParaRPr lang="en-US"/>
           </a:p>
@@ -4140,7 +4140,7 @@
           <a:p>
             <a:fld id="{5BCAD085-E8A6-8845-BD4E-CB4CCA059FC4}" type="datetimeFigureOut">
               <a:rPr lang="en-US" smtClean="0"/>
-              <a:t>8/11/2026</a:t>
+              <a:t>10/1/2026</a:t>
             </a:fld>
             <a:endParaRPr lang="en-US"/>
           </a:p>
@@ -4318,7 +4318,7 @@
           <a:p>
             <a:fld id="{5BCAD085-E8A6-8845-BD4E-CB4CCA059FC4}" type="datetimeFigureOut">
               <a:rPr lang="en-US" smtClean="0"/>
-              <a:t>8/11/2026</a:t>
+              <a:t>10/1/2026</a:t>
             </a:fld>
             <a:endParaRPr lang="en-US"/>
           </a:p>
@@ -4486,7 +4486,7 @@
           <a:p>
             <a:fld id="{5BCAD085-E8A6-8845-BD4E-CB4CCA059FC4}" type="datetimeFigureOut">
               <a:rPr lang="en-US" smtClean="0"/>
-              <a:t>8/11/2026</a:t>
+              <a:t>10/1/2026</a:t>
             </a:fld>
             <a:endParaRPr lang="en-US"/>
           </a:p>
@@ -4731,7 +4731,7 @@
           <a:p>
             <a:fld id="{5BCAD085-E8A6-8845-BD4E-CB4CCA059FC4}" type="datetimeFigureOut">
               <a:rPr lang="en-US" smtClean="0"/>
-              <a:t>8/11/2026</a:t>
+              <a:t>10/1/2026</a:t>
             </a:fld>
             <a:endParaRPr lang="en-US"/>
           </a:p>
@@ -5016,7 +5016,7 @@
           <a:p>
             <a:fld id="{5BCAD085-E8A6-8845-BD4E-CB4CCA059FC4}" type="datetimeFigureOut">
               <a:rPr lang="en-US" smtClean="0"/>
-              <a:t>8/11/2026</a:t>
+              <a:t>10/1/2026</a:t>
             </a:fld>
             <a:endParaRPr lang="en-US"/>
           </a:p>
@@ -5435,7 +5435,7 @@
           <a:p>
             <a:fld id="{5BCAD085-E8A6-8845-BD4E-CB4CCA059FC4}" type="datetimeFigureOut">
               <a:rPr lang="en-US" smtClean="0"/>
-              <a:t>8/11/2026</a:t>
+              <a:t>10/1/2026</a:t>
             </a:fld>
             <a:endParaRPr lang="en-US"/>
           </a:p>
@@ -5552,7 +5552,7 @@
           <a:p>
             <a:fld id="{5BCAD085-E8A6-8845-BD4E-CB4CCA059FC4}" type="datetimeFigureOut">
               <a:rPr lang="en-US" smtClean="0"/>
-              <a:t>8/11/2026</a:t>
+              <a:t>10/1/2026</a:t>
             </a:fld>
             <a:endParaRPr lang="en-US"/>
           </a:p>
@@ -5647,7 +5647,7 @@
           <a:p>
             <a:fld id="{5BCAD085-E8A6-8845-BD4E-CB4CCA059FC4}" type="datetimeFigureOut">
               <a:rPr lang="en-US" smtClean="0"/>
-              <a:t>8/11/2026</a:t>
+              <a:t>10/1/2026</a:t>
             </a:fld>
             <a:endParaRPr lang="en-US"/>
           </a:p>
@@ -5922,7 +5922,7 @@
           <a:p>
             <a:fld id="{5BCAD085-E8A6-8845-BD4E-CB4CCA059FC4}" type="datetimeFigureOut">
               <a:rPr lang="en-US" smtClean="0"/>
-              <a:t>8/11/2026</a:t>
+              <a:t>10/1/2026</a:t>
             </a:fld>
             <a:endParaRPr lang="en-US"/>
           </a:p>
@@ -6174,7 +6174,7 @@
           <a:p>
             <a:fld id="{5BCAD085-E8A6-8845-BD4E-CB4CCA059FC4}" type="datetimeFigureOut">
               <a:rPr lang="en-US" smtClean="0"/>
-              <a:t>8/11/2026</a:t>
+              <a:t>10/1/2026</a:t>
             </a:fld>
             <a:endParaRPr lang="en-US"/>
           </a:p>
@@ -6395,7 +6395,7 @@
           <a:p>
             <a:fld id="{5BCAD085-E8A6-8845-BD4E-CB4CCA059FC4}" type="datetimeFigureOut">
               <a:rPr lang="en-US" smtClean="0"/>
-              <a:t>8/11/2026</a:t>
+              <a:t>10/1/2026</a:t>
             </a:fld>
             <a:endParaRPr lang="en-US"/>
           </a:p>

--- a/assets/docs/Presentation_projet_Symfony_Aureo_Ruffier.pptx
+++ b/assets/docs/Presentation_projet_Symfony_Aureo_Ruffier.pptx
@@ -5,7 +5,7 @@
     <p:sldMasterId id="2147483648" r:id="rId1"/>
   </p:sldMasterIdLst>
   <p:notesMasterIdLst>
-    <p:notesMasterId r:id="rId22"/>
+    <p:notesMasterId r:id="rId25"/>
   </p:notesMasterIdLst>
   <p:sldIdLst>
     <p:sldId id="256" r:id="rId2"/>
@@ -21,13 +21,16 @@
     <p:sldId id="278" r:id="rId12"/>
     <p:sldId id="263" r:id="rId13"/>
     <p:sldId id="264" r:id="rId14"/>
-    <p:sldId id="272" r:id="rId15"/>
-    <p:sldId id="265" r:id="rId16"/>
-    <p:sldId id="276" r:id="rId17"/>
-    <p:sldId id="266" r:id="rId18"/>
-    <p:sldId id="267" r:id="rId19"/>
-    <p:sldId id="269" r:id="rId20"/>
-    <p:sldId id="270" r:id="rId21"/>
+    <p:sldId id="279" r:id="rId15"/>
+    <p:sldId id="280" r:id="rId16"/>
+    <p:sldId id="272" r:id="rId17"/>
+    <p:sldId id="265" r:id="rId18"/>
+    <p:sldId id="276" r:id="rId19"/>
+    <p:sldId id="281" r:id="rId20"/>
+    <p:sldId id="266" r:id="rId21"/>
+    <p:sldId id="267" r:id="rId22"/>
+    <p:sldId id="269" r:id="rId23"/>
+    <p:sldId id="270" r:id="rId24"/>
   </p:sldIdLst>
   <p:sldSz cx="12192000" cy="6858000"/>
   <p:notesSz cx="6858000" cy="9144000"/>
@@ -1014,6 +1017,1070 @@
         <p:cNvPr id="1" name="">
           <a:extLst>
             <a:ext uri="{FF2B5EF4-FFF2-40B4-BE49-F238E27FC236}">
+              <a16:creationId xmlns:a16="http://schemas.microsoft.com/office/drawing/2014/main" id="{C5D7AC9E-FB79-2FFF-2E86-759977D00AF9}"/>
+            </a:ext>
+          </a:extLst>
+        </p:cNvPr>
+        <p:cNvGrpSpPr/>
+        <p:nvPr/>
+      </p:nvGrpSpPr>
+      <p:grpSpPr>
+        <a:xfrm>
+          <a:off x="0" y="0"/>
+          <a:ext cx="0" cy="0"/>
+          <a:chOff x="0" y="0"/>
+          <a:chExt cx="0" cy="0"/>
+        </a:xfrm>
+      </p:grpSpPr>
+      <p:sp>
+        <p:nvSpPr>
+          <p:cNvPr id="2" name="Slide Image Placeholder 1">
+            <a:extLst>
+              <a:ext uri="{FF2B5EF4-FFF2-40B4-BE49-F238E27FC236}">
+                <a16:creationId xmlns:a16="http://schemas.microsoft.com/office/drawing/2014/main" id="{09A51549-88C4-7ED2-3054-D924B9666492}"/>
+              </a:ext>
+            </a:extLst>
+          </p:cNvPr>
+          <p:cNvSpPr>
+            <a:spLocks noGrp="1" noRot="1" noChangeAspect="1"/>
+          </p:cNvSpPr>
+          <p:nvPr>
+            <p:ph type="sldImg" idx="2"/>
+          </p:nvPr>
+        </p:nvSpPr>
+        <p:spPr/>
+      </p:sp>
+      <p:sp>
+        <p:nvSpPr>
+          <p:cNvPr id="3" name="Notes Placeholder 2">
+            <a:extLst>
+              <a:ext uri="{FF2B5EF4-FFF2-40B4-BE49-F238E27FC236}">
+                <a16:creationId xmlns:a16="http://schemas.microsoft.com/office/drawing/2014/main" id="{EFA8F46E-7713-CE09-35B8-ABA25BFFB9C0}"/>
+              </a:ext>
+            </a:extLst>
+          </p:cNvPr>
+          <p:cNvSpPr>
+            <a:spLocks noGrp="1"/>
+          </p:cNvSpPr>
+          <p:nvPr>
+            <p:ph type="body" sz="quarter" idx="3"/>
+          </p:nvPr>
+        </p:nvSpPr>
+        <p:spPr/>
+        <p:txBody>
+          <a:bodyPr/>
+          <a:lstStyle/>
+          <a:p>
+            <a:r>
+              <a:rPr dirty="0"/>
+              <a:t>~1m30 : </a:t>
+            </a:r>
+            <a:r>
+              <a:rPr dirty="0" err="1"/>
+              <a:t>Montrer</a:t>
+            </a:r>
+            <a:r>
+              <a:rPr dirty="0"/>
+              <a:t> Repository → Doctrine → SQL.</a:t>
+            </a:r>
+            <a:endParaRPr lang="pt-BR" dirty="0"/>
+          </a:p>
+          <a:p>
+            <a:r>
+              <a:rPr lang="fr-FR" dirty="0"/>
+              <a:t>Un point important dans mon projet est l'utilisation de Doctrine.</a:t>
+            </a:r>
+          </a:p>
+          <a:p>
+            <a:r>
+              <a:rPr lang="fr-FR" dirty="0"/>
+              <a:t>Le </a:t>
+            </a:r>
+            <a:r>
+              <a:rPr lang="fr-FR" dirty="0" err="1"/>
+              <a:t>controller</a:t>
+            </a:r>
+            <a:r>
+              <a:rPr lang="fr-FR" dirty="0"/>
+              <a:t> ne communique pas directement avec </a:t>
+            </a:r>
+            <a:r>
+              <a:rPr lang="fr-FR" dirty="0" err="1"/>
+              <a:t>MariaDB</a:t>
+            </a:r>
+            <a:r>
+              <a:rPr lang="fr-FR" dirty="0"/>
+              <a:t>.</a:t>
+            </a:r>
+          </a:p>
+          <a:p>
+            <a:r>
+              <a:rPr lang="fr-FR" dirty="0"/>
+              <a:t>Il utilise un repository.</a:t>
+            </a:r>
+          </a:p>
+          <a:p>
+            <a:r>
+              <a:rPr lang="fr-FR" dirty="0"/>
+              <a:t>Dans le repository, je peux utiliser les méthodes fournies par Doctrine ou construire des requêtes plus spécifiques avec </a:t>
+            </a:r>
+            <a:r>
+              <a:rPr lang="fr-FR" dirty="0" err="1"/>
+              <a:t>QueryBuilder</a:t>
+            </a:r>
+            <a:r>
+              <a:rPr lang="fr-FR" dirty="0"/>
+              <a:t> et DQL.</a:t>
+            </a:r>
+          </a:p>
+          <a:p>
+            <a:r>
+              <a:rPr lang="fr-FR" dirty="0"/>
+              <a:t>Doctrine traduit ensuite cette logique en SQL compatible avec la base de données.</a:t>
+            </a:r>
+          </a:p>
+          <a:p>
+            <a:r>
+              <a:rPr lang="fr-FR" dirty="0"/>
+              <a:t>Par exemple, j'ai une méthode personnalisée « </a:t>
+            </a:r>
+            <a:r>
+              <a:rPr lang="fr-FR" dirty="0" err="1"/>
+              <a:t>findLatestApproved</a:t>
+            </a:r>
+            <a:r>
+              <a:rPr lang="fr-FR" dirty="0"/>
+              <a:t> » dans </a:t>
+            </a:r>
+            <a:r>
+              <a:rPr lang="fr-FR" dirty="0" err="1"/>
+              <a:t>ReviewRepository</a:t>
+            </a:r>
+            <a:r>
+              <a:rPr lang="fr-FR" dirty="0"/>
+              <a:t> pour récupérer les 6 dernières avis.</a:t>
+            </a:r>
+          </a:p>
+          <a:p>
+            <a:r>
+              <a:rPr lang="fr-FR" dirty="0"/>
+              <a:t>Cela permet de garder la logique d'accès aux données dans le repository plutôt que de mettre directement les requêtes dans le </a:t>
+            </a:r>
+            <a:r>
+              <a:rPr lang="fr-FR" dirty="0" err="1"/>
+              <a:t>controller</a:t>
+            </a:r>
+            <a:r>
+              <a:rPr lang="fr-FR" dirty="0"/>
+              <a:t>.</a:t>
+            </a:r>
+          </a:p>
+          <a:p>
+            <a:endParaRPr dirty="0"/>
+          </a:p>
+        </p:txBody>
+      </p:sp>
+      <p:sp>
+        <p:nvSpPr>
+          <p:cNvPr id="4" name="Slide Number Placeholder 3">
+            <a:extLst>
+              <a:ext uri="{FF2B5EF4-FFF2-40B4-BE49-F238E27FC236}">
+                <a16:creationId xmlns:a16="http://schemas.microsoft.com/office/drawing/2014/main" id="{C7F03960-5D09-2897-E151-A70182FEDFCA}"/>
+              </a:ext>
+            </a:extLst>
+          </p:cNvPr>
+          <p:cNvSpPr>
+            <a:spLocks noGrp="1"/>
+          </p:cNvSpPr>
+          <p:nvPr>
+            <p:ph type="sldNum" sz="quarter" idx="5"/>
+          </p:nvPr>
+        </p:nvSpPr>
+        <p:spPr/>
+      </p:sp>
+    </p:spTree>
+    <p:extLst>
+      <p:ext uri="{BB962C8B-B14F-4D97-AF65-F5344CB8AC3E}">
+        <p14:creationId xmlns:p14="http://schemas.microsoft.com/office/powerpoint/2010/main" val="4069217873"/>
+      </p:ext>
+    </p:extLst>
+  </p:cSld>
+  <p:clrMapOvr>
+    <a:masterClrMapping/>
+  </p:clrMapOvr>
+</p:notes>
+</file>
+
+<file path=ppt/notesSlides/notesSlide15.xml><?xml version="1.0" encoding="utf-8"?>
+<p:notes xmlns:a="http://schemas.openxmlformats.org/drawingml/2006/main" xmlns:r="http://schemas.openxmlformats.org/officeDocument/2006/relationships" xmlns:p="http://schemas.openxmlformats.org/presentationml/2006/main">
+  <p:cSld>
+    <p:spTree>
+      <p:nvGrpSpPr>
+        <p:cNvPr id="1" name="">
+          <a:extLst>
+            <a:ext uri="{FF2B5EF4-FFF2-40B4-BE49-F238E27FC236}">
+              <a16:creationId xmlns:a16="http://schemas.microsoft.com/office/drawing/2014/main" id="{BA434B4A-F2B5-C8E6-1957-6388687705F6}"/>
+            </a:ext>
+          </a:extLst>
+        </p:cNvPr>
+        <p:cNvGrpSpPr/>
+        <p:nvPr/>
+      </p:nvGrpSpPr>
+      <p:grpSpPr>
+        <a:xfrm>
+          <a:off x="0" y="0"/>
+          <a:ext cx="0" cy="0"/>
+          <a:chOff x="0" y="0"/>
+          <a:chExt cx="0" cy="0"/>
+        </a:xfrm>
+      </p:grpSpPr>
+      <p:sp>
+        <p:nvSpPr>
+          <p:cNvPr id="2" name="Slide Image Placeholder 1">
+            <a:extLst>
+              <a:ext uri="{FF2B5EF4-FFF2-40B4-BE49-F238E27FC236}">
+                <a16:creationId xmlns:a16="http://schemas.microsoft.com/office/drawing/2014/main" id="{B089ABAA-5A3E-AEC9-2263-1828BF91C961}"/>
+              </a:ext>
+            </a:extLst>
+          </p:cNvPr>
+          <p:cNvSpPr>
+            <a:spLocks noGrp="1" noRot="1" noChangeAspect="1"/>
+          </p:cNvSpPr>
+          <p:nvPr>
+            <p:ph type="sldImg" idx="2"/>
+          </p:nvPr>
+        </p:nvSpPr>
+        <p:spPr/>
+      </p:sp>
+      <p:sp>
+        <p:nvSpPr>
+          <p:cNvPr id="3" name="Notes Placeholder 2">
+            <a:extLst>
+              <a:ext uri="{FF2B5EF4-FFF2-40B4-BE49-F238E27FC236}">
+                <a16:creationId xmlns:a16="http://schemas.microsoft.com/office/drawing/2014/main" id="{9E44640F-1C24-77E4-AB3D-54EE8922C539}"/>
+              </a:ext>
+            </a:extLst>
+          </p:cNvPr>
+          <p:cNvSpPr>
+            <a:spLocks noGrp="1"/>
+          </p:cNvSpPr>
+          <p:nvPr>
+            <p:ph type="body" sz="quarter" idx="3"/>
+          </p:nvPr>
+        </p:nvSpPr>
+        <p:spPr/>
+        <p:txBody>
+          <a:bodyPr/>
+          <a:lstStyle/>
+          <a:p>
+            <a:r>
+              <a:rPr dirty="0"/>
+              <a:t>~2m : </a:t>
+            </a:r>
+            <a:r>
+              <a:rPr dirty="0" err="1"/>
+              <a:t>Expliquer</a:t>
+            </a:r>
+            <a:r>
+              <a:rPr dirty="0"/>
+              <a:t> </a:t>
+            </a:r>
+            <a:r>
+              <a:rPr lang="pt-BR" dirty="0"/>
+              <a:t>CRUD</a:t>
+            </a:r>
+            <a:r>
+              <a:rPr dirty="0"/>
+              <a:t>.</a:t>
+            </a:r>
+            <a:endParaRPr lang="pt-BR" dirty="0"/>
+          </a:p>
+          <a:p>
+            <a:endParaRPr lang="pt-BR" dirty="0"/>
+          </a:p>
+          <a:p>
+            <a:r>
+              <a:rPr lang="pt-BR" dirty="0" err="1"/>
+              <a:t>HandleRequest</a:t>
+            </a:r>
+            <a:r>
+              <a:rPr lang="pt-BR" dirty="0"/>
+              <a:t> : </a:t>
+            </a:r>
+            <a:r>
+              <a:rPr lang="fr-FR" dirty="0" err="1"/>
+              <a:t>Lê</a:t>
+            </a:r>
+            <a:r>
+              <a:rPr lang="fr-FR" dirty="0"/>
+              <a:t> os </a:t>
+            </a:r>
+            <a:r>
+              <a:rPr lang="fr-FR" dirty="0" err="1"/>
+              <a:t>dados</a:t>
+            </a:r>
+            <a:r>
+              <a:rPr lang="fr-FR" dirty="0"/>
+              <a:t> </a:t>
+            </a:r>
+            <a:r>
+              <a:rPr lang="fr-FR" dirty="0" err="1"/>
+              <a:t>enviados</a:t>
+            </a:r>
+            <a:r>
+              <a:rPr lang="fr-FR" dirty="0"/>
+              <a:t> pelo </a:t>
+            </a:r>
+            <a:r>
+              <a:rPr lang="fr-FR" dirty="0" err="1"/>
+              <a:t>usuário</a:t>
+            </a:r>
+            <a:r>
+              <a:rPr lang="fr-FR" dirty="0"/>
+              <a:t> na </a:t>
+            </a:r>
+            <a:r>
+              <a:rPr lang="fr-FR" dirty="0" err="1"/>
+              <a:t>requisição</a:t>
+            </a:r>
+            <a:r>
+              <a:rPr lang="fr-FR" dirty="0"/>
+              <a:t> HTTP e os </a:t>
+            </a:r>
+            <a:r>
+              <a:rPr lang="fr-FR" dirty="0" err="1"/>
+              <a:t>injeta</a:t>
+            </a:r>
+            <a:r>
+              <a:rPr lang="fr-FR" dirty="0"/>
+              <a:t> </a:t>
+            </a:r>
+            <a:r>
+              <a:rPr lang="fr-FR" dirty="0" err="1"/>
+              <a:t>dentro</a:t>
+            </a:r>
+            <a:r>
+              <a:rPr lang="fr-FR" dirty="0"/>
+              <a:t> do </a:t>
+            </a:r>
+            <a:r>
+              <a:rPr lang="fr-FR" dirty="0" err="1"/>
+              <a:t>formulário</a:t>
+            </a:r>
+            <a:r>
+              <a:rPr lang="fr-FR" dirty="0"/>
+              <a:t>.</a:t>
+            </a:r>
+          </a:p>
+          <a:p>
+            <a:r>
+              <a:rPr lang="fr-FR" dirty="0"/>
+              <a:t>O </a:t>
+            </a:r>
+            <a:r>
+              <a:rPr lang="fr-FR" dirty="0" err="1"/>
+              <a:t>código</a:t>
+            </a:r>
+            <a:r>
+              <a:rPr lang="fr-FR" dirty="0"/>
+              <a:t> HTTP </a:t>
+            </a:r>
+            <a:r>
+              <a:rPr lang="fr-FR" sz="1200" kern="1200" dirty="0" err="1">
+                <a:solidFill>
+                  <a:schemeClr val="tx1"/>
+                </a:solidFill>
+                <a:latin typeface="+mn-lt"/>
+                <a:ea typeface="+mn-ea"/>
+                <a:cs typeface="+mn-cs"/>
+              </a:rPr>
+              <a:t>Response</a:t>
+            </a:r>
+            <a:r>
+              <a:rPr lang="fr-FR" sz="1200" kern="1200" dirty="0">
+                <a:solidFill>
+                  <a:schemeClr val="tx1"/>
+                </a:solidFill>
+                <a:latin typeface="+mn-lt"/>
+                <a:ea typeface="+mn-ea"/>
+                <a:cs typeface="+mn-cs"/>
+              </a:rPr>
+              <a:t>::HTTP_SEE_OTHER</a:t>
+            </a:r>
+            <a:r>
+              <a:rPr lang="fr-FR" dirty="0"/>
+              <a:t> (</a:t>
+            </a:r>
+            <a:r>
+              <a:rPr lang="fr-FR" dirty="0" err="1"/>
+              <a:t>código</a:t>
+            </a:r>
+            <a:r>
+              <a:rPr lang="fr-FR" dirty="0"/>
+              <a:t> 303) garante que a </a:t>
+            </a:r>
+            <a:r>
+              <a:rPr lang="fr-FR" dirty="0" err="1"/>
+              <a:t>requisição</a:t>
+            </a:r>
+            <a:r>
+              <a:rPr lang="fr-FR" dirty="0"/>
+              <a:t> de </a:t>
+            </a:r>
+            <a:r>
+              <a:rPr lang="fr-FR" dirty="0" err="1"/>
+              <a:t>redirecionamento</a:t>
+            </a:r>
+            <a:r>
+              <a:rPr lang="fr-FR" dirty="0"/>
+              <a:t> mude </a:t>
+            </a:r>
+            <a:r>
+              <a:rPr lang="fr-FR" dirty="0" err="1"/>
+              <a:t>corretamente</a:t>
+            </a:r>
+            <a:r>
+              <a:rPr lang="fr-FR" dirty="0"/>
+              <a:t> para </a:t>
+            </a:r>
+            <a:r>
+              <a:rPr lang="fr-FR" sz="1200" kern="1200" dirty="0">
+                <a:solidFill>
+                  <a:schemeClr val="tx1"/>
+                </a:solidFill>
+                <a:latin typeface="+mn-lt"/>
+                <a:ea typeface="+mn-ea"/>
+                <a:cs typeface="+mn-cs"/>
+              </a:rPr>
+              <a:t>GET</a:t>
+            </a:r>
+            <a:r>
+              <a:rPr lang="fr-FR" dirty="0"/>
+              <a:t>.</a:t>
+            </a:r>
+          </a:p>
+          <a:p>
+            <a:endParaRPr lang="fr-FR" sz="1200" kern="1200" dirty="0">
+              <a:solidFill>
+                <a:schemeClr val="tx1"/>
+              </a:solidFill>
+              <a:latin typeface="+mn-lt"/>
+              <a:ea typeface="+mn-ea"/>
+              <a:cs typeface="+mn-cs"/>
+            </a:endParaRPr>
+          </a:p>
+          <a:p>
+            <a:r>
+              <a:rPr lang="fr-FR" sz="1200" kern="1200" dirty="0" err="1">
+                <a:solidFill>
+                  <a:schemeClr val="tx1"/>
+                </a:solidFill>
+                <a:latin typeface="+mn-lt"/>
+                <a:ea typeface="+mn-ea"/>
+                <a:cs typeface="+mn-cs"/>
+              </a:rPr>
+              <a:t>isCsrfTokenValid</a:t>
+            </a:r>
+            <a:r>
+              <a:rPr lang="fr-FR" sz="1200" kern="1200" dirty="0">
+                <a:solidFill>
+                  <a:schemeClr val="tx1"/>
+                </a:solidFill>
+                <a:latin typeface="+mn-lt"/>
+                <a:ea typeface="+mn-ea"/>
+                <a:cs typeface="+mn-cs"/>
+              </a:rPr>
+              <a:t>(...)</a:t>
+            </a:r>
+            <a:r>
+              <a:rPr lang="fr-FR" dirty="0"/>
+              <a:t>: Compara o </a:t>
+            </a:r>
+            <a:r>
+              <a:rPr lang="fr-FR" dirty="0" err="1"/>
+              <a:t>token</a:t>
+            </a:r>
+            <a:r>
+              <a:rPr lang="fr-FR" dirty="0"/>
+              <a:t> </a:t>
+            </a:r>
+            <a:r>
+              <a:rPr lang="fr-FR" dirty="0" err="1"/>
+              <a:t>enviado</a:t>
+            </a:r>
+            <a:r>
+              <a:rPr lang="fr-FR" dirty="0"/>
+              <a:t> com o </a:t>
+            </a:r>
+            <a:r>
+              <a:rPr lang="fr-FR" dirty="0" err="1"/>
+              <a:t>token</a:t>
+            </a:r>
+            <a:r>
+              <a:rPr lang="fr-FR" dirty="0"/>
+              <a:t> </a:t>
+            </a:r>
+            <a:r>
+              <a:rPr lang="fr-FR" dirty="0" err="1"/>
+              <a:t>gerado</a:t>
+            </a:r>
+            <a:r>
+              <a:rPr lang="fr-FR" dirty="0"/>
+              <a:t> pelo </a:t>
+            </a:r>
+            <a:r>
+              <a:rPr lang="fr-FR" dirty="0" err="1"/>
+              <a:t>servidor</a:t>
+            </a:r>
+            <a:r>
+              <a:rPr lang="fr-FR" dirty="0"/>
+              <a:t> para </a:t>
+            </a:r>
+            <a:r>
+              <a:rPr lang="fr-FR" dirty="0" err="1"/>
+              <a:t>aquela</a:t>
+            </a:r>
+            <a:r>
+              <a:rPr lang="fr-FR" dirty="0"/>
+              <a:t> </a:t>
+            </a:r>
+            <a:r>
+              <a:rPr lang="fr-FR" dirty="0" err="1"/>
+              <a:t>ação</a:t>
+            </a:r>
+            <a:r>
+              <a:rPr lang="fr-FR" dirty="0"/>
+              <a:t> </a:t>
+            </a:r>
+            <a:r>
+              <a:rPr lang="fr-FR" dirty="0" err="1"/>
+              <a:t>específica</a:t>
+            </a:r>
+            <a:r>
+              <a:rPr lang="fr-FR" dirty="0"/>
+              <a:t>.</a:t>
+            </a:r>
+          </a:p>
+          <a:p>
+            <a:r>
+              <a:rPr lang="fr-FR" dirty="0"/>
+              <a:t>O </a:t>
+            </a:r>
+            <a:r>
+              <a:rPr lang="fr-FR" dirty="0" err="1"/>
+              <a:t>identificador</a:t>
+            </a:r>
+            <a:r>
+              <a:rPr lang="fr-FR" dirty="0"/>
+              <a:t> </a:t>
+            </a:r>
+            <a:r>
+              <a:rPr lang="fr-FR" dirty="0" err="1"/>
+              <a:t>único</a:t>
+            </a:r>
+            <a:r>
+              <a:rPr lang="fr-FR" dirty="0"/>
+              <a:t> do </a:t>
+            </a:r>
+            <a:r>
+              <a:rPr lang="fr-FR" dirty="0" err="1"/>
+              <a:t>token</a:t>
+            </a:r>
+            <a:r>
+              <a:rPr lang="fr-FR" dirty="0"/>
+              <a:t> é composto pela string </a:t>
+            </a:r>
+            <a:r>
+              <a:rPr lang="fr-FR" sz="1200" kern="1200" dirty="0">
+                <a:solidFill>
+                  <a:schemeClr val="tx1"/>
+                </a:solidFill>
+                <a:latin typeface="+mn-lt"/>
+                <a:ea typeface="+mn-ea"/>
+                <a:cs typeface="+mn-cs"/>
+              </a:rPr>
+              <a:t>'</a:t>
+            </a:r>
+            <a:r>
+              <a:rPr lang="fr-FR" sz="1200" kern="1200" dirty="0" err="1">
+                <a:solidFill>
+                  <a:schemeClr val="tx1"/>
+                </a:solidFill>
+                <a:latin typeface="+mn-lt"/>
+                <a:ea typeface="+mn-ea"/>
+                <a:cs typeface="+mn-cs"/>
+              </a:rPr>
+              <a:t>delete</a:t>
+            </a:r>
+            <a:r>
+              <a:rPr lang="fr-FR" sz="1200" kern="1200" dirty="0">
+                <a:solidFill>
+                  <a:schemeClr val="tx1"/>
+                </a:solidFill>
+                <a:latin typeface="+mn-lt"/>
+                <a:ea typeface="+mn-ea"/>
+                <a:cs typeface="+mn-cs"/>
+              </a:rPr>
+              <a:t>'</a:t>
+            </a:r>
+            <a:r>
+              <a:rPr lang="fr-FR" dirty="0"/>
+              <a:t> </a:t>
+            </a:r>
+            <a:r>
+              <a:rPr lang="fr-FR" dirty="0" err="1"/>
+              <a:t>concatenada</a:t>
+            </a:r>
+            <a:r>
+              <a:rPr lang="fr-FR" dirty="0"/>
+              <a:t> com o ID da </a:t>
+            </a:r>
+            <a:r>
+              <a:rPr lang="fr-FR" dirty="0" err="1"/>
+              <a:t>avaliação</a:t>
+            </a:r>
+            <a:r>
+              <a:rPr lang="fr-FR" dirty="0"/>
+              <a:t> (</a:t>
+            </a:r>
+            <a:r>
+              <a:rPr lang="fr-FR" sz="1200" kern="1200" dirty="0">
+                <a:solidFill>
+                  <a:schemeClr val="tx1"/>
+                </a:solidFill>
+                <a:latin typeface="+mn-lt"/>
+                <a:ea typeface="+mn-ea"/>
+                <a:cs typeface="+mn-cs"/>
+              </a:rPr>
+              <a:t>$</a:t>
+            </a:r>
+            <a:r>
+              <a:rPr lang="fr-FR" sz="1200" kern="1200" dirty="0" err="1">
+                <a:solidFill>
+                  <a:schemeClr val="tx1"/>
+                </a:solidFill>
+                <a:latin typeface="+mn-lt"/>
+                <a:ea typeface="+mn-ea"/>
+                <a:cs typeface="+mn-cs"/>
+              </a:rPr>
+              <a:t>review</a:t>
+            </a:r>
+            <a:r>
+              <a:rPr lang="fr-FR" sz="1200" kern="1200" dirty="0">
+                <a:solidFill>
+                  <a:schemeClr val="tx1"/>
+                </a:solidFill>
+                <a:latin typeface="+mn-lt"/>
+                <a:ea typeface="+mn-ea"/>
+                <a:cs typeface="+mn-cs"/>
+              </a:rPr>
+              <a:t>-&gt;</a:t>
+            </a:r>
+            <a:r>
+              <a:rPr lang="fr-FR" sz="1200" kern="1200" dirty="0" err="1">
+                <a:solidFill>
+                  <a:schemeClr val="tx1"/>
+                </a:solidFill>
+                <a:latin typeface="+mn-lt"/>
+                <a:ea typeface="+mn-ea"/>
+                <a:cs typeface="+mn-cs"/>
+              </a:rPr>
+              <a:t>getId</a:t>
+            </a:r>
+            <a:r>
+              <a:rPr lang="fr-FR" sz="1200" kern="1200" dirty="0">
+                <a:solidFill>
+                  <a:schemeClr val="tx1"/>
+                </a:solidFill>
+                <a:latin typeface="+mn-lt"/>
+                <a:ea typeface="+mn-ea"/>
+                <a:cs typeface="+mn-cs"/>
+              </a:rPr>
+              <a:t>()</a:t>
+            </a:r>
+            <a:r>
+              <a:rPr lang="fr-FR" dirty="0"/>
+              <a:t>).</a:t>
+            </a:r>
+          </a:p>
+          <a:p>
+            <a:r>
+              <a:rPr lang="fr-FR" sz="1200" kern="1200" dirty="0">
+                <a:solidFill>
+                  <a:schemeClr val="tx1"/>
+                </a:solidFill>
+                <a:latin typeface="+mn-lt"/>
+                <a:ea typeface="+mn-ea"/>
+                <a:cs typeface="+mn-cs"/>
+              </a:rPr>
+              <a:t>$</a:t>
+            </a:r>
+            <a:r>
+              <a:rPr lang="fr-FR" sz="1200" kern="1200" dirty="0" err="1">
+                <a:solidFill>
+                  <a:schemeClr val="tx1"/>
+                </a:solidFill>
+                <a:latin typeface="+mn-lt"/>
+                <a:ea typeface="+mn-ea"/>
+                <a:cs typeface="+mn-cs"/>
+              </a:rPr>
+              <a:t>request</a:t>
+            </a:r>
+            <a:r>
+              <a:rPr lang="fr-FR" sz="1200" kern="1200" dirty="0">
+                <a:solidFill>
+                  <a:schemeClr val="tx1"/>
+                </a:solidFill>
+                <a:latin typeface="+mn-lt"/>
+                <a:ea typeface="+mn-ea"/>
+                <a:cs typeface="+mn-cs"/>
+              </a:rPr>
+              <a:t>-&gt;</a:t>
+            </a:r>
+            <a:r>
+              <a:rPr lang="fr-FR" sz="1200" kern="1200" dirty="0" err="1">
+                <a:solidFill>
+                  <a:schemeClr val="tx1"/>
+                </a:solidFill>
+                <a:latin typeface="+mn-lt"/>
+                <a:ea typeface="+mn-ea"/>
+                <a:cs typeface="+mn-cs"/>
+              </a:rPr>
+              <a:t>getPayload</a:t>
+            </a:r>
+            <a:r>
+              <a:rPr lang="fr-FR" sz="1200" kern="1200" dirty="0">
+                <a:solidFill>
+                  <a:schemeClr val="tx1"/>
+                </a:solidFill>
+                <a:latin typeface="+mn-lt"/>
+                <a:ea typeface="+mn-ea"/>
+                <a:cs typeface="+mn-cs"/>
+              </a:rPr>
+              <a:t>()-&gt;</a:t>
+            </a:r>
+            <a:r>
+              <a:rPr lang="fr-FR" sz="1200" kern="1200" dirty="0" err="1">
+                <a:solidFill>
+                  <a:schemeClr val="tx1"/>
+                </a:solidFill>
+                <a:latin typeface="+mn-lt"/>
+                <a:ea typeface="+mn-ea"/>
+                <a:cs typeface="+mn-cs"/>
+              </a:rPr>
+              <a:t>getString</a:t>
+            </a:r>
+            <a:r>
+              <a:rPr lang="fr-FR" sz="1200" kern="1200" dirty="0">
+                <a:solidFill>
+                  <a:schemeClr val="tx1"/>
+                </a:solidFill>
+                <a:latin typeface="+mn-lt"/>
+                <a:ea typeface="+mn-ea"/>
+                <a:cs typeface="+mn-cs"/>
+              </a:rPr>
+              <a:t>('_</a:t>
+            </a:r>
+            <a:r>
+              <a:rPr lang="fr-FR" sz="1200" kern="1200" dirty="0" err="1">
+                <a:solidFill>
+                  <a:schemeClr val="tx1"/>
+                </a:solidFill>
+                <a:latin typeface="+mn-lt"/>
+                <a:ea typeface="+mn-ea"/>
+                <a:cs typeface="+mn-cs"/>
+              </a:rPr>
+              <a:t>token</a:t>
+            </a:r>
+            <a:r>
+              <a:rPr lang="fr-FR" sz="1200" kern="1200" dirty="0">
+                <a:solidFill>
+                  <a:schemeClr val="tx1"/>
+                </a:solidFill>
+                <a:latin typeface="+mn-lt"/>
+                <a:ea typeface="+mn-ea"/>
+                <a:cs typeface="+mn-cs"/>
+              </a:rPr>
+              <a:t>')</a:t>
+            </a:r>
+            <a:r>
+              <a:rPr lang="fr-FR" dirty="0"/>
+              <a:t>: Busca de forma </a:t>
+            </a:r>
+            <a:r>
+              <a:rPr lang="fr-FR" dirty="0" err="1"/>
+              <a:t>segura</a:t>
+            </a:r>
+            <a:r>
+              <a:rPr lang="fr-FR" dirty="0"/>
+              <a:t> o </a:t>
+            </a:r>
+            <a:r>
+              <a:rPr lang="fr-FR" dirty="0" err="1"/>
+              <a:t>valor</a:t>
+            </a:r>
+            <a:r>
+              <a:rPr lang="fr-FR" dirty="0"/>
+              <a:t> do campo </a:t>
+            </a:r>
+            <a:r>
+              <a:rPr lang="fr-FR" dirty="0" err="1"/>
+              <a:t>oculto</a:t>
+            </a:r>
+            <a:r>
+              <a:rPr lang="fr-FR" dirty="0"/>
+              <a:t> </a:t>
+            </a:r>
+            <a:r>
+              <a:rPr lang="fr-FR" sz="1200" kern="1200" dirty="0">
+                <a:solidFill>
+                  <a:schemeClr val="tx1"/>
+                </a:solidFill>
+                <a:latin typeface="+mn-lt"/>
+                <a:ea typeface="+mn-ea"/>
+                <a:cs typeface="+mn-cs"/>
+              </a:rPr>
+              <a:t>_</a:t>
+            </a:r>
+            <a:r>
+              <a:rPr lang="fr-FR" sz="1200" kern="1200" dirty="0" err="1">
+                <a:solidFill>
+                  <a:schemeClr val="tx1"/>
+                </a:solidFill>
+                <a:latin typeface="+mn-lt"/>
+                <a:ea typeface="+mn-ea"/>
+                <a:cs typeface="+mn-cs"/>
+              </a:rPr>
+              <a:t>token</a:t>
+            </a:r>
+            <a:r>
+              <a:rPr lang="fr-FR" dirty="0"/>
+              <a:t> </a:t>
+            </a:r>
+            <a:r>
+              <a:rPr lang="fr-FR" dirty="0" err="1"/>
+              <a:t>enviado</a:t>
+            </a:r>
+            <a:r>
+              <a:rPr lang="fr-FR" dirty="0"/>
+              <a:t> </a:t>
+            </a:r>
+            <a:r>
+              <a:rPr lang="fr-FR" dirty="0" err="1"/>
+              <a:t>dentro</a:t>
+            </a:r>
+            <a:r>
+              <a:rPr lang="fr-FR" dirty="0"/>
+              <a:t> do </a:t>
+            </a:r>
+            <a:r>
+              <a:rPr lang="fr-FR" dirty="0" err="1"/>
+              <a:t>payload</a:t>
+            </a:r>
+            <a:r>
+              <a:rPr lang="fr-FR" dirty="0"/>
+              <a:t> da </a:t>
+            </a:r>
+            <a:r>
+              <a:rPr lang="fr-FR" dirty="0" err="1"/>
+              <a:t>requisição</a:t>
+            </a:r>
+            <a:r>
+              <a:rPr lang="fr-FR" dirty="0"/>
+              <a:t> POST.</a:t>
+            </a:r>
+          </a:p>
+          <a:p>
+            <a:pPr lvl="0"/>
+            <a:r>
+              <a:rPr lang="fr-FR" dirty="0" err="1"/>
+              <a:t>evitar</a:t>
+            </a:r>
+            <a:r>
+              <a:rPr lang="fr-FR" dirty="0"/>
+              <a:t> </a:t>
+            </a:r>
+            <a:r>
+              <a:rPr lang="fr-FR" dirty="0" err="1"/>
+              <a:t>ataques</a:t>
+            </a:r>
+            <a:r>
+              <a:rPr lang="fr-FR" dirty="0"/>
+              <a:t> de </a:t>
+            </a:r>
+            <a:r>
+              <a:rPr lang="fr-FR" i="1" dirty="0"/>
+              <a:t>Cross-Site </a:t>
+            </a:r>
+            <a:r>
+              <a:rPr lang="fr-FR" i="1" dirty="0" err="1"/>
+              <a:t>Request</a:t>
+            </a:r>
+            <a:r>
+              <a:rPr lang="fr-FR" i="1" dirty="0"/>
+              <a:t> </a:t>
+            </a:r>
+            <a:r>
+              <a:rPr lang="fr-FR" i="1" dirty="0" err="1"/>
+              <a:t>Forgery</a:t>
+            </a:r>
+            <a:r>
+              <a:rPr lang="fr-FR" i="1" dirty="0"/>
+              <a:t> (CSRF)</a:t>
+            </a:r>
+            <a:r>
+              <a:rPr lang="fr-FR" dirty="0"/>
+              <a:t>, </a:t>
+            </a:r>
+            <a:r>
+              <a:rPr lang="fr-FR" dirty="0" err="1"/>
+              <a:t>garantindo</a:t>
+            </a:r>
+            <a:r>
+              <a:rPr lang="fr-FR" dirty="0"/>
+              <a:t> que a </a:t>
+            </a:r>
+            <a:r>
+              <a:rPr lang="fr-FR" dirty="0" err="1"/>
+              <a:t>solicitação</a:t>
+            </a:r>
+            <a:r>
+              <a:rPr lang="fr-FR" dirty="0"/>
+              <a:t> de </a:t>
+            </a:r>
+            <a:r>
+              <a:rPr lang="fr-FR" dirty="0" err="1"/>
+              <a:t>exclusão</a:t>
+            </a:r>
+            <a:r>
+              <a:rPr lang="fr-FR" dirty="0"/>
+              <a:t> </a:t>
+            </a:r>
+            <a:r>
+              <a:rPr lang="fr-FR" dirty="0" err="1"/>
+              <a:t>realmente</a:t>
+            </a:r>
+            <a:r>
+              <a:rPr lang="fr-FR" dirty="0"/>
+              <a:t> </a:t>
+            </a:r>
+            <a:r>
+              <a:rPr lang="fr-FR" dirty="0" err="1"/>
+              <a:t>veio</a:t>
+            </a:r>
+            <a:r>
+              <a:rPr lang="fr-FR" dirty="0"/>
+              <a:t> do </a:t>
+            </a:r>
+            <a:r>
+              <a:rPr lang="fr-FR" dirty="0" err="1"/>
+              <a:t>nosso</a:t>
+            </a:r>
+            <a:r>
+              <a:rPr lang="fr-FR" dirty="0"/>
+              <a:t> site/</a:t>
+            </a:r>
+            <a:r>
+              <a:rPr lang="fr-FR" dirty="0" err="1"/>
+              <a:t>sistema</a:t>
+            </a:r>
+            <a:r>
+              <a:rPr lang="fr-FR" dirty="0"/>
+              <a:t> e </a:t>
+            </a:r>
+            <a:r>
+              <a:rPr lang="fr-FR" dirty="0" err="1"/>
+              <a:t>não</a:t>
+            </a:r>
+            <a:r>
+              <a:rPr lang="fr-FR" dirty="0"/>
+              <a:t> de um site </a:t>
+            </a:r>
+            <a:r>
+              <a:rPr lang="fr-FR" dirty="0" err="1"/>
+              <a:t>malicioso</a:t>
+            </a:r>
+            <a:r>
+              <a:rPr lang="fr-FR" dirty="0"/>
+              <a:t> </a:t>
+            </a:r>
+            <a:r>
+              <a:rPr lang="fr-FR" dirty="0" err="1"/>
+              <a:t>externo</a:t>
+            </a:r>
+            <a:r>
+              <a:rPr lang="fr-FR" dirty="0"/>
+              <a:t> </a:t>
+            </a:r>
+            <a:r>
+              <a:rPr lang="fr-FR" dirty="0" err="1"/>
+              <a:t>tentando</a:t>
+            </a:r>
+            <a:r>
+              <a:rPr lang="fr-FR" dirty="0"/>
+              <a:t> </a:t>
+            </a:r>
+            <a:r>
+              <a:rPr lang="fr-FR" dirty="0" err="1"/>
+              <a:t>forçar</a:t>
+            </a:r>
+            <a:r>
+              <a:rPr lang="fr-FR" dirty="0"/>
+              <a:t> a </a:t>
+            </a:r>
+            <a:r>
+              <a:rPr lang="fr-FR" dirty="0" err="1"/>
+              <a:t>ação</a:t>
+            </a:r>
+            <a:r>
+              <a:rPr lang="fr-FR" dirty="0"/>
+              <a:t>.</a:t>
+            </a:r>
+          </a:p>
+          <a:p>
+            <a:endParaRPr dirty="0"/>
+          </a:p>
+        </p:txBody>
+      </p:sp>
+      <p:sp>
+        <p:nvSpPr>
+          <p:cNvPr id="4" name="Slide Number Placeholder 3">
+            <a:extLst>
+              <a:ext uri="{FF2B5EF4-FFF2-40B4-BE49-F238E27FC236}">
+                <a16:creationId xmlns:a16="http://schemas.microsoft.com/office/drawing/2014/main" id="{774050EE-074D-3038-EB6D-ADB8CB9831B0}"/>
+              </a:ext>
+            </a:extLst>
+          </p:cNvPr>
+          <p:cNvSpPr>
+            <a:spLocks noGrp="1"/>
+          </p:cNvSpPr>
+          <p:nvPr>
+            <p:ph type="sldNum" sz="quarter" idx="5"/>
+          </p:nvPr>
+        </p:nvSpPr>
+        <p:spPr/>
+      </p:sp>
+    </p:spTree>
+    <p:extLst>
+      <p:ext uri="{BB962C8B-B14F-4D97-AF65-F5344CB8AC3E}">
+        <p14:creationId xmlns:p14="http://schemas.microsoft.com/office/powerpoint/2010/main" val="3146071783"/>
+      </p:ext>
+    </p:extLst>
+  </p:cSld>
+  <p:clrMapOvr>
+    <a:masterClrMapping/>
+  </p:clrMapOvr>
+</p:notes>
+</file>
+
+<file path=ppt/notesSlides/notesSlide16.xml><?xml version="1.0" encoding="utf-8"?>
+<p:notes xmlns:a="http://schemas.openxmlformats.org/drawingml/2006/main" xmlns:r="http://schemas.openxmlformats.org/officeDocument/2006/relationships" xmlns:p="http://schemas.openxmlformats.org/presentationml/2006/main">
+  <p:cSld>
+    <p:spTree>
+      <p:nvGrpSpPr>
+        <p:cNvPr id="1" name="">
+          <a:extLst>
+            <a:ext uri="{FF2B5EF4-FFF2-40B4-BE49-F238E27FC236}">
               <a16:creationId xmlns:a16="http://schemas.microsoft.com/office/drawing/2014/main" id="{B0BE95BA-2664-B704-434A-81C247A4D922}"/>
             </a:ext>
           </a:extLst>
@@ -1859,225 +2926,6 @@
     <p:extLst>
       <p:ext uri="{BB962C8B-B14F-4D97-AF65-F5344CB8AC3E}">
         <p14:creationId xmlns:p14="http://schemas.microsoft.com/office/powerpoint/2010/main" val="560285634"/>
-      </p:ext>
-    </p:extLst>
-  </p:cSld>
-  <p:clrMapOvr>
-    <a:masterClrMapping/>
-  </p:clrMapOvr>
-</p:notes>
-</file>
-
-<file path=ppt/notesSlides/notesSlide15.xml><?xml version="1.0" encoding="utf-8"?>
-<p:notes xmlns:a="http://schemas.openxmlformats.org/drawingml/2006/main" xmlns:r="http://schemas.openxmlformats.org/officeDocument/2006/relationships" xmlns:p="http://schemas.openxmlformats.org/presentationml/2006/main">
-  <p:cSld>
-    <p:spTree>
-      <p:nvGrpSpPr>
-        <p:cNvPr id="1" name=""/>
-        <p:cNvGrpSpPr/>
-        <p:nvPr/>
-      </p:nvGrpSpPr>
-      <p:grpSpPr>
-        <a:xfrm>
-          <a:off x="0" y="0"/>
-          <a:ext cx="0" cy="0"/>
-          <a:chOff x="0" y="0"/>
-          <a:chExt cx="0" cy="0"/>
-        </a:xfrm>
-      </p:grpSpPr>
-      <p:sp>
-        <p:nvSpPr>
-          <p:cNvPr id="2" name="Slide Image Placeholder 1"/>
-          <p:cNvSpPr>
-            <a:spLocks noGrp="1" noRot="1" noChangeAspect="1"/>
-          </p:cNvSpPr>
-          <p:nvPr>
-            <p:ph type="sldImg" idx="2"/>
-          </p:nvPr>
-        </p:nvSpPr>
-        <p:spPr/>
-      </p:sp>
-      <p:sp>
-        <p:nvSpPr>
-          <p:cNvPr id="3" name="Notes Placeholder 2"/>
-          <p:cNvSpPr>
-            <a:spLocks noGrp="1"/>
-          </p:cNvSpPr>
-          <p:nvPr>
-            <p:ph type="body" sz="quarter" idx="3"/>
-          </p:nvPr>
-        </p:nvSpPr>
-        <p:spPr/>
-        <p:txBody>
-          <a:bodyPr/>
-          <a:lstStyle/>
-          <a:p>
-            <a:r>
-              <a:rPr dirty="0"/>
-              <a:t>~1m : Forms, Security et Mailer.</a:t>
-            </a:r>
-            <a:endParaRPr lang="pt-BR" dirty="0"/>
-          </a:p>
-          <a:p>
-            <a:r>
-              <a:rPr lang="fr-FR" dirty="0"/>
-              <a:t>Symfony me permet également de gérer les formulaires.</a:t>
-            </a:r>
-          </a:p>
-          <a:p>
-            <a:r>
-              <a:rPr lang="fr-FR" dirty="0"/>
-              <a:t>J'utilise des classes </a:t>
-            </a:r>
-            <a:r>
-              <a:rPr lang="fr-FR" dirty="0" err="1"/>
-              <a:t>FormType</a:t>
-            </a:r>
-            <a:r>
-              <a:rPr lang="fr-FR" dirty="0"/>
-              <a:t> pour la création d'utilisateurs, les demandes de devis, les avis et les formulaires d'administration.</a:t>
-            </a:r>
-          </a:p>
-          <a:p>
-            <a:endParaRPr dirty="0"/>
-          </a:p>
-        </p:txBody>
-      </p:sp>
-      <p:sp>
-        <p:nvSpPr>
-          <p:cNvPr id="4" name="Slide Number Placeholder 3"/>
-          <p:cNvSpPr>
-            <a:spLocks noGrp="1"/>
-          </p:cNvSpPr>
-          <p:nvPr>
-            <p:ph type="sldNum" sz="quarter" idx="5"/>
-          </p:nvPr>
-        </p:nvSpPr>
-        <p:spPr/>
-      </p:sp>
-    </p:spTree>
-  </p:cSld>
-  <p:clrMapOvr>
-    <a:masterClrMapping/>
-  </p:clrMapOvr>
-</p:notes>
-</file>
-
-<file path=ppt/notesSlides/notesSlide16.xml><?xml version="1.0" encoding="utf-8"?>
-<p:notes xmlns:a="http://schemas.openxmlformats.org/drawingml/2006/main" xmlns:r="http://schemas.openxmlformats.org/officeDocument/2006/relationships" xmlns:p="http://schemas.openxmlformats.org/presentationml/2006/main">
-  <p:cSld>
-    <p:spTree>
-      <p:nvGrpSpPr>
-        <p:cNvPr id="1" name="">
-          <a:extLst>
-            <a:ext uri="{FF2B5EF4-FFF2-40B4-BE49-F238E27FC236}">
-              <a16:creationId xmlns:a16="http://schemas.microsoft.com/office/drawing/2014/main" id="{F7561664-256E-100F-1E97-40212D33EA46}"/>
-            </a:ext>
-          </a:extLst>
-        </p:cNvPr>
-        <p:cNvGrpSpPr/>
-        <p:nvPr/>
-      </p:nvGrpSpPr>
-      <p:grpSpPr>
-        <a:xfrm>
-          <a:off x="0" y="0"/>
-          <a:ext cx="0" cy="0"/>
-          <a:chOff x="0" y="0"/>
-          <a:chExt cx="0" cy="0"/>
-        </a:xfrm>
-      </p:grpSpPr>
-      <p:sp>
-        <p:nvSpPr>
-          <p:cNvPr id="2" name="Slide Image Placeholder 1">
-            <a:extLst>
-              <a:ext uri="{FF2B5EF4-FFF2-40B4-BE49-F238E27FC236}">
-                <a16:creationId xmlns:a16="http://schemas.microsoft.com/office/drawing/2014/main" id="{94CFDC0A-4B0D-09F9-86D9-ECEA885D33CE}"/>
-              </a:ext>
-            </a:extLst>
-          </p:cNvPr>
-          <p:cNvSpPr>
-            <a:spLocks noGrp="1" noRot="1" noChangeAspect="1"/>
-          </p:cNvSpPr>
-          <p:nvPr>
-            <p:ph type="sldImg" idx="2"/>
-          </p:nvPr>
-        </p:nvSpPr>
-        <p:spPr/>
-      </p:sp>
-      <p:sp>
-        <p:nvSpPr>
-          <p:cNvPr id="3" name="Notes Placeholder 2">
-            <a:extLst>
-              <a:ext uri="{FF2B5EF4-FFF2-40B4-BE49-F238E27FC236}">
-                <a16:creationId xmlns:a16="http://schemas.microsoft.com/office/drawing/2014/main" id="{29ABE0F3-864D-5B80-DD18-11119F175421}"/>
-              </a:ext>
-            </a:extLst>
-          </p:cNvPr>
-          <p:cNvSpPr>
-            <a:spLocks noGrp="1"/>
-          </p:cNvSpPr>
-          <p:nvPr>
-            <p:ph type="body" sz="quarter" idx="3"/>
-          </p:nvPr>
-        </p:nvSpPr>
-        <p:spPr/>
-        <p:txBody>
-          <a:bodyPr/>
-          <a:lstStyle/>
-          <a:p>
-            <a:r>
-              <a:rPr dirty="0"/>
-              <a:t>~1m : Forms, Security et Mailer.</a:t>
-            </a:r>
-            <a:endParaRPr lang="pt-BR" dirty="0"/>
-          </a:p>
-          <a:p>
-            <a:r>
-              <a:rPr lang="fr-FR" dirty="0"/>
-              <a:t>La sécurité est gérée avec le composant Security de Symfony.</a:t>
-            </a:r>
-          </a:p>
-          <a:p>
-            <a:r>
-              <a:rPr lang="fr-FR" dirty="0"/>
-              <a:t>Les mots de passe ne sont pas stockés en clair : ils sont </a:t>
-            </a:r>
-            <a:r>
-              <a:rPr lang="fr-FR" dirty="0" err="1"/>
-              <a:t>hashés</a:t>
-            </a:r>
-            <a:r>
-              <a:rPr lang="fr-FR" dirty="0"/>
-              <a:t> avant d'être enregistrés.</a:t>
-            </a:r>
-          </a:p>
-          <a:p>
-            <a:endParaRPr dirty="0"/>
-          </a:p>
-        </p:txBody>
-      </p:sp>
-      <p:sp>
-        <p:nvSpPr>
-          <p:cNvPr id="4" name="Slide Number Placeholder 3">
-            <a:extLst>
-              <a:ext uri="{FF2B5EF4-FFF2-40B4-BE49-F238E27FC236}">
-                <a16:creationId xmlns:a16="http://schemas.microsoft.com/office/drawing/2014/main" id="{CD913D0E-062F-9342-9C9F-EA0DFE33B75E}"/>
-              </a:ext>
-            </a:extLst>
-          </p:cNvPr>
-          <p:cNvSpPr>
-            <a:spLocks noGrp="1"/>
-          </p:cNvSpPr>
-          <p:nvPr>
-            <p:ph type="sldNum" sz="quarter" idx="5"/>
-          </p:nvPr>
-        </p:nvSpPr>
-        <p:spPr/>
-      </p:sp>
-    </p:spTree>
-    <p:extLst>
-      <p:ext uri="{BB962C8B-B14F-4D97-AF65-F5344CB8AC3E}">
-        <p14:creationId xmlns:p14="http://schemas.microsoft.com/office/powerpoint/2010/main" val="3299617376"/>
       </p:ext>
     </p:extLst>
   </p:cSld>
@@ -2133,24 +2981,32 @@
           <a:p>
             <a:r>
               <a:rPr dirty="0"/>
-              <a:t>~5m : </a:t>
-            </a:r>
-            <a:r>
-              <a:rPr dirty="0" err="1"/>
-              <a:t>Démonstration</a:t>
-            </a:r>
-            <a:r>
-              <a:rPr dirty="0"/>
-              <a:t> </a:t>
-            </a:r>
-            <a:r>
-              <a:rPr dirty="0" err="1"/>
-              <a:t>en</a:t>
-            </a:r>
-            <a:r>
-              <a:rPr dirty="0"/>
-              <a:t> direct.</a:t>
-            </a:r>
+              <a:t>~1m : Forms, Security et Mailer.</a:t>
+            </a:r>
+            <a:endParaRPr lang="pt-BR" dirty="0"/>
+          </a:p>
+          <a:p>
+            <a:r>
+              <a:rPr lang="fr-FR" dirty="0"/>
+              <a:t>Symfony me permet également de gérer les formulaires.</a:t>
+            </a:r>
+          </a:p>
+          <a:p>
+            <a:r>
+              <a:rPr lang="fr-FR" dirty="0"/>
+              <a:t>J'utilise des classes </a:t>
+            </a:r>
+            <a:r>
+              <a:rPr lang="fr-FR" dirty="0" err="1"/>
+              <a:t>FormType</a:t>
+            </a:r>
+            <a:r>
+              <a:rPr lang="fr-FR" dirty="0"/>
+              <a:t> pour la création d'utilisateurs, les demandes de devis, les avis et les formulaires d'administration.</a:t>
+            </a:r>
+          </a:p>
+          <a:p>
+            <a:endParaRPr dirty="0"/>
           </a:p>
         </p:txBody>
       </p:sp>
@@ -2179,7 +3035,13 @@
   <p:cSld>
     <p:spTree>
       <p:nvGrpSpPr>
-        <p:cNvPr id="1" name=""/>
+        <p:cNvPr id="1" name="">
+          <a:extLst>
+            <a:ext uri="{FF2B5EF4-FFF2-40B4-BE49-F238E27FC236}">
+              <a16:creationId xmlns:a16="http://schemas.microsoft.com/office/drawing/2014/main" id="{F7561664-256E-100F-1E97-40212D33EA46}"/>
+            </a:ext>
+          </a:extLst>
+        </p:cNvPr>
         <p:cNvGrpSpPr/>
         <p:nvPr/>
       </p:nvGrpSpPr>
@@ -2193,7 +3055,13 @@
       </p:grpSpPr>
       <p:sp>
         <p:nvSpPr>
-          <p:cNvPr id="2" name="Slide Image Placeholder 1"/>
+          <p:cNvPr id="2" name="Slide Image Placeholder 1">
+            <a:extLst>
+              <a:ext uri="{FF2B5EF4-FFF2-40B4-BE49-F238E27FC236}">
+                <a16:creationId xmlns:a16="http://schemas.microsoft.com/office/drawing/2014/main" id="{94CFDC0A-4B0D-09F9-86D9-ECEA885D33CE}"/>
+              </a:ext>
+            </a:extLst>
+          </p:cNvPr>
           <p:cNvSpPr>
             <a:spLocks noGrp="1" noRot="1" noChangeAspect="1"/>
           </p:cNvSpPr>
@@ -2205,7 +3073,13 @@
       </p:sp>
       <p:sp>
         <p:nvSpPr>
-          <p:cNvPr id="3" name="Notes Placeholder 2"/>
+          <p:cNvPr id="3" name="Notes Placeholder 2">
+            <a:extLst>
+              <a:ext uri="{FF2B5EF4-FFF2-40B4-BE49-F238E27FC236}">
+                <a16:creationId xmlns:a16="http://schemas.microsoft.com/office/drawing/2014/main" id="{29ABE0F3-864D-5B80-DD18-11119F175421}"/>
+              </a:ext>
+            </a:extLst>
+          </p:cNvPr>
           <p:cNvSpPr>
             <a:spLocks noGrp="1"/>
           </p:cNvSpPr>
@@ -2220,65 +3094,28 @@
           <a:p>
             <a:r>
               <a:rPr dirty="0"/>
-              <a:t>~1m30 : Donner 2-3 </a:t>
-            </a:r>
-            <a:r>
-              <a:rPr dirty="0" err="1"/>
-              <a:t>difficultés</a:t>
-            </a:r>
-            <a:r>
-              <a:rPr dirty="0"/>
-              <a:t> et solutions.</a:t>
+              <a:t>~1m : Forms, Security et Mailer.</a:t>
             </a:r>
             <a:endParaRPr lang="pt-BR" dirty="0"/>
           </a:p>
           <a:p>
             <a:r>
               <a:rPr lang="fr-FR" dirty="0"/>
-              <a:t>Une des premières difficultés a été de bien comprendre la manière dont les différentes parties de Symfony communiquent entre elles.</a:t>
-            </a:r>
-          </a:p>
-          <a:p>
-            <a:endParaRPr lang="fr-FR" dirty="0"/>
-          </a:p>
-          <a:p>
-            <a:r>
-              <a:rPr lang="fr-FR" dirty="0"/>
-              <a:t>Par exemple, il faut comprendre la différence entre une entité, un repository et un </a:t>
+              <a:t>La sécurité est gérée avec le composant Security de Symfony.</a:t>
+            </a:r>
+          </a:p>
+          <a:p>
+            <a:r>
+              <a:rPr lang="fr-FR" dirty="0"/>
+              <a:t>Les mots de passe ne sont pas stockés en clair : ils sont </a:t>
             </a:r>
             <a:r>
               <a:rPr lang="fr-FR" dirty="0" err="1"/>
-              <a:t>controller</a:t>
-            </a:r>
-            <a:r>
-              <a:rPr lang="fr-FR" dirty="0"/>
-              <a:t>, et surtout savoir où placer chaque responsabilité.</a:t>
-            </a:r>
-          </a:p>
-          <a:p>
-            <a:endParaRPr lang="fr-FR" dirty="0"/>
-          </a:p>
-          <a:p>
-            <a:r>
-              <a:rPr lang="fr-FR" dirty="0"/>
-              <a:t>J'ai également rencontré des difficultés avec les relations entre les entités Doctrine, notamment les relations entre produits et catégories.</a:t>
-            </a:r>
-          </a:p>
-          <a:p>
-            <a:endParaRPr lang="fr-FR" dirty="0"/>
-          </a:p>
-          <a:p>
-            <a:r>
-              <a:rPr lang="fr-FR" dirty="0"/>
-              <a:t>Côté </a:t>
-            </a:r>
-            <a:r>
-              <a:rPr lang="fr-FR" dirty="0" err="1"/>
-              <a:t>front-end</a:t>
-            </a:r>
-            <a:r>
-              <a:rPr lang="fr-FR" dirty="0"/>
-              <a:t>, l'intégration de la maquette a demandé plusieurs adaptations pour obtenir un résultat responsif.</a:t>
+              <a:t>hashés</a:t>
+            </a:r>
+            <a:r>
+              <a:rPr lang="fr-FR" dirty="0"/>
+              <a:t> avant d'être enregistrés.</a:t>
             </a:r>
           </a:p>
           <a:p>
@@ -2288,7 +3125,13 @@
       </p:sp>
       <p:sp>
         <p:nvSpPr>
-          <p:cNvPr id="4" name="Slide Number Placeholder 3"/>
+          <p:cNvPr id="4" name="Slide Number Placeholder 3">
+            <a:extLst>
+              <a:ext uri="{FF2B5EF4-FFF2-40B4-BE49-F238E27FC236}">
+                <a16:creationId xmlns:a16="http://schemas.microsoft.com/office/drawing/2014/main" id="{CD913D0E-062F-9342-9C9F-EA0DFE33B75E}"/>
+              </a:ext>
+            </a:extLst>
+          </p:cNvPr>
           <p:cNvSpPr>
             <a:spLocks noGrp="1"/>
           </p:cNvSpPr>
@@ -2299,6 +3142,11 @@
         <p:spPr/>
       </p:sp>
     </p:spTree>
+    <p:extLst>
+      <p:ext uri="{BB962C8B-B14F-4D97-AF65-F5344CB8AC3E}">
+        <p14:creationId xmlns:p14="http://schemas.microsoft.com/office/powerpoint/2010/main" val="3299617376"/>
+      </p:ext>
+    </p:extLst>
   </p:cSld>
   <p:clrMapOvr>
     <a:masterClrMapping/>
@@ -2311,7 +3159,13 @@
   <p:cSld>
     <p:spTree>
       <p:nvGrpSpPr>
-        <p:cNvPr id="1" name=""/>
+        <p:cNvPr id="1" name="">
+          <a:extLst>
+            <a:ext uri="{FF2B5EF4-FFF2-40B4-BE49-F238E27FC236}">
+              <a16:creationId xmlns:a16="http://schemas.microsoft.com/office/drawing/2014/main" id="{23E0D553-F6D1-9EC8-0D97-EAE97A433F78}"/>
+            </a:ext>
+          </a:extLst>
+        </p:cNvPr>
         <p:cNvGrpSpPr/>
         <p:nvPr/>
       </p:nvGrpSpPr>
@@ -2325,7 +3179,13 @@
       </p:grpSpPr>
       <p:sp>
         <p:nvSpPr>
-          <p:cNvPr id="2" name="Slide Image Placeholder 1"/>
+          <p:cNvPr id="2" name="Slide Image Placeholder 1">
+            <a:extLst>
+              <a:ext uri="{FF2B5EF4-FFF2-40B4-BE49-F238E27FC236}">
+                <a16:creationId xmlns:a16="http://schemas.microsoft.com/office/drawing/2014/main" id="{843A099F-78D6-2FDD-A36F-F00D24647CD8}"/>
+              </a:ext>
+            </a:extLst>
+          </p:cNvPr>
           <p:cNvSpPr>
             <a:spLocks noGrp="1" noRot="1" noChangeAspect="1"/>
           </p:cNvSpPr>
@@ -2337,7 +3197,13 @@
       </p:sp>
       <p:sp>
         <p:nvSpPr>
-          <p:cNvPr id="3" name="Notes Placeholder 2"/>
+          <p:cNvPr id="3" name="Notes Placeholder 2">
+            <a:extLst>
+              <a:ext uri="{FF2B5EF4-FFF2-40B4-BE49-F238E27FC236}">
+                <a16:creationId xmlns:a16="http://schemas.microsoft.com/office/drawing/2014/main" id="{0263753F-90EF-0B5C-62C3-91DC7E92A125}"/>
+              </a:ext>
+            </a:extLst>
+          </p:cNvPr>
           <p:cNvSpPr>
             <a:spLocks noGrp="1"/>
           </p:cNvSpPr>
@@ -2352,62 +3218,28 @@
           <a:p>
             <a:r>
               <a:rPr dirty="0"/>
-              <a:t>~1m : </a:t>
-            </a:r>
-            <a:r>
-              <a:rPr dirty="0" err="1"/>
-              <a:t>Présenter</a:t>
-            </a:r>
-            <a:r>
-              <a:rPr dirty="0"/>
-              <a:t> les </a:t>
-            </a:r>
-            <a:r>
-              <a:rPr dirty="0" err="1"/>
-              <a:t>évolutions</a:t>
-            </a:r>
-            <a:r>
-              <a:rPr dirty="0"/>
-              <a:t> </a:t>
-            </a:r>
-            <a:r>
-              <a:rPr dirty="0" err="1"/>
-              <a:t>prévues</a:t>
-            </a:r>
-            <a:r>
-              <a:rPr dirty="0"/>
-              <a:t>.</a:t>
+              <a:t>~1m : Forms, Security et Mailer.</a:t>
             </a:r>
             <a:endParaRPr lang="pt-BR" dirty="0"/>
           </a:p>
           <a:p>
             <a:r>
               <a:rPr lang="fr-FR" dirty="0"/>
-              <a:t>Le projet est encore en cours de développement, donc plusieurs évolutions sont prévues.</a:t>
-            </a:r>
-          </a:p>
-          <a:p>
-            <a:r>
-              <a:rPr lang="fr-FR" dirty="0"/>
-              <a:t>À court terme, je souhaite principalement finaliser certaines fonctionnalités existantes et améliorer les tests et les validations.</a:t>
-            </a:r>
-          </a:p>
-          <a:p>
-            <a:r>
-              <a:rPr lang="fr-FR" dirty="0"/>
-              <a:t>Ensuite, je pourrais ajouter la gestion des images, une recherche plus avancée, des filtres et une pagination.</a:t>
-            </a:r>
-          </a:p>
-          <a:p>
-            <a:r>
-              <a:rPr lang="fr-FR" dirty="0"/>
-              <a:t>À plus long terme, une évolution intéressante serait de permettre à un utilisateur de personnaliser directement un produit avant de faire une demande de devis.</a:t>
-            </a:r>
-          </a:p>
-          <a:p>
-            <a:r>
-              <a:rPr lang="fr-FR" dirty="0"/>
-              <a:t>Enfin, l'objectif final serait de pouvoir mettre l'application en production.</a:t>
+              <a:t>La sécurité est gérée avec le composant Security de Symfony.</a:t>
+            </a:r>
+          </a:p>
+          <a:p>
+            <a:r>
+              <a:rPr lang="fr-FR" dirty="0"/>
+              <a:t>Les mots de passe ne sont pas stockés en clair : ils sont </a:t>
+            </a:r>
+            <a:r>
+              <a:rPr lang="fr-FR" dirty="0" err="1"/>
+              <a:t>hashés</a:t>
+            </a:r>
+            <a:r>
+              <a:rPr lang="fr-FR" dirty="0"/>
+              <a:t> avant d'être enregistrés.</a:t>
             </a:r>
           </a:p>
           <a:p>
@@ -2417,7 +3249,13 @@
       </p:sp>
       <p:sp>
         <p:nvSpPr>
-          <p:cNvPr id="4" name="Slide Number Placeholder 3"/>
+          <p:cNvPr id="4" name="Slide Number Placeholder 3">
+            <a:extLst>
+              <a:ext uri="{FF2B5EF4-FFF2-40B4-BE49-F238E27FC236}">
+                <a16:creationId xmlns:a16="http://schemas.microsoft.com/office/drawing/2014/main" id="{BB2DFBFA-1AF3-0C4A-394C-AB020D185E19}"/>
+              </a:ext>
+            </a:extLst>
+          </p:cNvPr>
           <p:cNvSpPr>
             <a:spLocks noGrp="1"/>
           </p:cNvSpPr>
@@ -2428,6 +3266,11 @@
         <p:spPr/>
       </p:sp>
     </p:spTree>
+    <p:extLst>
+      <p:ext uri="{BB962C8B-B14F-4D97-AF65-F5344CB8AC3E}">
+        <p14:creationId xmlns:p14="http://schemas.microsoft.com/office/powerpoint/2010/main" val="1024559357"/>
+      </p:ext>
+    </p:extLst>
   </p:cSld>
   <p:clrMapOvr>
     <a:masterClrMapping/>
@@ -2581,6 +3424,354 @@
 </file>
 
 <file path=ppt/notesSlides/notesSlide20.xml><?xml version="1.0" encoding="utf-8"?>
+<p:notes xmlns:a="http://schemas.openxmlformats.org/drawingml/2006/main" xmlns:r="http://schemas.openxmlformats.org/officeDocument/2006/relationships" xmlns:p="http://schemas.openxmlformats.org/presentationml/2006/main">
+  <p:cSld>
+    <p:spTree>
+      <p:nvGrpSpPr>
+        <p:cNvPr id="1" name=""/>
+        <p:cNvGrpSpPr/>
+        <p:nvPr/>
+      </p:nvGrpSpPr>
+      <p:grpSpPr>
+        <a:xfrm>
+          <a:off x="0" y="0"/>
+          <a:ext cx="0" cy="0"/>
+          <a:chOff x="0" y="0"/>
+          <a:chExt cx="0" cy="0"/>
+        </a:xfrm>
+      </p:grpSpPr>
+      <p:sp>
+        <p:nvSpPr>
+          <p:cNvPr id="2" name="Slide Image Placeholder 1"/>
+          <p:cNvSpPr>
+            <a:spLocks noGrp="1" noRot="1" noChangeAspect="1"/>
+          </p:cNvSpPr>
+          <p:nvPr>
+            <p:ph type="sldImg" idx="2"/>
+          </p:nvPr>
+        </p:nvSpPr>
+        <p:spPr/>
+      </p:sp>
+      <p:sp>
+        <p:nvSpPr>
+          <p:cNvPr id="3" name="Notes Placeholder 2"/>
+          <p:cNvSpPr>
+            <a:spLocks noGrp="1"/>
+          </p:cNvSpPr>
+          <p:nvPr>
+            <p:ph type="body" sz="quarter" idx="3"/>
+          </p:nvPr>
+        </p:nvSpPr>
+        <p:spPr/>
+        <p:txBody>
+          <a:bodyPr/>
+          <a:lstStyle/>
+          <a:p>
+            <a:r>
+              <a:rPr dirty="0"/>
+              <a:t>~5m : </a:t>
+            </a:r>
+            <a:r>
+              <a:rPr dirty="0" err="1"/>
+              <a:t>Démonstration</a:t>
+            </a:r>
+            <a:r>
+              <a:rPr dirty="0"/>
+              <a:t> </a:t>
+            </a:r>
+            <a:r>
+              <a:rPr dirty="0" err="1"/>
+              <a:t>en</a:t>
+            </a:r>
+            <a:r>
+              <a:rPr dirty="0"/>
+              <a:t> direct.</a:t>
+            </a:r>
+          </a:p>
+        </p:txBody>
+      </p:sp>
+      <p:sp>
+        <p:nvSpPr>
+          <p:cNvPr id="4" name="Slide Number Placeholder 3"/>
+          <p:cNvSpPr>
+            <a:spLocks noGrp="1"/>
+          </p:cNvSpPr>
+          <p:nvPr>
+            <p:ph type="sldNum" sz="quarter" idx="5"/>
+          </p:nvPr>
+        </p:nvSpPr>
+        <p:spPr/>
+      </p:sp>
+    </p:spTree>
+  </p:cSld>
+  <p:clrMapOvr>
+    <a:masterClrMapping/>
+  </p:clrMapOvr>
+</p:notes>
+</file>
+
+<file path=ppt/notesSlides/notesSlide21.xml><?xml version="1.0" encoding="utf-8"?>
+<p:notes xmlns:a="http://schemas.openxmlformats.org/drawingml/2006/main" xmlns:r="http://schemas.openxmlformats.org/officeDocument/2006/relationships" xmlns:p="http://schemas.openxmlformats.org/presentationml/2006/main">
+  <p:cSld>
+    <p:spTree>
+      <p:nvGrpSpPr>
+        <p:cNvPr id="1" name=""/>
+        <p:cNvGrpSpPr/>
+        <p:nvPr/>
+      </p:nvGrpSpPr>
+      <p:grpSpPr>
+        <a:xfrm>
+          <a:off x="0" y="0"/>
+          <a:ext cx="0" cy="0"/>
+          <a:chOff x="0" y="0"/>
+          <a:chExt cx="0" cy="0"/>
+        </a:xfrm>
+      </p:grpSpPr>
+      <p:sp>
+        <p:nvSpPr>
+          <p:cNvPr id="2" name="Slide Image Placeholder 1"/>
+          <p:cNvSpPr>
+            <a:spLocks noGrp="1" noRot="1" noChangeAspect="1"/>
+          </p:cNvSpPr>
+          <p:nvPr>
+            <p:ph type="sldImg" idx="2"/>
+          </p:nvPr>
+        </p:nvSpPr>
+        <p:spPr/>
+      </p:sp>
+      <p:sp>
+        <p:nvSpPr>
+          <p:cNvPr id="3" name="Notes Placeholder 2"/>
+          <p:cNvSpPr>
+            <a:spLocks noGrp="1"/>
+          </p:cNvSpPr>
+          <p:nvPr>
+            <p:ph type="body" sz="quarter" idx="3"/>
+          </p:nvPr>
+        </p:nvSpPr>
+        <p:spPr/>
+        <p:txBody>
+          <a:bodyPr/>
+          <a:lstStyle/>
+          <a:p>
+            <a:r>
+              <a:rPr dirty="0"/>
+              <a:t>~1m30 : Donner 2-3 </a:t>
+            </a:r>
+            <a:r>
+              <a:rPr dirty="0" err="1"/>
+              <a:t>difficultés</a:t>
+            </a:r>
+            <a:r>
+              <a:rPr dirty="0"/>
+              <a:t> et solutions.</a:t>
+            </a:r>
+            <a:endParaRPr lang="pt-BR" dirty="0"/>
+          </a:p>
+          <a:p>
+            <a:r>
+              <a:rPr lang="fr-FR" dirty="0"/>
+              <a:t>Une des premières difficultés a été de bien comprendre la manière dont les différentes parties de Symfony communiquent entre elles.</a:t>
+            </a:r>
+          </a:p>
+          <a:p>
+            <a:endParaRPr lang="fr-FR" dirty="0"/>
+          </a:p>
+          <a:p>
+            <a:r>
+              <a:rPr lang="fr-FR" dirty="0"/>
+              <a:t>Par exemple, il faut comprendre la différence entre une entité, un repository et un </a:t>
+            </a:r>
+            <a:r>
+              <a:rPr lang="fr-FR" dirty="0" err="1"/>
+              <a:t>controller</a:t>
+            </a:r>
+            <a:r>
+              <a:rPr lang="fr-FR" dirty="0"/>
+              <a:t>, et surtout savoir où placer chaque responsabilité.</a:t>
+            </a:r>
+          </a:p>
+          <a:p>
+            <a:endParaRPr lang="fr-FR" dirty="0"/>
+          </a:p>
+          <a:p>
+            <a:r>
+              <a:rPr lang="fr-FR" dirty="0"/>
+              <a:t>J'ai également rencontré des difficultés avec les relations entre les entités Doctrine, notamment les relations entre produits et catégories.</a:t>
+            </a:r>
+          </a:p>
+          <a:p>
+            <a:endParaRPr lang="fr-FR" dirty="0"/>
+          </a:p>
+          <a:p>
+            <a:r>
+              <a:rPr lang="fr-FR" dirty="0"/>
+              <a:t>Côté </a:t>
+            </a:r>
+            <a:r>
+              <a:rPr lang="fr-FR" dirty="0" err="1"/>
+              <a:t>front-end</a:t>
+            </a:r>
+            <a:r>
+              <a:rPr lang="fr-FR" dirty="0"/>
+              <a:t>, l'intégration de la maquette a demandé plusieurs adaptations pour obtenir un résultat responsif.</a:t>
+            </a:r>
+          </a:p>
+          <a:p>
+            <a:endParaRPr dirty="0"/>
+          </a:p>
+        </p:txBody>
+      </p:sp>
+      <p:sp>
+        <p:nvSpPr>
+          <p:cNvPr id="4" name="Slide Number Placeholder 3"/>
+          <p:cNvSpPr>
+            <a:spLocks noGrp="1"/>
+          </p:cNvSpPr>
+          <p:nvPr>
+            <p:ph type="sldNum" sz="quarter" idx="5"/>
+          </p:nvPr>
+        </p:nvSpPr>
+        <p:spPr/>
+      </p:sp>
+    </p:spTree>
+  </p:cSld>
+  <p:clrMapOvr>
+    <a:masterClrMapping/>
+  </p:clrMapOvr>
+</p:notes>
+</file>
+
+<file path=ppt/notesSlides/notesSlide22.xml><?xml version="1.0" encoding="utf-8"?>
+<p:notes xmlns:a="http://schemas.openxmlformats.org/drawingml/2006/main" xmlns:r="http://schemas.openxmlformats.org/officeDocument/2006/relationships" xmlns:p="http://schemas.openxmlformats.org/presentationml/2006/main">
+  <p:cSld>
+    <p:spTree>
+      <p:nvGrpSpPr>
+        <p:cNvPr id="1" name=""/>
+        <p:cNvGrpSpPr/>
+        <p:nvPr/>
+      </p:nvGrpSpPr>
+      <p:grpSpPr>
+        <a:xfrm>
+          <a:off x="0" y="0"/>
+          <a:ext cx="0" cy="0"/>
+          <a:chOff x="0" y="0"/>
+          <a:chExt cx="0" cy="0"/>
+        </a:xfrm>
+      </p:grpSpPr>
+      <p:sp>
+        <p:nvSpPr>
+          <p:cNvPr id="2" name="Slide Image Placeholder 1"/>
+          <p:cNvSpPr>
+            <a:spLocks noGrp="1" noRot="1" noChangeAspect="1"/>
+          </p:cNvSpPr>
+          <p:nvPr>
+            <p:ph type="sldImg" idx="2"/>
+          </p:nvPr>
+        </p:nvSpPr>
+        <p:spPr/>
+      </p:sp>
+      <p:sp>
+        <p:nvSpPr>
+          <p:cNvPr id="3" name="Notes Placeholder 2"/>
+          <p:cNvSpPr>
+            <a:spLocks noGrp="1"/>
+          </p:cNvSpPr>
+          <p:nvPr>
+            <p:ph type="body" sz="quarter" idx="3"/>
+          </p:nvPr>
+        </p:nvSpPr>
+        <p:spPr/>
+        <p:txBody>
+          <a:bodyPr/>
+          <a:lstStyle/>
+          <a:p>
+            <a:r>
+              <a:rPr dirty="0"/>
+              <a:t>~1m : </a:t>
+            </a:r>
+            <a:r>
+              <a:rPr dirty="0" err="1"/>
+              <a:t>Présenter</a:t>
+            </a:r>
+            <a:r>
+              <a:rPr dirty="0"/>
+              <a:t> les </a:t>
+            </a:r>
+            <a:r>
+              <a:rPr dirty="0" err="1"/>
+              <a:t>évolutions</a:t>
+            </a:r>
+            <a:r>
+              <a:rPr dirty="0"/>
+              <a:t> </a:t>
+            </a:r>
+            <a:r>
+              <a:rPr dirty="0" err="1"/>
+              <a:t>prévues</a:t>
+            </a:r>
+            <a:r>
+              <a:rPr dirty="0"/>
+              <a:t>.</a:t>
+            </a:r>
+            <a:endParaRPr lang="pt-BR" dirty="0"/>
+          </a:p>
+          <a:p>
+            <a:r>
+              <a:rPr lang="fr-FR" dirty="0"/>
+              <a:t>Le projet est encore en cours de développement, donc plusieurs évolutions sont prévues.</a:t>
+            </a:r>
+          </a:p>
+          <a:p>
+            <a:r>
+              <a:rPr lang="fr-FR" dirty="0"/>
+              <a:t>À court terme, je souhaite principalement finaliser certaines fonctionnalités existantes et améliorer les tests et les validations.</a:t>
+            </a:r>
+          </a:p>
+          <a:p>
+            <a:r>
+              <a:rPr lang="fr-FR" dirty="0"/>
+              <a:t>Ensuite, je pourrais ajouter la gestion des images, une recherche plus avancée, des filtres et une pagination.</a:t>
+            </a:r>
+          </a:p>
+          <a:p>
+            <a:r>
+              <a:rPr lang="fr-FR" dirty="0"/>
+              <a:t>À plus long terme, une évolution intéressante serait de permettre à un utilisateur de personnaliser directement un produit avant de faire une demande de devis.</a:t>
+            </a:r>
+          </a:p>
+          <a:p>
+            <a:r>
+              <a:rPr lang="fr-FR" dirty="0"/>
+              <a:t>Enfin, l'objectif final serait de pouvoir mettre l'application en production.</a:t>
+            </a:r>
+          </a:p>
+          <a:p>
+            <a:endParaRPr dirty="0"/>
+          </a:p>
+        </p:txBody>
+      </p:sp>
+      <p:sp>
+        <p:nvSpPr>
+          <p:cNvPr id="4" name="Slide Number Placeholder 3"/>
+          <p:cNvSpPr>
+            <a:spLocks noGrp="1"/>
+          </p:cNvSpPr>
+          <p:nvPr>
+            <p:ph type="sldNum" sz="quarter" idx="5"/>
+          </p:nvPr>
+        </p:nvSpPr>
+        <p:spPr/>
+      </p:sp>
+    </p:spTree>
+  </p:cSld>
+  <p:clrMapOvr>
+    <a:masterClrMapping/>
+  </p:clrMapOvr>
+</p:notes>
+</file>
+
+<file path=ppt/notesSlides/notesSlide23.xml><?xml version="1.0" encoding="utf-8"?>
 <p:notes xmlns:a="http://schemas.openxmlformats.org/drawingml/2006/main" xmlns:r="http://schemas.openxmlformats.org/officeDocument/2006/relationships" xmlns:p="http://schemas.openxmlformats.org/presentationml/2006/main">
   <p:cSld>
     <p:spTree>
@@ -3970,7 +5161,7 @@
           <a:bodyPr/>
           <a:lstStyle/>
           <a:p>
-            <a:fld id="{5BCAD085-E8A6-8845-BD4E-CB4CCA059FC4}" type="datetimeFigureOut">
+            <a:fld id="{13F0BBF9-FDDA-4B23-B401-580D566EDE34}" type="datetime1">
               <a:rPr lang="en-US" smtClean="0"/>
               <a:t>10/1/2026</a:t>
             </a:fld>
@@ -4138,7 +5329,7 @@
           <a:bodyPr/>
           <a:lstStyle/>
           <a:p>
-            <a:fld id="{5BCAD085-E8A6-8845-BD4E-CB4CCA059FC4}" type="datetimeFigureOut">
+            <a:fld id="{9279FFBD-AE49-41AD-83FB-FE94F5340E39}" type="datetime1">
               <a:rPr lang="en-US" smtClean="0"/>
               <a:t>10/1/2026</a:t>
             </a:fld>
@@ -4316,7 +5507,7 @@
           <a:bodyPr/>
           <a:lstStyle/>
           <a:p>
-            <a:fld id="{5BCAD085-E8A6-8845-BD4E-CB4CCA059FC4}" type="datetimeFigureOut">
+            <a:fld id="{8C0E8715-E3F0-4689-8D1F-767FDF19E4B2}" type="datetime1">
               <a:rPr lang="en-US" smtClean="0"/>
               <a:t>10/1/2026</a:t>
             </a:fld>
@@ -4484,7 +5675,7 @@
           <a:bodyPr/>
           <a:lstStyle/>
           <a:p>
-            <a:fld id="{5BCAD085-E8A6-8845-BD4E-CB4CCA059FC4}" type="datetimeFigureOut">
+            <a:fld id="{D68F0B54-4CA1-462C-A3CA-145342ABB252}" type="datetime1">
               <a:rPr lang="en-US" smtClean="0"/>
               <a:t>10/1/2026</a:t>
             </a:fld>
@@ -4729,7 +5920,7 @@
           <a:bodyPr/>
           <a:lstStyle/>
           <a:p>
-            <a:fld id="{5BCAD085-E8A6-8845-BD4E-CB4CCA059FC4}" type="datetimeFigureOut">
+            <a:fld id="{19FC4D4C-880A-4F8B-B5C2-53B3C9C28657}" type="datetime1">
               <a:rPr lang="en-US" smtClean="0"/>
               <a:t>10/1/2026</a:t>
             </a:fld>
@@ -5014,7 +6205,7 @@
           <a:bodyPr/>
           <a:lstStyle/>
           <a:p>
-            <a:fld id="{5BCAD085-E8A6-8845-BD4E-CB4CCA059FC4}" type="datetimeFigureOut">
+            <a:fld id="{C1023AE9-28DD-4232-84BB-EC01B1CFADA4}" type="datetime1">
               <a:rPr lang="en-US" smtClean="0"/>
               <a:t>10/1/2026</a:t>
             </a:fld>
@@ -5433,7 +6624,7 @@
           <a:bodyPr/>
           <a:lstStyle/>
           <a:p>
-            <a:fld id="{5BCAD085-E8A6-8845-BD4E-CB4CCA059FC4}" type="datetimeFigureOut">
+            <a:fld id="{E3BD6F03-AB67-4719-A2A7-2BBD689EEC74}" type="datetime1">
               <a:rPr lang="en-US" smtClean="0"/>
               <a:t>10/1/2026</a:t>
             </a:fld>
@@ -5550,7 +6741,7 @@
           <a:bodyPr/>
           <a:lstStyle/>
           <a:p>
-            <a:fld id="{5BCAD085-E8A6-8845-BD4E-CB4CCA059FC4}" type="datetimeFigureOut">
+            <a:fld id="{4FD7D015-B9A4-41F9-B951-2C0BCF7D78D1}" type="datetime1">
               <a:rPr lang="en-US" smtClean="0"/>
               <a:t>10/1/2026</a:t>
             </a:fld>
@@ -5645,7 +6836,7 @@
           <a:bodyPr/>
           <a:lstStyle/>
           <a:p>
-            <a:fld id="{5BCAD085-E8A6-8845-BD4E-CB4CCA059FC4}" type="datetimeFigureOut">
+            <a:fld id="{6310009B-7227-4240-9450-4F66351B3DBE}" type="datetime1">
               <a:rPr lang="en-US" smtClean="0"/>
               <a:t>10/1/2026</a:t>
             </a:fld>
@@ -5682,16 +6873,34 @@
             <p:ph type="sldNum" sz="quarter" idx="12"/>
           </p:nvPr>
         </p:nvSpPr>
-        <p:spPr/>
+        <p:spPr>
+          <a:xfrm>
+            <a:off x="9809018" y="6311900"/>
+            <a:ext cx="2133600" cy="365125"/>
+          </a:xfrm>
+        </p:spPr>
         <p:txBody>
           <a:bodyPr/>
-          <a:lstStyle/>
+          <a:lstStyle>
+            <a:lvl1pPr>
+              <a:defRPr sz="2000">
+                <a:solidFill>
+                  <a:schemeClr val="tx1"/>
+                </a:solidFill>
+              </a:defRPr>
+            </a:lvl1pPr>
+          </a:lstStyle>
           <a:p>
             <a:fld id="{C1FF6DA9-008F-8B48-92A6-B652298478BF}" type="slidenum">
               <a:rPr lang="en-US" smtClean="0"/>
+              <a:pPr/>
               <a:t>‹N°›</a:t>
             </a:fld>
-            <a:endParaRPr lang="en-US"/>
+            <a:endParaRPr lang="en-US" dirty="0">
+              <a:solidFill>
+                <a:schemeClr val="tx1"/>
+              </a:solidFill>
+            </a:endParaRPr>
           </a:p>
         </p:txBody>
       </p:sp>
@@ -5920,7 +7129,7 @@
           <a:bodyPr/>
           <a:lstStyle/>
           <a:p>
-            <a:fld id="{5BCAD085-E8A6-8845-BD4E-CB4CCA059FC4}" type="datetimeFigureOut">
+            <a:fld id="{275A1ACD-57D8-4D0A-A94D-EA57B0159C4D}" type="datetime1">
               <a:rPr lang="en-US" smtClean="0"/>
               <a:t>10/1/2026</a:t>
             </a:fld>
@@ -6172,7 +7381,7 @@
           <a:bodyPr/>
           <a:lstStyle/>
           <a:p>
-            <a:fld id="{5BCAD085-E8A6-8845-BD4E-CB4CCA059FC4}" type="datetimeFigureOut">
+            <a:fld id="{7A5BC11E-83E0-47F6-B517-684087A81E6E}" type="datetime1">
               <a:rPr lang="en-US" smtClean="0"/>
               <a:t>10/1/2026</a:t>
             </a:fld>
@@ -6393,7 +7602,7 @@
             </a:lvl1pPr>
           </a:lstStyle>
           <a:p>
-            <a:fld id="{5BCAD085-E8A6-8845-BD4E-CB4CCA059FC4}" type="datetimeFigureOut">
+            <a:fld id="{63AE1938-7668-4051-B501-987B32E23C0F}" type="datetime1">
               <a:rPr lang="en-US" smtClean="0"/>
               <a:t>10/1/2026</a:t>
             </a:fld>
@@ -6500,6 +7709,7 @@
     <p:sldLayoutId id="2147483658" r:id="rId10"/>
     <p:sldLayoutId id="2147483659" r:id="rId11"/>
   </p:sldLayoutIdLst>
+  <p:hf hdr="0" ftr="0" dt="0"/>
   <p:txStyles>
     <p:titleStyle>
       <a:lvl1pPr algn="ctr" defTabSz="457200" rtl="0" eaLnBrk="1" latinLnBrk="0" hangingPunct="1">
@@ -7620,96 +8830,6 @@
           </a:p>
         </p:txBody>
       </p:sp>
-      <p:sp>
-        <p:nvSpPr>
-          <p:cNvPr id="10" name="Rectangle 9">
-            <a:extLst>
-              <a:ext uri="{FF2B5EF4-FFF2-40B4-BE49-F238E27FC236}">
-                <a16:creationId xmlns:a16="http://schemas.microsoft.com/office/drawing/2014/main" id="{CC323CE1-B360-C388-7F73-07990404F7B2}"/>
-              </a:ext>
-            </a:extLst>
-          </p:cNvPr>
-          <p:cNvSpPr/>
-          <p:nvPr/>
-        </p:nvSpPr>
-        <p:spPr>
-          <a:xfrm>
-            <a:off x="640080" y="6419088"/>
-            <a:ext cx="10881360" cy="18288"/>
-          </a:xfrm>
-          <a:prstGeom prst="rect">
-            <a:avLst/>
-          </a:prstGeom>
-          <a:solidFill>
-            <a:srgbClr val="EFEAE0"/>
-          </a:solidFill>
-          <a:ln>
-            <a:noFill/>
-          </a:ln>
-        </p:spPr>
-        <p:style>
-          <a:lnRef idx="1">
-            <a:schemeClr val="accent1"/>
-          </a:lnRef>
-          <a:fillRef idx="3">
-            <a:schemeClr val="accent1"/>
-          </a:fillRef>
-          <a:effectRef idx="2">
-            <a:schemeClr val="accent1"/>
-          </a:effectRef>
-          <a:fontRef idx="minor">
-            <a:schemeClr val="lt1"/>
-          </a:fontRef>
-        </p:style>
-        <p:txBody>
-          <a:bodyPr rtlCol="0" anchor="ctr"/>
-          <a:lstStyle/>
-          <a:p>
-            <a:pPr algn="ctr"/>
-            <a:endParaRPr lang="fr-FR" noProof="0" dirty="0"/>
-          </a:p>
-        </p:txBody>
-      </p:sp>
-      <p:sp>
-        <p:nvSpPr>
-          <p:cNvPr id="11" name="TextBox 10">
-            <a:extLst>
-              <a:ext uri="{FF2B5EF4-FFF2-40B4-BE49-F238E27FC236}">
-                <a16:creationId xmlns:a16="http://schemas.microsoft.com/office/drawing/2014/main" id="{6D582ACA-0905-337F-D991-B5E086857CF7}"/>
-              </a:ext>
-            </a:extLst>
-          </p:cNvPr>
-          <p:cNvSpPr txBox="1"/>
-          <p:nvPr/>
-        </p:nvSpPr>
-        <p:spPr>
-          <a:xfrm>
-            <a:off x="10789920" y="6473952"/>
-            <a:ext cx="640080" cy="182880"/>
-          </a:xfrm>
-          <a:prstGeom prst="rect">
-            <a:avLst/>
-          </a:prstGeom>
-          <a:noFill/>
-        </p:spPr>
-        <p:txBody>
-          <a:bodyPr wrap="none">
-            <a:spAutoFit/>
-          </a:bodyPr>
-          <a:lstStyle/>
-          <a:p>
-            <a:pPr algn="r"/>
-            <a:r>
-              <a:rPr lang="fr-FR" sz="900" noProof="0" dirty="0">
-                <a:solidFill>
-                  <a:srgbClr val="69625E"/>
-                </a:solidFill>
-              </a:rPr>
-              <a:t>7</a:t>
-            </a:r>
-          </a:p>
-        </p:txBody>
-      </p:sp>
       <p:pic>
         <p:nvPicPr>
           <p:cNvPr id="9" name="Image 8">
@@ -7740,6 +8860,35 @@
           </a:prstGeom>
         </p:spPr>
       </p:pic>
+      <p:sp>
+        <p:nvSpPr>
+          <p:cNvPr id="4" name="Espace réservé du numéro de diapositive 3">
+            <a:extLst>
+              <a:ext uri="{FF2B5EF4-FFF2-40B4-BE49-F238E27FC236}">
+                <a16:creationId xmlns:a16="http://schemas.microsoft.com/office/drawing/2014/main" id="{05292FA9-54CC-626A-FE78-ACA70C48BC34}"/>
+              </a:ext>
+            </a:extLst>
+          </p:cNvPr>
+          <p:cNvSpPr>
+            <a:spLocks noGrp="1"/>
+          </p:cNvSpPr>
+          <p:nvPr>
+            <p:ph type="sldNum" sz="quarter" idx="12"/>
+          </p:nvPr>
+        </p:nvSpPr>
+        <p:spPr/>
+        <p:txBody>
+          <a:bodyPr/>
+          <a:lstStyle/>
+          <a:p>
+            <a:fld id="{C1FF6DA9-008F-8B48-92A6-B652298478BF}" type="slidenum">
+              <a:rPr lang="en-US" smtClean="0"/>
+              <a:t>10</a:t>
+            </a:fld>
+            <a:endParaRPr lang="en-US" dirty="0"/>
+          </a:p>
+        </p:txBody>
+      </p:sp>
     </p:spTree>
     <p:extLst>
       <p:ext uri="{BB962C8B-B14F-4D97-AF65-F5344CB8AC3E}">
@@ -8027,96 +9176,6 @@
           </a:p>
         </p:txBody>
       </p:sp>
-      <p:sp>
-        <p:nvSpPr>
-          <p:cNvPr id="10" name="Rectangle 9">
-            <a:extLst>
-              <a:ext uri="{FF2B5EF4-FFF2-40B4-BE49-F238E27FC236}">
-                <a16:creationId xmlns:a16="http://schemas.microsoft.com/office/drawing/2014/main" id="{122E84F5-1EAE-D5A6-5E24-EC31D0FC3D13}"/>
-              </a:ext>
-            </a:extLst>
-          </p:cNvPr>
-          <p:cNvSpPr/>
-          <p:nvPr/>
-        </p:nvSpPr>
-        <p:spPr>
-          <a:xfrm>
-            <a:off x="640080" y="6419088"/>
-            <a:ext cx="10881360" cy="18288"/>
-          </a:xfrm>
-          <a:prstGeom prst="rect">
-            <a:avLst/>
-          </a:prstGeom>
-          <a:solidFill>
-            <a:srgbClr val="EFEAE0"/>
-          </a:solidFill>
-          <a:ln>
-            <a:noFill/>
-          </a:ln>
-        </p:spPr>
-        <p:style>
-          <a:lnRef idx="1">
-            <a:schemeClr val="accent1"/>
-          </a:lnRef>
-          <a:fillRef idx="3">
-            <a:schemeClr val="accent1"/>
-          </a:fillRef>
-          <a:effectRef idx="2">
-            <a:schemeClr val="accent1"/>
-          </a:effectRef>
-          <a:fontRef idx="minor">
-            <a:schemeClr val="lt1"/>
-          </a:fontRef>
-        </p:style>
-        <p:txBody>
-          <a:bodyPr rtlCol="0" anchor="ctr"/>
-          <a:lstStyle/>
-          <a:p>
-            <a:pPr algn="ctr"/>
-            <a:endParaRPr lang="fr-FR" noProof="0" dirty="0"/>
-          </a:p>
-        </p:txBody>
-      </p:sp>
-      <p:sp>
-        <p:nvSpPr>
-          <p:cNvPr id="11" name="TextBox 10">
-            <a:extLst>
-              <a:ext uri="{FF2B5EF4-FFF2-40B4-BE49-F238E27FC236}">
-                <a16:creationId xmlns:a16="http://schemas.microsoft.com/office/drawing/2014/main" id="{5EBABDCD-385E-0F02-8A90-64EDC3D91F95}"/>
-              </a:ext>
-            </a:extLst>
-          </p:cNvPr>
-          <p:cNvSpPr txBox="1"/>
-          <p:nvPr/>
-        </p:nvSpPr>
-        <p:spPr>
-          <a:xfrm>
-            <a:off x="10789920" y="6473952"/>
-            <a:ext cx="640080" cy="182880"/>
-          </a:xfrm>
-          <a:prstGeom prst="rect">
-            <a:avLst/>
-          </a:prstGeom>
-          <a:noFill/>
-        </p:spPr>
-        <p:txBody>
-          <a:bodyPr wrap="none">
-            <a:spAutoFit/>
-          </a:bodyPr>
-          <a:lstStyle/>
-          <a:p>
-            <a:pPr algn="r"/>
-            <a:r>
-              <a:rPr lang="fr-FR" sz="900" noProof="0" dirty="0">
-                <a:solidFill>
-                  <a:srgbClr val="69625E"/>
-                </a:solidFill>
-              </a:rPr>
-              <a:t>7</a:t>
-            </a:r>
-          </a:p>
-        </p:txBody>
-      </p:sp>
       <p:pic>
         <p:nvPicPr>
           <p:cNvPr id="5" name="Image 4">
@@ -8147,6 +9206,35 @@
           </a:prstGeom>
         </p:spPr>
       </p:pic>
+      <p:sp>
+        <p:nvSpPr>
+          <p:cNvPr id="4" name="Espace réservé du numéro de diapositive 3">
+            <a:extLst>
+              <a:ext uri="{FF2B5EF4-FFF2-40B4-BE49-F238E27FC236}">
+                <a16:creationId xmlns:a16="http://schemas.microsoft.com/office/drawing/2014/main" id="{8F78665C-D4E7-0DEA-E6D7-D6E923C95894}"/>
+              </a:ext>
+            </a:extLst>
+          </p:cNvPr>
+          <p:cNvSpPr>
+            <a:spLocks noGrp="1"/>
+          </p:cNvSpPr>
+          <p:nvPr>
+            <p:ph type="sldNum" sz="quarter" idx="12"/>
+          </p:nvPr>
+        </p:nvSpPr>
+        <p:spPr/>
+        <p:txBody>
+          <a:bodyPr/>
+          <a:lstStyle/>
+          <a:p>
+            <a:fld id="{C1FF6DA9-008F-8B48-92A6-B652298478BF}" type="slidenum">
+              <a:rPr lang="en-US" smtClean="0"/>
+              <a:t>11</a:t>
+            </a:fld>
+            <a:endParaRPr lang="en-US" dirty="0"/>
+          </a:p>
+        </p:txBody>
+      </p:sp>
     </p:spTree>
     <p:extLst>
       <p:ext uri="{BB962C8B-B14F-4D97-AF65-F5344CB8AC3E}">
@@ -9291,84 +10379,6 @@
           <a:p>
             <a:pPr algn="ctr"/>
             <a:endParaRPr lang="fr-FR" noProof="0" dirty="0"/>
-          </a:p>
-        </p:txBody>
-      </p:sp>
-      <p:sp>
-        <p:nvSpPr>
-          <p:cNvPr id="10" name="Rectangle 9"/>
-          <p:cNvSpPr/>
-          <p:nvPr/>
-        </p:nvSpPr>
-        <p:spPr>
-          <a:xfrm>
-            <a:off x="640080" y="6419088"/>
-            <a:ext cx="10881360" cy="18288"/>
-          </a:xfrm>
-          <a:prstGeom prst="rect">
-            <a:avLst/>
-          </a:prstGeom>
-          <a:solidFill>
-            <a:srgbClr val="EFEAE0"/>
-          </a:solidFill>
-          <a:ln>
-            <a:noFill/>
-          </a:ln>
-        </p:spPr>
-        <p:style>
-          <a:lnRef idx="1">
-            <a:schemeClr val="accent1"/>
-          </a:lnRef>
-          <a:fillRef idx="3">
-            <a:schemeClr val="accent1"/>
-          </a:fillRef>
-          <a:effectRef idx="2">
-            <a:schemeClr val="accent1"/>
-          </a:effectRef>
-          <a:fontRef idx="minor">
-            <a:schemeClr val="lt1"/>
-          </a:fontRef>
-        </p:style>
-        <p:txBody>
-          <a:bodyPr rtlCol="0" anchor="ctr"/>
-          <a:lstStyle/>
-          <a:p>
-            <a:pPr algn="ctr"/>
-            <a:endParaRPr lang="fr-FR" noProof="0" dirty="0"/>
-          </a:p>
-        </p:txBody>
-      </p:sp>
-      <p:sp>
-        <p:nvSpPr>
-          <p:cNvPr id="11" name="TextBox 10"/>
-          <p:cNvSpPr txBox="1"/>
-          <p:nvPr/>
-        </p:nvSpPr>
-        <p:spPr>
-          <a:xfrm>
-            <a:off x="10789920" y="6473952"/>
-            <a:ext cx="640080" cy="182880"/>
-          </a:xfrm>
-          <a:prstGeom prst="rect">
-            <a:avLst/>
-          </a:prstGeom>
-          <a:noFill/>
-        </p:spPr>
-        <p:txBody>
-          <a:bodyPr wrap="none">
-            <a:spAutoFit/>
-          </a:bodyPr>
-          <a:lstStyle/>
-          <a:p>
-            <a:pPr algn="r"/>
-            <a:r>
-              <a:rPr lang="fr-FR" sz="900" noProof="0" dirty="0">
-                <a:solidFill>
-                  <a:srgbClr val="69625E"/>
-                </a:solidFill>
-              </a:rPr>
-              <a:t>8</a:t>
-            </a:r>
           </a:p>
         </p:txBody>
       </p:sp>
@@ -9412,6 +10422,35 @@
           </a:effectLst>
         </p:spPr>
       </p:pic>
+      <p:sp>
+        <p:nvSpPr>
+          <p:cNvPr id="5" name="Espace réservé du numéro de diapositive 4">
+            <a:extLst>
+              <a:ext uri="{FF2B5EF4-FFF2-40B4-BE49-F238E27FC236}">
+                <a16:creationId xmlns:a16="http://schemas.microsoft.com/office/drawing/2014/main" id="{F82F9729-FCFB-66FE-97D3-6FA9CEF0C7C4}"/>
+              </a:ext>
+            </a:extLst>
+          </p:cNvPr>
+          <p:cNvSpPr>
+            <a:spLocks noGrp="1"/>
+          </p:cNvSpPr>
+          <p:nvPr>
+            <p:ph type="sldNum" sz="quarter" idx="12"/>
+          </p:nvPr>
+        </p:nvSpPr>
+        <p:spPr/>
+        <p:txBody>
+          <a:bodyPr/>
+          <a:lstStyle/>
+          <a:p>
+            <a:fld id="{C1FF6DA9-008F-8B48-92A6-B652298478BF}" type="slidenum">
+              <a:rPr lang="en-US" smtClean="0"/>
+              <a:t>12</a:t>
+            </a:fld>
+            <a:endParaRPr lang="en-US" dirty="0"/>
+          </a:p>
+        </p:txBody>
+      </p:sp>
     </p:spTree>
   </p:cSld>
   <p:clrMapOvr>
@@ -9446,7 +10485,7 @@
         <p:spPr>
           <a:xfrm>
             <a:off x="640080" y="411480"/>
-            <a:ext cx="10972800" cy="594360"/>
+            <a:ext cx="2744662" cy="523220"/>
           </a:xfrm>
           <a:prstGeom prst="rect">
             <a:avLst/>
@@ -9460,71 +10499,28 @@
           <a:lstStyle/>
           <a:p>
             <a:r>
-              <a:rPr lang="fr-FR" sz="2800" b="1" noProof="0" dirty="0">
+              <a:rPr lang="fr-FR" sz="2800" b="1" dirty="0">
                 <a:solidFill>
                   <a:srgbClr val="2C2522"/>
                 </a:solidFill>
                 <a:latin typeface="Aptos Display"/>
               </a:rPr>
-              <a:t>Repository → Doctrine → SQL</a:t>
-            </a:r>
-          </a:p>
-        </p:txBody>
-      </p:sp>
-      <p:sp>
-        <p:nvSpPr>
-          <p:cNvPr id="4" name="Rounded Rectangle 3"/>
-          <p:cNvSpPr/>
-          <p:nvPr/>
-        </p:nvSpPr>
-        <p:spPr>
-          <a:xfrm>
-            <a:off x="507709" y="1436398"/>
-            <a:ext cx="1686827" cy="914400"/>
-          </a:xfrm>
-          <a:prstGeom prst="roundRect">
-            <a:avLst/>
-          </a:prstGeom>
-          <a:solidFill>
-            <a:srgbClr val="FFFFFF"/>
-          </a:solidFill>
-          <a:ln>
-            <a:solidFill>
-              <a:srgbClr val="B89753"/>
-            </a:solidFill>
-          </a:ln>
-        </p:spPr>
-        <p:style>
-          <a:lnRef idx="1">
-            <a:schemeClr val="accent1"/>
-          </a:lnRef>
-          <a:fillRef idx="3">
-            <a:schemeClr val="accent1"/>
-          </a:fillRef>
-          <a:effectRef idx="2">
-            <a:schemeClr val="accent1"/>
-          </a:effectRef>
-          <a:fontRef idx="minor">
-            <a:schemeClr val="lt1"/>
-          </a:fontRef>
-        </p:style>
-        <p:txBody>
-          <a:bodyPr rtlCol="0" anchor="ctr"/>
-          <a:lstStyle/>
-          <a:p>
-            <a:pPr algn="ctr"/>
-            <a:r>
-              <a:rPr lang="fr-FR" sz="1400" b="1" noProof="0" dirty="0" err="1">
-                <a:solidFill>
-                  <a:srgbClr val="2C2522"/>
-                </a:solidFill>
-              </a:rPr>
-              <a:t>ReviewController</a:t>
-            </a:r>
-            <a:endParaRPr lang="fr-FR" sz="1400" b="1" noProof="0" dirty="0">
+              <a:t>Doctrine → </a:t>
+            </a:r>
+            <a:r>
+              <a:rPr lang="fr-FR" sz="2800" b="1" noProof="0" dirty="0" err="1">
+                <a:solidFill>
+                  <a:srgbClr val="2C2522"/>
+                </a:solidFill>
+                <a:latin typeface="Aptos Display"/>
+              </a:rPr>
+              <a:t>Entity</a:t>
+            </a:r>
+            <a:endParaRPr lang="fr-FR" sz="2800" b="1" noProof="0" dirty="0">
               <a:solidFill>
                 <a:srgbClr val="2C2522"/>
               </a:solidFill>
+              <a:latin typeface="Aptos Display"/>
             </a:endParaRPr>
           </a:p>
         </p:txBody>
@@ -9572,18 +10568,13 @@
           <a:p>
             <a:pPr algn="ctr"/>
             <a:r>
-              <a:rPr lang="fr-FR" sz="1400" b="1" noProof="0" dirty="0" err="1">
-                <a:solidFill>
-                  <a:srgbClr val="2C2522"/>
-                </a:solidFill>
-              </a:rPr>
-              <a:t>ReviewRepository</a:t>
-            </a:r>
-            <a:endParaRPr lang="fr-FR" sz="1200" b="1" noProof="0" dirty="0">
-              <a:solidFill>
-                <a:srgbClr val="2C2522"/>
-              </a:solidFill>
-            </a:endParaRPr>
+              <a:rPr lang="fr-FR" sz="1400" b="1" dirty="0">
+                <a:solidFill>
+                  <a:srgbClr val="2C2522"/>
+                </a:solidFill>
+              </a:rPr>
+              <a:t>Doctrine ORM</a:t>
+            </a:r>
           </a:p>
         </p:txBody>
       </p:sp>
@@ -9630,13 +10621,18 @@
           <a:p>
             <a:pPr algn="ctr"/>
             <a:r>
-              <a:rPr lang="fr-FR" sz="1400" b="1" noProof="0" dirty="0">
-                <a:solidFill>
-                  <a:srgbClr val="2C2522"/>
-                </a:solidFill>
-              </a:rPr>
-              <a:t>Doctrine ORM</a:t>
-            </a:r>
+              <a:rPr lang="fr-FR" sz="1400" b="1" dirty="0">
+                <a:solidFill>
+                  <a:srgbClr val="2C2522"/>
+                </a:solidFill>
+              </a:rPr>
+              <a:t>Repository</a:t>
+            </a:r>
+            <a:endParaRPr lang="fr-FR" sz="1200" b="1" dirty="0">
+              <a:solidFill>
+                <a:srgbClr val="2C2522"/>
+              </a:solidFill>
+            </a:endParaRPr>
           </a:p>
         </p:txBody>
       </p:sp>
@@ -9753,137 +10749,6 @@
                 <a:srgbClr val="2C2522"/>
               </a:solidFill>
             </a:endParaRPr>
-          </a:p>
-        </p:txBody>
-      </p:sp>
-      <p:sp>
-        <p:nvSpPr>
-          <p:cNvPr id="9" name="Rounded Rectangle 8"/>
-          <p:cNvSpPr/>
-          <p:nvPr/>
-        </p:nvSpPr>
-        <p:spPr>
-          <a:xfrm>
-            <a:off x="10017469" y="1436398"/>
-            <a:ext cx="1686827" cy="914400"/>
-          </a:xfrm>
-          <a:prstGeom prst="roundRect">
-            <a:avLst/>
-          </a:prstGeom>
-          <a:solidFill>
-            <a:srgbClr val="FFFFFF"/>
-          </a:solidFill>
-          <a:ln>
-            <a:solidFill>
-              <a:srgbClr val="B89753"/>
-            </a:solidFill>
-          </a:ln>
-        </p:spPr>
-        <p:style>
-          <a:lnRef idx="1">
-            <a:schemeClr val="accent1"/>
-          </a:lnRef>
-          <a:fillRef idx="3">
-            <a:schemeClr val="accent1"/>
-          </a:fillRef>
-          <a:effectRef idx="2">
-            <a:schemeClr val="accent1"/>
-          </a:effectRef>
-          <a:fontRef idx="minor">
-            <a:schemeClr val="lt1"/>
-          </a:fontRef>
-        </p:style>
-        <p:txBody>
-          <a:bodyPr rtlCol="0" anchor="ctr"/>
-          <a:lstStyle/>
-          <a:p>
-            <a:pPr algn="ctr"/>
-            <a:r>
-              <a:rPr lang="fr-FR" sz="1400" b="1" noProof="0" dirty="0">
-                <a:solidFill>
-                  <a:srgbClr val="2C2522"/>
-                </a:solidFill>
-              </a:rPr>
-              <a:t>Résultat → Twig</a:t>
-            </a:r>
-          </a:p>
-        </p:txBody>
-      </p:sp>
-      <p:sp>
-        <p:nvSpPr>
-          <p:cNvPr id="11" name="Rectangle 10"/>
-          <p:cNvSpPr/>
-          <p:nvPr/>
-        </p:nvSpPr>
-        <p:spPr>
-          <a:xfrm>
-            <a:off x="640080" y="6419088"/>
-            <a:ext cx="10881360" cy="18288"/>
-          </a:xfrm>
-          <a:prstGeom prst="rect">
-            <a:avLst/>
-          </a:prstGeom>
-          <a:solidFill>
-            <a:srgbClr val="EFEAE0"/>
-          </a:solidFill>
-          <a:ln>
-            <a:noFill/>
-          </a:ln>
-        </p:spPr>
-        <p:style>
-          <a:lnRef idx="1">
-            <a:schemeClr val="accent1"/>
-          </a:lnRef>
-          <a:fillRef idx="3">
-            <a:schemeClr val="accent1"/>
-          </a:fillRef>
-          <a:effectRef idx="2">
-            <a:schemeClr val="accent1"/>
-          </a:effectRef>
-          <a:fontRef idx="minor">
-            <a:schemeClr val="lt1"/>
-          </a:fontRef>
-        </p:style>
-        <p:txBody>
-          <a:bodyPr rtlCol="0" anchor="ctr"/>
-          <a:lstStyle/>
-          <a:p>
-            <a:pPr algn="ctr"/>
-            <a:endParaRPr lang="fr-FR" noProof="0" dirty="0"/>
-          </a:p>
-        </p:txBody>
-      </p:sp>
-      <p:sp>
-        <p:nvSpPr>
-          <p:cNvPr id="12" name="TextBox 11"/>
-          <p:cNvSpPr txBox="1"/>
-          <p:nvPr/>
-        </p:nvSpPr>
-        <p:spPr>
-          <a:xfrm>
-            <a:off x="10789920" y="6473952"/>
-            <a:ext cx="640080" cy="182880"/>
-          </a:xfrm>
-          <a:prstGeom prst="rect">
-            <a:avLst/>
-          </a:prstGeom>
-          <a:noFill/>
-        </p:spPr>
-        <p:txBody>
-          <a:bodyPr wrap="none">
-            <a:spAutoFit/>
-          </a:bodyPr>
-          <a:lstStyle/>
-          <a:p>
-            <a:pPr algn="r"/>
-            <a:r>
-              <a:rPr lang="fr-FR" sz="900" noProof="0" dirty="0">
-                <a:solidFill>
-                  <a:srgbClr val="69625E"/>
-                </a:solidFill>
-              </a:rPr>
-              <a:t>9</a:t>
-            </a:r>
           </a:p>
         </p:txBody>
       </p:sp>
@@ -9967,6 +10832,115 @@
           </a:effectLst>
         </p:spPr>
       </p:pic>
+      <p:sp>
+        <p:nvSpPr>
+          <p:cNvPr id="10" name="Espace réservé du numéro de diapositive 9">
+            <a:extLst>
+              <a:ext uri="{FF2B5EF4-FFF2-40B4-BE49-F238E27FC236}">
+                <a16:creationId xmlns:a16="http://schemas.microsoft.com/office/drawing/2014/main" id="{688A63D7-E5AC-2D3C-3588-857C55B10CAE}"/>
+              </a:ext>
+            </a:extLst>
+          </p:cNvPr>
+          <p:cNvSpPr>
+            <a:spLocks noGrp="1"/>
+          </p:cNvSpPr>
+          <p:nvPr>
+            <p:ph type="sldNum" sz="quarter" idx="12"/>
+          </p:nvPr>
+        </p:nvSpPr>
+        <p:spPr/>
+        <p:txBody>
+          <a:bodyPr/>
+          <a:lstStyle/>
+          <a:p>
+            <a:fld id="{C1FF6DA9-008F-8B48-92A6-B652298478BF}" type="slidenum">
+              <a:rPr lang="en-US" smtClean="0"/>
+              <a:t>13</a:t>
+            </a:fld>
+            <a:endParaRPr lang="en-US" dirty="0"/>
+          </a:p>
+        </p:txBody>
+      </p:sp>
+      <p:sp>
+        <p:nvSpPr>
+          <p:cNvPr id="13" name="Rectangle 12">
+            <a:extLst>
+              <a:ext uri="{FF2B5EF4-FFF2-40B4-BE49-F238E27FC236}">
+                <a16:creationId xmlns:a16="http://schemas.microsoft.com/office/drawing/2014/main" id="{6D2FAA98-A1BF-24BA-365B-2B6C66F09B6E}"/>
+              </a:ext>
+            </a:extLst>
+          </p:cNvPr>
+          <p:cNvSpPr/>
+          <p:nvPr/>
+        </p:nvSpPr>
+        <p:spPr>
+          <a:xfrm>
+            <a:off x="640080" y="1234439"/>
+            <a:ext cx="6614160" cy="3272763"/>
+          </a:xfrm>
+          <a:prstGeom prst="rect">
+            <a:avLst/>
+          </a:prstGeom>
+        </p:spPr>
+        <p:style>
+          <a:lnRef idx="1">
+            <a:schemeClr val="accent6"/>
+          </a:lnRef>
+          <a:fillRef idx="2">
+            <a:schemeClr val="accent6"/>
+          </a:fillRef>
+          <a:effectRef idx="1">
+            <a:schemeClr val="accent6"/>
+          </a:effectRef>
+          <a:fontRef idx="minor">
+            <a:schemeClr val="dk1"/>
+          </a:fontRef>
+        </p:style>
+        <p:txBody>
+          <a:bodyPr rtlCol="0" anchor="ctr"/>
+          <a:lstStyle/>
+          <a:p>
+            <a:pPr algn="ctr"/>
+            <a:r>
+              <a:rPr lang="pt-BR" dirty="0" err="1"/>
+              <a:t>Parler</a:t>
+            </a:r>
+            <a:r>
+              <a:rPr lang="pt-BR" dirty="0"/>
+              <a:t> de </a:t>
+            </a:r>
+            <a:r>
+              <a:rPr lang="pt-BR" dirty="0" err="1"/>
+              <a:t>Doctrine</a:t>
+            </a:r>
+            <a:r>
+              <a:rPr lang="pt-BR" dirty="0"/>
+              <a:t>, ORM, </a:t>
+            </a:r>
+            <a:r>
+              <a:rPr lang="pt-BR" dirty="0" err="1"/>
+              <a:t>pq</a:t>
+            </a:r>
+            <a:r>
+              <a:rPr lang="pt-BR" dirty="0"/>
+              <a:t> </a:t>
+            </a:r>
+            <a:r>
+              <a:rPr lang="pt-BR" dirty="0" err="1"/>
+              <a:t>ont</a:t>
+            </a:r>
+            <a:r>
+              <a:rPr lang="pt-BR" dirty="0"/>
+              <a:t> utilize etc... </a:t>
+            </a:r>
+            <a:r>
+              <a:rPr lang="pt-BR" dirty="0" err="1"/>
+              <a:t>l’Entity</a:t>
+            </a:r>
+            <a:endParaRPr lang="fr-FR" dirty="0"/>
+          </a:p>
+        </p:txBody>
+      </p:sp>
     </p:spTree>
   </p:cSld>
   <p:clrMapOvr>
@@ -9976,6 +10950,721 @@
 </file>
 
 <file path=ppt/slides/slide14.xml><?xml version="1.0" encoding="utf-8"?>
+<p:sld xmlns:a="http://schemas.openxmlformats.org/drawingml/2006/main" xmlns:r="http://schemas.openxmlformats.org/officeDocument/2006/relationships" xmlns:p="http://schemas.openxmlformats.org/presentationml/2006/main">
+  <p:cSld>
+    <p:spTree>
+      <p:nvGrpSpPr>
+        <p:cNvPr id="1" name="">
+          <a:extLst>
+            <a:ext uri="{FF2B5EF4-FFF2-40B4-BE49-F238E27FC236}">
+              <a16:creationId xmlns:a16="http://schemas.microsoft.com/office/drawing/2014/main" id="{FEE7111A-29E2-6828-900B-FEE51A9374CB}"/>
+            </a:ext>
+          </a:extLst>
+        </p:cNvPr>
+        <p:cNvGrpSpPr/>
+        <p:nvPr/>
+      </p:nvGrpSpPr>
+      <p:grpSpPr>
+        <a:xfrm>
+          <a:off x="0" y="0"/>
+          <a:ext cx="0" cy="0"/>
+          <a:chOff x="0" y="0"/>
+          <a:chExt cx="0" cy="0"/>
+        </a:xfrm>
+      </p:grpSpPr>
+      <p:sp>
+        <p:nvSpPr>
+          <p:cNvPr id="3" name="TextBox 2">
+            <a:extLst>
+              <a:ext uri="{FF2B5EF4-FFF2-40B4-BE49-F238E27FC236}">
+                <a16:creationId xmlns:a16="http://schemas.microsoft.com/office/drawing/2014/main" id="{2F8EA6D7-28AB-1B36-D852-99F40BA338C8}"/>
+              </a:ext>
+            </a:extLst>
+          </p:cNvPr>
+          <p:cNvSpPr txBox="1"/>
+          <p:nvPr/>
+        </p:nvSpPr>
+        <p:spPr>
+          <a:xfrm>
+            <a:off x="640080" y="411480"/>
+            <a:ext cx="4505272" cy="523220"/>
+          </a:xfrm>
+          <a:prstGeom prst="rect">
+            <a:avLst/>
+          </a:prstGeom>
+          <a:noFill/>
+        </p:spPr>
+        <p:txBody>
+          <a:bodyPr wrap="none">
+            <a:spAutoFit/>
+          </a:bodyPr>
+          <a:lstStyle/>
+          <a:p>
+            <a:r>
+              <a:rPr lang="fr-FR" sz="2800" b="1" dirty="0">
+                <a:solidFill>
+                  <a:srgbClr val="2C2522"/>
+                </a:solidFill>
+                <a:latin typeface="Aptos Display"/>
+              </a:rPr>
+              <a:t>Doctrine → </a:t>
+            </a:r>
+            <a:r>
+              <a:rPr lang="fr-FR" sz="2800" b="1" noProof="0" dirty="0">
+                <a:solidFill>
+                  <a:srgbClr val="2C2522"/>
+                </a:solidFill>
+                <a:latin typeface="Aptos Display"/>
+              </a:rPr>
+              <a:t>Repository → SQL</a:t>
+            </a:r>
+          </a:p>
+        </p:txBody>
+      </p:sp>
+      <p:sp>
+        <p:nvSpPr>
+          <p:cNvPr id="5" name="Rounded Rectangle 4">
+            <a:extLst>
+              <a:ext uri="{FF2B5EF4-FFF2-40B4-BE49-F238E27FC236}">
+                <a16:creationId xmlns:a16="http://schemas.microsoft.com/office/drawing/2014/main" id="{85378065-D266-E1A0-2E43-3C22DC445B63}"/>
+              </a:ext>
+            </a:extLst>
+          </p:cNvPr>
+          <p:cNvSpPr/>
+          <p:nvPr/>
+        </p:nvSpPr>
+        <p:spPr>
+          <a:xfrm>
+            <a:off x="2409661" y="1436398"/>
+            <a:ext cx="1686827" cy="914400"/>
+          </a:xfrm>
+          <a:prstGeom prst="roundRect">
+            <a:avLst/>
+          </a:prstGeom>
+          <a:solidFill>
+            <a:srgbClr val="FFFFFF"/>
+          </a:solidFill>
+          <a:ln>
+            <a:solidFill>
+              <a:srgbClr val="B89753"/>
+            </a:solidFill>
+          </a:ln>
+        </p:spPr>
+        <p:style>
+          <a:lnRef idx="1">
+            <a:schemeClr val="accent1"/>
+          </a:lnRef>
+          <a:fillRef idx="3">
+            <a:schemeClr val="accent1"/>
+          </a:fillRef>
+          <a:effectRef idx="2">
+            <a:schemeClr val="accent1"/>
+          </a:effectRef>
+          <a:fontRef idx="minor">
+            <a:schemeClr val="lt1"/>
+          </a:fontRef>
+        </p:style>
+        <p:txBody>
+          <a:bodyPr rtlCol="0" anchor="ctr"/>
+          <a:lstStyle/>
+          <a:p>
+            <a:pPr algn="ctr"/>
+            <a:r>
+              <a:rPr lang="fr-FR" sz="1400" b="1" dirty="0">
+                <a:solidFill>
+                  <a:srgbClr val="2C2522"/>
+                </a:solidFill>
+              </a:rPr>
+              <a:t>Doctrine ORM</a:t>
+            </a:r>
+          </a:p>
+        </p:txBody>
+      </p:sp>
+      <p:sp>
+        <p:nvSpPr>
+          <p:cNvPr id="6" name="Rounded Rectangle 5">
+            <a:extLst>
+              <a:ext uri="{FF2B5EF4-FFF2-40B4-BE49-F238E27FC236}">
+                <a16:creationId xmlns:a16="http://schemas.microsoft.com/office/drawing/2014/main" id="{DD4117A9-E469-EEEF-1281-37010E993A28}"/>
+              </a:ext>
+            </a:extLst>
+          </p:cNvPr>
+          <p:cNvSpPr/>
+          <p:nvPr/>
+        </p:nvSpPr>
+        <p:spPr>
+          <a:xfrm>
+            <a:off x="4311613" y="1436398"/>
+            <a:ext cx="1686827" cy="914400"/>
+          </a:xfrm>
+          <a:prstGeom prst="roundRect">
+            <a:avLst/>
+          </a:prstGeom>
+          <a:solidFill>
+            <a:srgbClr val="FFFFFF"/>
+          </a:solidFill>
+          <a:ln>
+            <a:solidFill>
+              <a:srgbClr val="B89753"/>
+            </a:solidFill>
+          </a:ln>
+        </p:spPr>
+        <p:style>
+          <a:lnRef idx="1">
+            <a:schemeClr val="accent1"/>
+          </a:lnRef>
+          <a:fillRef idx="3">
+            <a:schemeClr val="accent1"/>
+          </a:fillRef>
+          <a:effectRef idx="2">
+            <a:schemeClr val="accent1"/>
+          </a:effectRef>
+          <a:fontRef idx="minor">
+            <a:schemeClr val="lt1"/>
+          </a:fontRef>
+        </p:style>
+        <p:txBody>
+          <a:bodyPr rtlCol="0" anchor="ctr"/>
+          <a:lstStyle/>
+          <a:p>
+            <a:pPr algn="ctr"/>
+            <a:r>
+              <a:rPr lang="fr-FR" sz="1400" b="1" dirty="0">
+                <a:solidFill>
+                  <a:srgbClr val="2C2522"/>
+                </a:solidFill>
+              </a:rPr>
+              <a:t>Repository</a:t>
+            </a:r>
+            <a:endParaRPr lang="fr-FR" sz="1200" b="1" dirty="0">
+              <a:solidFill>
+                <a:srgbClr val="2C2522"/>
+              </a:solidFill>
+            </a:endParaRPr>
+          </a:p>
+        </p:txBody>
+      </p:sp>
+      <p:sp>
+        <p:nvSpPr>
+          <p:cNvPr id="7" name="Rounded Rectangle 6">
+            <a:extLst>
+              <a:ext uri="{FF2B5EF4-FFF2-40B4-BE49-F238E27FC236}">
+                <a16:creationId xmlns:a16="http://schemas.microsoft.com/office/drawing/2014/main" id="{A3DAE911-44BE-3B16-E99C-3CD1A76D91C5}"/>
+              </a:ext>
+            </a:extLst>
+          </p:cNvPr>
+          <p:cNvSpPr/>
+          <p:nvPr/>
+        </p:nvSpPr>
+        <p:spPr>
+          <a:xfrm>
+            <a:off x="6213565" y="1436398"/>
+            <a:ext cx="1686827" cy="914400"/>
+          </a:xfrm>
+          <a:prstGeom prst="roundRect">
+            <a:avLst/>
+          </a:prstGeom>
+          <a:solidFill>
+            <a:srgbClr val="FFFFFF"/>
+          </a:solidFill>
+          <a:ln>
+            <a:solidFill>
+              <a:srgbClr val="B89753"/>
+            </a:solidFill>
+          </a:ln>
+        </p:spPr>
+        <p:style>
+          <a:lnRef idx="1">
+            <a:schemeClr val="accent1"/>
+          </a:lnRef>
+          <a:fillRef idx="3">
+            <a:schemeClr val="accent1"/>
+          </a:fillRef>
+          <a:effectRef idx="2">
+            <a:schemeClr val="accent1"/>
+          </a:effectRef>
+          <a:fontRef idx="minor">
+            <a:schemeClr val="lt1"/>
+          </a:fontRef>
+        </p:style>
+        <p:txBody>
+          <a:bodyPr rtlCol="0" anchor="ctr"/>
+          <a:lstStyle/>
+          <a:p>
+            <a:pPr algn="ctr"/>
+            <a:r>
+              <a:rPr lang="fr-FR" sz="1400" b="1" noProof="0" dirty="0">
+                <a:solidFill>
+                  <a:srgbClr val="2C2522"/>
+                </a:solidFill>
+              </a:rPr>
+              <a:t>SQL</a:t>
+            </a:r>
+            <a:endParaRPr lang="fr-FR" sz="1200" b="1" noProof="0" dirty="0">
+              <a:solidFill>
+                <a:srgbClr val="2C2522"/>
+              </a:solidFill>
+            </a:endParaRPr>
+          </a:p>
+        </p:txBody>
+      </p:sp>
+      <p:sp>
+        <p:nvSpPr>
+          <p:cNvPr id="8" name="Rounded Rectangle 7">
+            <a:extLst>
+              <a:ext uri="{FF2B5EF4-FFF2-40B4-BE49-F238E27FC236}">
+                <a16:creationId xmlns:a16="http://schemas.microsoft.com/office/drawing/2014/main" id="{483A899D-134E-7012-4116-A661A01AD121}"/>
+              </a:ext>
+            </a:extLst>
+          </p:cNvPr>
+          <p:cNvSpPr/>
+          <p:nvPr/>
+        </p:nvSpPr>
+        <p:spPr>
+          <a:xfrm>
+            <a:off x="8115517" y="1436398"/>
+            <a:ext cx="1686827" cy="914400"/>
+          </a:xfrm>
+          <a:prstGeom prst="roundRect">
+            <a:avLst/>
+          </a:prstGeom>
+          <a:solidFill>
+            <a:schemeClr val="bg1"/>
+          </a:solidFill>
+          <a:ln>
+            <a:solidFill>
+              <a:srgbClr val="B89753"/>
+            </a:solidFill>
+          </a:ln>
+        </p:spPr>
+        <p:style>
+          <a:lnRef idx="1">
+            <a:schemeClr val="accent1"/>
+          </a:lnRef>
+          <a:fillRef idx="3">
+            <a:schemeClr val="accent1"/>
+          </a:fillRef>
+          <a:effectRef idx="2">
+            <a:schemeClr val="accent1"/>
+          </a:effectRef>
+          <a:fontRef idx="minor">
+            <a:schemeClr val="lt1"/>
+          </a:fontRef>
+        </p:style>
+        <p:txBody>
+          <a:bodyPr rtlCol="0" anchor="ctr"/>
+          <a:lstStyle/>
+          <a:p>
+            <a:pPr algn="ctr"/>
+            <a:r>
+              <a:rPr lang="fr-FR" sz="1400" b="1" noProof="0" dirty="0" err="1">
+                <a:solidFill>
+                  <a:srgbClr val="2C2522"/>
+                </a:solidFill>
+              </a:rPr>
+              <a:t>MariaDB</a:t>
+            </a:r>
+            <a:endParaRPr lang="fr-FR" sz="1200" b="1" noProof="0" dirty="0">
+              <a:solidFill>
+                <a:srgbClr val="2C2522"/>
+              </a:solidFill>
+            </a:endParaRPr>
+          </a:p>
+        </p:txBody>
+      </p:sp>
+      <p:pic>
+        <p:nvPicPr>
+          <p:cNvPr id="14" name="Image 13">
+            <a:extLst>
+              <a:ext uri="{FF2B5EF4-FFF2-40B4-BE49-F238E27FC236}">
+                <a16:creationId xmlns:a16="http://schemas.microsoft.com/office/drawing/2014/main" id="{F7C5124A-A0A8-3D91-C836-EC6EE32D811F}"/>
+              </a:ext>
+            </a:extLst>
+          </p:cNvPr>
+          <p:cNvPicPr>
+            <a:picLocks noChangeAspect="1"/>
+          </p:cNvPicPr>
+          <p:nvPr/>
+        </p:nvPicPr>
+        <p:blipFill>
+          <a:blip r:embed="rId3"/>
+          <a:stretch>
+            <a:fillRect/>
+          </a:stretch>
+        </p:blipFill>
+        <p:spPr>
+          <a:xfrm>
+            <a:off x="997785" y="2881803"/>
+            <a:ext cx="4838278" cy="3209785"/>
+          </a:xfrm>
+          <a:prstGeom prst="rect">
+            <a:avLst/>
+          </a:prstGeom>
+          <a:ln>
+            <a:noFill/>
+          </a:ln>
+          <a:effectLst>
+            <a:outerShdw blurRad="190500" algn="tl" rotWithShape="0">
+              <a:srgbClr val="000000">
+                <a:alpha val="70000"/>
+              </a:srgbClr>
+            </a:outerShdw>
+          </a:effectLst>
+        </p:spPr>
+      </p:pic>
+      <p:pic>
+        <p:nvPicPr>
+          <p:cNvPr id="16" name="Image 15">
+            <a:extLst>
+              <a:ext uri="{FF2B5EF4-FFF2-40B4-BE49-F238E27FC236}">
+                <a16:creationId xmlns:a16="http://schemas.microsoft.com/office/drawing/2014/main" id="{6F52923A-FB1F-C51D-29CD-2BCE89B204C2}"/>
+              </a:ext>
+            </a:extLst>
+          </p:cNvPr>
+          <p:cNvPicPr>
+            <a:picLocks noChangeAspect="1"/>
+          </p:cNvPicPr>
+          <p:nvPr/>
+        </p:nvPicPr>
+        <p:blipFill>
+          <a:blip r:embed="rId4"/>
+          <a:stretch>
+            <a:fillRect/>
+          </a:stretch>
+        </p:blipFill>
+        <p:spPr>
+          <a:xfrm>
+            <a:off x="6362265" y="3142971"/>
+            <a:ext cx="5067735" cy="2171886"/>
+          </a:xfrm>
+          <a:prstGeom prst="rect">
+            <a:avLst/>
+          </a:prstGeom>
+          <a:ln>
+            <a:noFill/>
+          </a:ln>
+          <a:effectLst>
+            <a:outerShdw blurRad="190500" algn="tl" rotWithShape="0">
+              <a:srgbClr val="000000">
+                <a:alpha val="70000"/>
+              </a:srgbClr>
+            </a:outerShdw>
+          </a:effectLst>
+        </p:spPr>
+      </p:pic>
+      <p:sp>
+        <p:nvSpPr>
+          <p:cNvPr id="10" name="Espace réservé du numéro de diapositive 9">
+            <a:extLst>
+              <a:ext uri="{FF2B5EF4-FFF2-40B4-BE49-F238E27FC236}">
+                <a16:creationId xmlns:a16="http://schemas.microsoft.com/office/drawing/2014/main" id="{4400DDCF-081D-3AC0-5FA1-9325B811011F}"/>
+              </a:ext>
+            </a:extLst>
+          </p:cNvPr>
+          <p:cNvSpPr>
+            <a:spLocks noGrp="1"/>
+          </p:cNvSpPr>
+          <p:nvPr>
+            <p:ph type="sldNum" sz="quarter" idx="12"/>
+          </p:nvPr>
+        </p:nvSpPr>
+        <p:spPr/>
+        <p:txBody>
+          <a:bodyPr/>
+          <a:lstStyle/>
+          <a:p>
+            <a:fld id="{C1FF6DA9-008F-8B48-92A6-B652298478BF}" type="slidenum">
+              <a:rPr lang="en-US" smtClean="0"/>
+              <a:t>14</a:t>
+            </a:fld>
+            <a:endParaRPr lang="en-US" dirty="0"/>
+          </a:p>
+        </p:txBody>
+      </p:sp>
+    </p:spTree>
+    <p:extLst>
+      <p:ext uri="{BB962C8B-B14F-4D97-AF65-F5344CB8AC3E}">
+        <p14:creationId xmlns:p14="http://schemas.microsoft.com/office/powerpoint/2010/main" val="1104144714"/>
+      </p:ext>
+    </p:extLst>
+  </p:cSld>
+  <p:clrMapOvr>
+    <a:masterClrMapping/>
+  </p:clrMapOvr>
+</p:sld>
+</file>
+
+<file path=ppt/slides/slide15.xml><?xml version="1.0" encoding="utf-8"?>
+<p:sld xmlns:a="http://schemas.openxmlformats.org/drawingml/2006/main" xmlns:r="http://schemas.openxmlformats.org/officeDocument/2006/relationships" xmlns:p="http://schemas.openxmlformats.org/presentationml/2006/main">
+  <p:cSld>
+    <p:spTree>
+      <p:nvGrpSpPr>
+        <p:cNvPr id="1" name="">
+          <a:extLst>
+            <a:ext uri="{FF2B5EF4-FFF2-40B4-BE49-F238E27FC236}">
+              <a16:creationId xmlns:a16="http://schemas.microsoft.com/office/drawing/2014/main" id="{A151C5A4-E5BE-C837-A6FB-D5FDA906F98D}"/>
+            </a:ext>
+          </a:extLst>
+        </p:cNvPr>
+        <p:cNvGrpSpPr/>
+        <p:nvPr/>
+      </p:nvGrpSpPr>
+      <p:grpSpPr>
+        <a:xfrm>
+          <a:off x="0" y="0"/>
+          <a:ext cx="0" cy="0"/>
+          <a:chOff x="0" y="0"/>
+          <a:chExt cx="0" cy="0"/>
+        </a:xfrm>
+      </p:grpSpPr>
+      <p:sp>
+        <p:nvSpPr>
+          <p:cNvPr id="3" name="TextBox 2">
+            <a:extLst>
+              <a:ext uri="{FF2B5EF4-FFF2-40B4-BE49-F238E27FC236}">
+                <a16:creationId xmlns:a16="http://schemas.microsoft.com/office/drawing/2014/main" id="{EAAA615F-956B-5AA0-7A12-FC2265D741A2}"/>
+              </a:ext>
+            </a:extLst>
+          </p:cNvPr>
+          <p:cNvSpPr txBox="1"/>
+          <p:nvPr/>
+        </p:nvSpPr>
+        <p:spPr>
+          <a:xfrm>
+            <a:off x="640080" y="411480"/>
+            <a:ext cx="2408160" cy="523220"/>
+          </a:xfrm>
+          <a:prstGeom prst="rect">
+            <a:avLst/>
+          </a:prstGeom>
+          <a:noFill/>
+        </p:spPr>
+        <p:txBody>
+          <a:bodyPr wrap="none">
+            <a:spAutoFit/>
+          </a:bodyPr>
+          <a:lstStyle/>
+          <a:p>
+            <a:r>
+              <a:rPr lang="fr-FR" sz="2800" b="1" noProof="0" dirty="0">
+                <a:solidFill>
+                  <a:srgbClr val="2C2522"/>
+                </a:solidFill>
+                <a:latin typeface="Aptos Display"/>
+              </a:rPr>
+              <a:t>CONTROLEUR</a:t>
+            </a:r>
+          </a:p>
+        </p:txBody>
+      </p:sp>
+      <p:sp>
+        <p:nvSpPr>
+          <p:cNvPr id="4" name="Espace réservé du numéro de diapositive 3">
+            <a:extLst>
+              <a:ext uri="{FF2B5EF4-FFF2-40B4-BE49-F238E27FC236}">
+                <a16:creationId xmlns:a16="http://schemas.microsoft.com/office/drawing/2014/main" id="{CA0A929F-EE3B-550D-0FFE-E9A12CAB365B}"/>
+              </a:ext>
+            </a:extLst>
+          </p:cNvPr>
+          <p:cNvSpPr>
+            <a:spLocks noGrp="1"/>
+          </p:cNvSpPr>
+          <p:nvPr>
+            <p:ph type="sldNum" sz="quarter" idx="12"/>
+          </p:nvPr>
+        </p:nvSpPr>
+        <p:spPr/>
+        <p:txBody>
+          <a:bodyPr/>
+          <a:lstStyle/>
+          <a:p>
+            <a:fld id="{C1FF6DA9-008F-8B48-92A6-B652298478BF}" type="slidenum">
+              <a:rPr lang="en-US" smtClean="0"/>
+              <a:t>15</a:t>
+            </a:fld>
+            <a:endParaRPr lang="en-US" dirty="0"/>
+          </a:p>
+        </p:txBody>
+      </p:sp>
+      <p:sp>
+        <p:nvSpPr>
+          <p:cNvPr id="2" name="Rectangle 1">
+            <a:extLst>
+              <a:ext uri="{FF2B5EF4-FFF2-40B4-BE49-F238E27FC236}">
+                <a16:creationId xmlns:a16="http://schemas.microsoft.com/office/drawing/2014/main" id="{86264AB1-15D3-FDD8-66B2-15D350B81F1E}"/>
+              </a:ext>
+            </a:extLst>
+          </p:cNvPr>
+          <p:cNvSpPr/>
+          <p:nvPr/>
+        </p:nvSpPr>
+        <p:spPr>
+          <a:xfrm>
+            <a:off x="1889760" y="1767840"/>
+            <a:ext cx="4709160" cy="2331720"/>
+          </a:xfrm>
+          <a:prstGeom prst="rect">
+            <a:avLst/>
+          </a:prstGeom>
+        </p:spPr>
+        <p:style>
+          <a:lnRef idx="1">
+            <a:schemeClr val="accent6"/>
+          </a:lnRef>
+          <a:fillRef idx="2">
+            <a:schemeClr val="accent6"/>
+          </a:fillRef>
+          <a:effectRef idx="1">
+            <a:schemeClr val="accent6"/>
+          </a:effectRef>
+          <a:fontRef idx="minor">
+            <a:schemeClr val="dk1"/>
+          </a:fontRef>
+        </p:style>
+        <p:txBody>
+          <a:bodyPr rtlCol="0" anchor="ctr"/>
+          <a:lstStyle/>
+          <a:p>
+            <a:pPr algn="ctr"/>
+            <a:r>
+              <a:rPr lang="pt-BR" dirty="0" err="1"/>
+              <a:t>Symfony</a:t>
+            </a:r>
+            <a:r>
+              <a:rPr lang="pt-BR" dirty="0"/>
+              <a:t>, </a:t>
+            </a:r>
+            <a:r>
+              <a:rPr lang="pt-BR" dirty="0" err="1"/>
+              <a:t>requete</a:t>
+            </a:r>
+            <a:r>
+              <a:rPr lang="pt-BR" dirty="0"/>
+              <a:t>, </a:t>
+            </a:r>
+            <a:r>
+              <a:rPr lang="pt-BR" dirty="0" err="1"/>
+              <a:t>atribut</a:t>
+            </a:r>
+            <a:r>
+              <a:rPr lang="pt-BR" dirty="0"/>
+              <a:t>, Route, </a:t>
+            </a:r>
+          </a:p>
+          <a:p>
+            <a:pPr algn="ctr"/>
+            <a:endParaRPr lang="pt-BR" dirty="0"/>
+          </a:p>
+          <a:p>
+            <a:pPr algn="ctr"/>
+            <a:r>
+              <a:rPr lang="pt-BR" dirty="0"/>
+              <a:t>Route -&gt; index (</a:t>
+            </a:r>
+            <a:r>
+              <a:rPr lang="pt-BR" dirty="0" err="1"/>
+              <a:t>ex</a:t>
+            </a:r>
+            <a:r>
+              <a:rPr lang="pt-BR" dirty="0"/>
+              <a:t>: </a:t>
+            </a:r>
+            <a:r>
+              <a:rPr lang="pt-BR" dirty="0" err="1"/>
+              <a:t>galerie</a:t>
+            </a:r>
+            <a:r>
+              <a:rPr lang="pt-BR" dirty="0"/>
+              <a:t>)</a:t>
+            </a:r>
+          </a:p>
+          <a:p>
+            <a:pPr algn="ctr"/>
+            <a:r>
+              <a:rPr lang="pt-BR" dirty="0" err="1"/>
+              <a:t>Injection</a:t>
+            </a:r>
+            <a:r>
+              <a:rPr lang="pt-BR" dirty="0"/>
+              <a:t> de </a:t>
+            </a:r>
+            <a:r>
+              <a:rPr lang="pt-BR" dirty="0" err="1"/>
+              <a:t>dependence</a:t>
+            </a:r>
+            <a:r>
+              <a:rPr lang="pt-BR" dirty="0"/>
+              <a:t>;</a:t>
+            </a:r>
+          </a:p>
+          <a:p>
+            <a:pPr algn="ctr"/>
+            <a:r>
+              <a:rPr lang="pt-BR" dirty="0" err="1"/>
+              <a:t>Laisser</a:t>
+            </a:r>
+            <a:r>
+              <a:rPr lang="pt-BR" dirty="0"/>
+              <a:t> </a:t>
+            </a:r>
+            <a:r>
+              <a:rPr lang="pt-BR" dirty="0" err="1"/>
+              <a:t>le</a:t>
+            </a:r>
+            <a:r>
+              <a:rPr lang="pt-BR" dirty="0"/>
+              <a:t> framework </a:t>
+            </a:r>
+            <a:r>
+              <a:rPr lang="pt-BR" dirty="0" err="1"/>
+              <a:t>gerer</a:t>
+            </a:r>
+            <a:r>
+              <a:rPr lang="pt-BR" dirty="0"/>
+              <a:t> </a:t>
+            </a:r>
+            <a:r>
+              <a:rPr lang="pt-BR" dirty="0" err="1"/>
+              <a:t>le</a:t>
+            </a:r>
+            <a:r>
+              <a:rPr lang="pt-BR" dirty="0"/>
+              <a:t> </a:t>
+            </a:r>
+            <a:r>
+              <a:rPr lang="pt-BR" dirty="0" err="1"/>
+              <a:t>cycle</a:t>
+            </a:r>
+            <a:r>
+              <a:rPr lang="pt-BR" dirty="0"/>
+              <a:t> de </a:t>
+            </a:r>
+            <a:r>
+              <a:rPr lang="pt-BR" dirty="0" err="1"/>
+              <a:t>vie</a:t>
+            </a:r>
+            <a:r>
+              <a:rPr lang="pt-BR" dirty="0"/>
+              <a:t> </a:t>
+            </a:r>
+            <a:endParaRPr lang="fr-FR" dirty="0"/>
+          </a:p>
+        </p:txBody>
+      </p:sp>
+    </p:spTree>
+    <p:extLst>
+      <p:ext uri="{BB962C8B-B14F-4D97-AF65-F5344CB8AC3E}">
+        <p14:creationId xmlns:p14="http://schemas.microsoft.com/office/powerpoint/2010/main" val="1849954005"/>
+      </p:ext>
+    </p:extLst>
+  </p:cSld>
+  <p:clrMapOvr>
+    <a:masterClrMapping/>
+  </p:clrMapOvr>
+</p:sld>
+</file>
+
+<file path=ppt/slides/slide16.xml><?xml version="1.0" encoding="utf-8"?>
 <p:sld xmlns:a="http://schemas.openxmlformats.org/drawingml/2006/main" xmlns:r="http://schemas.openxmlformats.org/officeDocument/2006/relationships" xmlns:p="http://schemas.openxmlformats.org/presentationml/2006/main">
   <p:cSld>
     <p:spTree>
@@ -10231,96 +11920,6 @@
               <a:ea typeface="+mn-ea"/>
               <a:cs typeface="+mn-cs"/>
             </a:endParaRPr>
-          </a:p>
-        </p:txBody>
-      </p:sp>
-      <p:sp>
-        <p:nvSpPr>
-          <p:cNvPr id="10" name="Rectangle 9">
-            <a:extLst>
-              <a:ext uri="{FF2B5EF4-FFF2-40B4-BE49-F238E27FC236}">
-                <a16:creationId xmlns:a16="http://schemas.microsoft.com/office/drawing/2014/main" id="{BB176BC0-D04D-3D2C-73E4-7194F53C288F}"/>
-              </a:ext>
-            </a:extLst>
-          </p:cNvPr>
-          <p:cNvSpPr/>
-          <p:nvPr/>
-        </p:nvSpPr>
-        <p:spPr>
-          <a:xfrm>
-            <a:off x="640080" y="6419088"/>
-            <a:ext cx="10881360" cy="18288"/>
-          </a:xfrm>
-          <a:prstGeom prst="rect">
-            <a:avLst/>
-          </a:prstGeom>
-          <a:solidFill>
-            <a:srgbClr val="EFEAE0"/>
-          </a:solidFill>
-          <a:ln>
-            <a:noFill/>
-          </a:ln>
-        </p:spPr>
-        <p:style>
-          <a:lnRef idx="1">
-            <a:schemeClr val="accent1"/>
-          </a:lnRef>
-          <a:fillRef idx="3">
-            <a:schemeClr val="accent1"/>
-          </a:fillRef>
-          <a:effectRef idx="2">
-            <a:schemeClr val="accent1"/>
-          </a:effectRef>
-          <a:fontRef idx="minor">
-            <a:schemeClr val="lt1"/>
-          </a:fontRef>
-        </p:style>
-        <p:txBody>
-          <a:bodyPr rtlCol="0" anchor="ctr"/>
-          <a:lstStyle/>
-          <a:p>
-            <a:pPr algn="ctr"/>
-            <a:endParaRPr lang="fr-FR" noProof="0" dirty="0"/>
-          </a:p>
-        </p:txBody>
-      </p:sp>
-      <p:sp>
-        <p:nvSpPr>
-          <p:cNvPr id="11" name="TextBox 10">
-            <a:extLst>
-              <a:ext uri="{FF2B5EF4-FFF2-40B4-BE49-F238E27FC236}">
-                <a16:creationId xmlns:a16="http://schemas.microsoft.com/office/drawing/2014/main" id="{AC33FDB9-1167-6AAC-3803-0FBACC83A93F}"/>
-              </a:ext>
-            </a:extLst>
-          </p:cNvPr>
-          <p:cNvSpPr txBox="1"/>
-          <p:nvPr/>
-        </p:nvSpPr>
-        <p:spPr>
-          <a:xfrm>
-            <a:off x="10789920" y="6473952"/>
-            <a:ext cx="640080" cy="182880"/>
-          </a:xfrm>
-          <a:prstGeom prst="rect">
-            <a:avLst/>
-          </a:prstGeom>
-          <a:noFill/>
-        </p:spPr>
-        <p:txBody>
-          <a:bodyPr wrap="none">
-            <a:spAutoFit/>
-          </a:bodyPr>
-          <a:lstStyle/>
-          <a:p>
-            <a:pPr algn="r"/>
-            <a:r>
-              <a:rPr lang="fr-FR" sz="900" noProof="0" dirty="0">
-                <a:solidFill>
-                  <a:srgbClr val="69625E"/>
-                </a:solidFill>
-              </a:rPr>
-              <a:t>8</a:t>
-            </a:r>
           </a:p>
         </p:txBody>
       </p:sp>
@@ -10404,6 +12003,35 @@
           </a:effectLst>
         </p:spPr>
       </p:pic>
+      <p:sp>
+        <p:nvSpPr>
+          <p:cNvPr id="4" name="Espace réservé du numéro de diapositive 3">
+            <a:extLst>
+              <a:ext uri="{FF2B5EF4-FFF2-40B4-BE49-F238E27FC236}">
+                <a16:creationId xmlns:a16="http://schemas.microsoft.com/office/drawing/2014/main" id="{83DA8967-4427-B081-4361-51CF30C4AF59}"/>
+              </a:ext>
+            </a:extLst>
+          </p:cNvPr>
+          <p:cNvSpPr>
+            <a:spLocks noGrp="1"/>
+          </p:cNvSpPr>
+          <p:nvPr>
+            <p:ph type="sldNum" sz="quarter" idx="12"/>
+          </p:nvPr>
+        </p:nvSpPr>
+        <p:spPr/>
+        <p:txBody>
+          <a:bodyPr/>
+          <a:lstStyle/>
+          <a:p>
+            <a:fld id="{C1FF6DA9-008F-8B48-92A6-B652298478BF}" type="slidenum">
+              <a:rPr lang="en-US" smtClean="0"/>
+              <a:t>16</a:t>
+            </a:fld>
+            <a:endParaRPr lang="en-US" dirty="0"/>
+          </a:p>
+        </p:txBody>
+      </p:sp>
     </p:spTree>
     <p:extLst>
       <p:ext uri="{BB962C8B-B14F-4D97-AF65-F5344CB8AC3E}">
@@ -10417,7 +12045,7 @@
 </p:sld>
 </file>
 
-<file path=ppt/slides/slide15.xml><?xml version="1.0" encoding="utf-8"?>
+<file path=ppt/slides/slide17.xml><?xml version="1.0" encoding="utf-8"?>
 <p:sld xmlns:a="http://schemas.openxmlformats.org/drawingml/2006/main" xmlns:r="http://schemas.openxmlformats.org/officeDocument/2006/relationships" xmlns:p="http://schemas.openxmlformats.org/presentationml/2006/main">
   <p:cSld>
     <p:spTree>
@@ -10770,84 +12398,6 @@
           <a:p>
             <a:pPr algn="ctr"/>
             <a:endParaRPr lang="fr-FR" noProof="0" dirty="0"/>
-          </a:p>
-        </p:txBody>
-      </p:sp>
-      <p:sp>
-        <p:nvSpPr>
-          <p:cNvPr id="10" name="Rectangle 9"/>
-          <p:cNvSpPr/>
-          <p:nvPr/>
-        </p:nvSpPr>
-        <p:spPr>
-          <a:xfrm>
-            <a:off x="640080" y="6419088"/>
-            <a:ext cx="10881360" cy="18288"/>
-          </a:xfrm>
-          <a:prstGeom prst="rect">
-            <a:avLst/>
-          </a:prstGeom>
-          <a:solidFill>
-            <a:srgbClr val="EFEAE0"/>
-          </a:solidFill>
-          <a:ln>
-            <a:noFill/>
-          </a:ln>
-        </p:spPr>
-        <p:style>
-          <a:lnRef idx="1">
-            <a:schemeClr val="accent1"/>
-          </a:lnRef>
-          <a:fillRef idx="3">
-            <a:schemeClr val="accent1"/>
-          </a:fillRef>
-          <a:effectRef idx="2">
-            <a:schemeClr val="accent1"/>
-          </a:effectRef>
-          <a:fontRef idx="minor">
-            <a:schemeClr val="lt1"/>
-          </a:fontRef>
-        </p:style>
-        <p:txBody>
-          <a:bodyPr rtlCol="0" anchor="ctr"/>
-          <a:lstStyle/>
-          <a:p>
-            <a:pPr algn="ctr"/>
-            <a:endParaRPr lang="fr-FR" noProof="0" dirty="0"/>
-          </a:p>
-        </p:txBody>
-      </p:sp>
-      <p:sp>
-        <p:nvSpPr>
-          <p:cNvPr id="11" name="TextBox 10"/>
-          <p:cNvSpPr txBox="1"/>
-          <p:nvPr/>
-        </p:nvSpPr>
-        <p:spPr>
-          <a:xfrm>
-            <a:off x="10789920" y="6473952"/>
-            <a:ext cx="640080" cy="182880"/>
-          </a:xfrm>
-          <a:prstGeom prst="rect">
-            <a:avLst/>
-          </a:prstGeom>
-          <a:noFill/>
-        </p:spPr>
-        <p:txBody>
-          <a:bodyPr wrap="none">
-            <a:spAutoFit/>
-          </a:bodyPr>
-          <a:lstStyle/>
-          <a:p>
-            <a:pPr algn="r"/>
-            <a:r>
-              <a:rPr lang="fr-FR" sz="900" noProof="0" dirty="0">
-                <a:solidFill>
-                  <a:srgbClr val="69625E"/>
-                </a:solidFill>
-              </a:rPr>
-              <a:t>10</a:t>
-            </a:r>
           </a:p>
         </p:txBody>
       </p:sp>
@@ -10891,6 +12441,35 @@
           </a:effectLst>
         </p:spPr>
       </p:pic>
+      <p:sp>
+        <p:nvSpPr>
+          <p:cNvPr id="5" name="Espace réservé du numéro de diapositive 4">
+            <a:extLst>
+              <a:ext uri="{FF2B5EF4-FFF2-40B4-BE49-F238E27FC236}">
+                <a16:creationId xmlns:a16="http://schemas.microsoft.com/office/drawing/2014/main" id="{51519722-9888-B6E8-C6C7-DBF6F9816C12}"/>
+              </a:ext>
+            </a:extLst>
+          </p:cNvPr>
+          <p:cNvSpPr>
+            <a:spLocks noGrp="1"/>
+          </p:cNvSpPr>
+          <p:nvPr>
+            <p:ph type="sldNum" sz="quarter" idx="12"/>
+          </p:nvPr>
+        </p:nvSpPr>
+        <p:spPr/>
+        <p:txBody>
+          <a:bodyPr/>
+          <a:lstStyle/>
+          <a:p>
+            <a:fld id="{C1FF6DA9-008F-8B48-92A6-B652298478BF}" type="slidenum">
+              <a:rPr lang="en-US" smtClean="0"/>
+              <a:t>17</a:t>
+            </a:fld>
+            <a:endParaRPr lang="en-US" dirty="0"/>
+          </a:p>
+        </p:txBody>
+      </p:sp>
     </p:spTree>
   </p:cSld>
   <p:clrMapOvr>
@@ -10899,7 +12478,7 @@
 </p:sld>
 </file>
 
-<file path=ppt/slides/slide16.xml><?xml version="1.0" encoding="utf-8"?>
+<file path=ppt/slides/slide18.xml><?xml version="1.0" encoding="utf-8"?>
 <p:sld xmlns:a="http://schemas.openxmlformats.org/drawingml/2006/main" xmlns:r="http://schemas.openxmlformats.org/officeDocument/2006/relationships" xmlns:p="http://schemas.openxmlformats.org/presentationml/2006/main">
   <p:cSld>
     <p:spTree>
@@ -11221,96 +12800,6 @@
           <a:p>
             <a:pPr algn="ctr"/>
             <a:endParaRPr lang="fr-FR" noProof="0" dirty="0"/>
-          </a:p>
-        </p:txBody>
-      </p:sp>
-      <p:sp>
-        <p:nvSpPr>
-          <p:cNvPr id="10" name="Rectangle 9">
-            <a:extLst>
-              <a:ext uri="{FF2B5EF4-FFF2-40B4-BE49-F238E27FC236}">
-                <a16:creationId xmlns:a16="http://schemas.microsoft.com/office/drawing/2014/main" id="{7802634D-B8FD-6ABE-35A8-CA597AB48201}"/>
-              </a:ext>
-            </a:extLst>
-          </p:cNvPr>
-          <p:cNvSpPr/>
-          <p:nvPr/>
-        </p:nvSpPr>
-        <p:spPr>
-          <a:xfrm>
-            <a:off x="640080" y="6419088"/>
-            <a:ext cx="10881360" cy="18288"/>
-          </a:xfrm>
-          <a:prstGeom prst="rect">
-            <a:avLst/>
-          </a:prstGeom>
-          <a:solidFill>
-            <a:srgbClr val="EFEAE0"/>
-          </a:solidFill>
-          <a:ln>
-            <a:noFill/>
-          </a:ln>
-        </p:spPr>
-        <p:style>
-          <a:lnRef idx="1">
-            <a:schemeClr val="accent1"/>
-          </a:lnRef>
-          <a:fillRef idx="3">
-            <a:schemeClr val="accent1"/>
-          </a:fillRef>
-          <a:effectRef idx="2">
-            <a:schemeClr val="accent1"/>
-          </a:effectRef>
-          <a:fontRef idx="minor">
-            <a:schemeClr val="lt1"/>
-          </a:fontRef>
-        </p:style>
-        <p:txBody>
-          <a:bodyPr rtlCol="0" anchor="ctr"/>
-          <a:lstStyle/>
-          <a:p>
-            <a:pPr algn="ctr"/>
-            <a:endParaRPr lang="fr-FR" noProof="0" dirty="0"/>
-          </a:p>
-        </p:txBody>
-      </p:sp>
-      <p:sp>
-        <p:nvSpPr>
-          <p:cNvPr id="11" name="TextBox 10">
-            <a:extLst>
-              <a:ext uri="{FF2B5EF4-FFF2-40B4-BE49-F238E27FC236}">
-                <a16:creationId xmlns:a16="http://schemas.microsoft.com/office/drawing/2014/main" id="{720EE2DF-B89B-1AFC-1D20-67E7AD14CDF9}"/>
-              </a:ext>
-            </a:extLst>
-          </p:cNvPr>
-          <p:cNvSpPr txBox="1"/>
-          <p:nvPr/>
-        </p:nvSpPr>
-        <p:spPr>
-          <a:xfrm>
-            <a:off x="10789920" y="6473952"/>
-            <a:ext cx="640080" cy="182880"/>
-          </a:xfrm>
-          <a:prstGeom prst="rect">
-            <a:avLst/>
-          </a:prstGeom>
-          <a:noFill/>
-        </p:spPr>
-        <p:txBody>
-          <a:bodyPr wrap="none">
-            <a:spAutoFit/>
-          </a:bodyPr>
-          <a:lstStyle/>
-          <a:p>
-            <a:pPr algn="r"/>
-            <a:r>
-              <a:rPr lang="fr-FR" sz="900" noProof="0" dirty="0">
-                <a:solidFill>
-                  <a:srgbClr val="69625E"/>
-                </a:solidFill>
-              </a:rPr>
-              <a:t>10</a:t>
-            </a:r>
           </a:p>
         </p:txBody>
       </p:sp>
@@ -11354,6 +12843,35 @@
           </a:effectLst>
         </p:spPr>
       </p:pic>
+      <p:sp>
+        <p:nvSpPr>
+          <p:cNvPr id="4" name="Espace réservé du numéro de diapositive 3">
+            <a:extLst>
+              <a:ext uri="{FF2B5EF4-FFF2-40B4-BE49-F238E27FC236}">
+                <a16:creationId xmlns:a16="http://schemas.microsoft.com/office/drawing/2014/main" id="{F9C11573-D8FD-92B7-B406-C4C6D7CEE691}"/>
+              </a:ext>
+            </a:extLst>
+          </p:cNvPr>
+          <p:cNvSpPr>
+            <a:spLocks noGrp="1"/>
+          </p:cNvSpPr>
+          <p:nvPr>
+            <p:ph type="sldNum" sz="quarter" idx="12"/>
+          </p:nvPr>
+        </p:nvSpPr>
+        <p:spPr/>
+        <p:txBody>
+          <a:bodyPr/>
+          <a:lstStyle/>
+          <a:p>
+            <a:fld id="{C1FF6DA9-008F-8B48-92A6-B652298478BF}" type="slidenum">
+              <a:rPr lang="en-US" smtClean="0"/>
+              <a:t>18</a:t>
+            </a:fld>
+            <a:endParaRPr lang="en-US" dirty="0"/>
+          </a:p>
+        </p:txBody>
+      </p:sp>
     </p:spTree>
     <p:extLst>
       <p:ext uri="{BB962C8B-B14F-4D97-AF65-F5344CB8AC3E}">
@@ -11367,7 +12885,1218 @@
 </p:sld>
 </file>
 
-<file path=ppt/slides/slide17.xml><?xml version="1.0" encoding="utf-8"?>
+<file path=ppt/slides/slide19.xml><?xml version="1.0" encoding="utf-8"?>
+<p:sld xmlns:a="http://schemas.openxmlformats.org/drawingml/2006/main" xmlns:r="http://schemas.openxmlformats.org/officeDocument/2006/relationships" xmlns:p="http://schemas.openxmlformats.org/presentationml/2006/main">
+  <p:cSld>
+    <p:spTree>
+      <p:nvGrpSpPr>
+        <p:cNvPr id="1" name="">
+          <a:extLst>
+            <a:ext uri="{FF2B5EF4-FFF2-40B4-BE49-F238E27FC236}">
+              <a16:creationId xmlns:a16="http://schemas.microsoft.com/office/drawing/2014/main" id="{19C09B69-F2A0-64E1-0C87-1B1422D689EA}"/>
+            </a:ext>
+          </a:extLst>
+        </p:cNvPr>
+        <p:cNvGrpSpPr/>
+        <p:nvPr/>
+      </p:nvGrpSpPr>
+      <p:grpSpPr>
+        <a:xfrm>
+          <a:off x="0" y="0"/>
+          <a:ext cx="0" cy="0"/>
+          <a:chOff x="0" y="0"/>
+          <a:chExt cx="0" cy="0"/>
+        </a:xfrm>
+      </p:grpSpPr>
+      <p:sp>
+        <p:nvSpPr>
+          <p:cNvPr id="3" name="TextBox 2">
+            <a:extLst>
+              <a:ext uri="{FF2B5EF4-FFF2-40B4-BE49-F238E27FC236}">
+                <a16:creationId xmlns:a16="http://schemas.microsoft.com/office/drawing/2014/main" id="{AD5F1CEA-3D1E-9041-F431-C8E5DCACD514}"/>
+              </a:ext>
+            </a:extLst>
+          </p:cNvPr>
+          <p:cNvSpPr txBox="1"/>
+          <p:nvPr/>
+        </p:nvSpPr>
+        <p:spPr>
+          <a:xfrm>
+            <a:off x="640080" y="411480"/>
+            <a:ext cx="2913233" cy="523220"/>
+          </a:xfrm>
+          <a:prstGeom prst="rect">
+            <a:avLst/>
+          </a:prstGeom>
+          <a:noFill/>
+        </p:spPr>
+        <p:txBody>
+          <a:bodyPr wrap="none">
+            <a:spAutoFit/>
+          </a:bodyPr>
+          <a:lstStyle/>
+          <a:p>
+            <a:r>
+              <a:rPr lang="fr-FR" sz="2800" b="1" noProof="0" dirty="0">
+                <a:solidFill>
+                  <a:srgbClr val="2C2522"/>
+                </a:solidFill>
+                <a:latin typeface="Aptos Display"/>
+              </a:rPr>
+              <a:t>Forms et sécurité</a:t>
+            </a:r>
+          </a:p>
+        </p:txBody>
+      </p:sp>
+      <p:sp>
+        <p:nvSpPr>
+          <p:cNvPr id="6" name="Rounded Rectangle 5">
+            <a:extLst>
+              <a:ext uri="{FF2B5EF4-FFF2-40B4-BE49-F238E27FC236}">
+                <a16:creationId xmlns:a16="http://schemas.microsoft.com/office/drawing/2014/main" id="{B2B9EF83-8359-061F-6D0E-558D232766AC}"/>
+              </a:ext>
+            </a:extLst>
+          </p:cNvPr>
+          <p:cNvSpPr/>
+          <p:nvPr/>
+        </p:nvSpPr>
+        <p:spPr>
+          <a:xfrm>
+            <a:off x="624841" y="995681"/>
+            <a:ext cx="2698930" cy="2149422"/>
+          </a:xfrm>
+          <a:prstGeom prst="roundRect">
+            <a:avLst/>
+          </a:prstGeom>
+          <a:solidFill>
+            <a:srgbClr val="FFFFFF"/>
+          </a:solidFill>
+          <a:ln>
+            <a:solidFill>
+              <a:srgbClr val="EFEAE0"/>
+            </a:solidFill>
+          </a:ln>
+        </p:spPr>
+        <p:style>
+          <a:lnRef idx="1">
+            <a:schemeClr val="accent1"/>
+          </a:lnRef>
+          <a:fillRef idx="3">
+            <a:schemeClr val="accent1"/>
+          </a:fillRef>
+          <a:effectRef idx="2">
+            <a:schemeClr val="accent1"/>
+          </a:effectRef>
+          <a:fontRef idx="minor">
+            <a:schemeClr val="lt1"/>
+          </a:fontRef>
+        </p:style>
+        <p:txBody>
+          <a:bodyPr rtlCol="0" anchor="t"/>
+          <a:lstStyle/>
+          <a:p>
+            <a:pPr marL="0" marR="0" lvl="0" indent="0" algn="l" defTabSz="457200" rtl="0" eaLnBrk="1" fontAlgn="auto" latinLnBrk="0" hangingPunct="1">
+              <a:lnSpc>
+                <a:spcPct val="100000"/>
+              </a:lnSpc>
+              <a:spcBef>
+                <a:spcPts val="0"/>
+              </a:spcBef>
+              <a:spcAft>
+                <a:spcPts val="0"/>
+              </a:spcAft>
+              <a:buClrTx/>
+              <a:buSzTx/>
+              <a:buFontTx/>
+              <a:buNone/>
+              <a:tabLst/>
+              <a:defRPr/>
+            </a:pPr>
+            <a:r>
+              <a:rPr kumimoji="0" lang="fr-FR" b="1" i="0" u="none" strike="noStrike" kern="1200" cap="none" spc="0" normalizeH="0" baseline="0" noProof="0" dirty="0">
+                <a:ln>
+                  <a:noFill/>
+                </a:ln>
+                <a:solidFill>
+                  <a:srgbClr val="F79646">
+                    <a:lumMod val="50000"/>
+                  </a:srgbClr>
+                </a:solidFill>
+                <a:effectLst/>
+                <a:uLnTx/>
+                <a:uFillTx/>
+                <a:latin typeface="Calibri"/>
+                <a:ea typeface="+mn-ea"/>
+                <a:cs typeface="+mn-cs"/>
+              </a:rPr>
+              <a:t>SECURITY</a:t>
+            </a:r>
+            <a:endParaRPr kumimoji="0" lang="fr-FR" sz="1600" b="1" i="0" u="none" strike="noStrike" kern="1200" cap="none" spc="0" normalizeH="0" baseline="0" noProof="0" dirty="0">
+              <a:ln>
+                <a:noFill/>
+              </a:ln>
+              <a:solidFill>
+                <a:srgbClr val="F79646">
+                  <a:lumMod val="50000"/>
+                </a:srgbClr>
+              </a:solidFill>
+              <a:effectLst/>
+              <a:uLnTx/>
+              <a:uFillTx/>
+              <a:latin typeface="Calibri"/>
+              <a:ea typeface="+mn-ea"/>
+              <a:cs typeface="+mn-cs"/>
+            </a:endParaRPr>
+          </a:p>
+          <a:p>
+            <a:pPr marL="0" marR="0" lvl="0" indent="0" algn="l" defTabSz="457200" rtl="0" eaLnBrk="1" fontAlgn="auto" latinLnBrk="0" hangingPunct="1">
+              <a:lnSpc>
+                <a:spcPct val="100000"/>
+              </a:lnSpc>
+              <a:spcBef>
+                <a:spcPts val="700"/>
+              </a:spcBef>
+              <a:spcAft>
+                <a:spcPts val="0"/>
+              </a:spcAft>
+              <a:buClrTx/>
+              <a:buSzTx/>
+              <a:buFontTx/>
+              <a:buNone/>
+              <a:tabLst/>
+              <a:defRPr sz="1200">
+                <a:solidFill>
+                  <a:srgbClr val="2C2522"/>
+                </a:solidFill>
+              </a:defRPr>
+            </a:pPr>
+            <a:r>
+              <a:rPr kumimoji="0" lang="fr-FR" sz="1600" b="0" i="0" u="none" strike="noStrike" kern="1200" cap="none" spc="0" normalizeH="0" baseline="0" noProof="0" dirty="0">
+                <a:ln>
+                  <a:noFill/>
+                </a:ln>
+                <a:solidFill>
+                  <a:srgbClr val="2C2522"/>
+                </a:solidFill>
+                <a:effectLst/>
+                <a:uLnTx/>
+                <a:uFillTx/>
+                <a:latin typeface="Calibri"/>
+                <a:ea typeface="+mn-ea"/>
+                <a:cs typeface="+mn-cs"/>
+              </a:rPr>
+              <a:t>Authentification</a:t>
+            </a:r>
+            <a:br>
+              <a:rPr kumimoji="0" lang="fr-FR" sz="1600" b="0" i="0" u="none" strike="noStrike" kern="1200" cap="none" spc="0" normalizeH="0" baseline="0" noProof="0" dirty="0">
+                <a:ln>
+                  <a:noFill/>
+                </a:ln>
+                <a:solidFill>
+                  <a:srgbClr val="2C2522"/>
+                </a:solidFill>
+                <a:effectLst/>
+                <a:uLnTx/>
+                <a:uFillTx/>
+                <a:latin typeface="Calibri"/>
+                <a:ea typeface="+mn-ea"/>
+                <a:cs typeface="+mn-cs"/>
+              </a:rPr>
+            </a:br>
+            <a:r>
+              <a:rPr kumimoji="0" lang="fr-FR" sz="1600" b="0" i="0" u="none" strike="noStrike" kern="1200" cap="none" spc="0" normalizeH="0" baseline="0" noProof="0" dirty="0">
+                <a:ln>
+                  <a:noFill/>
+                </a:ln>
+                <a:solidFill>
+                  <a:srgbClr val="2C2522"/>
+                </a:solidFill>
+                <a:effectLst/>
+                <a:uLnTx/>
+                <a:uFillTx/>
+                <a:latin typeface="Calibri"/>
+                <a:ea typeface="+mn-ea"/>
+                <a:cs typeface="+mn-cs"/>
+              </a:rPr>
+              <a:t>Gestion des utilisateurs</a:t>
+            </a:r>
+            <a:br>
+              <a:rPr kumimoji="0" lang="fr-FR" sz="1600" b="0" i="0" u="none" strike="noStrike" kern="1200" cap="none" spc="0" normalizeH="0" baseline="0" noProof="0" dirty="0">
+                <a:ln>
+                  <a:noFill/>
+                </a:ln>
+                <a:solidFill>
+                  <a:srgbClr val="2C2522"/>
+                </a:solidFill>
+                <a:effectLst/>
+                <a:uLnTx/>
+                <a:uFillTx/>
+                <a:latin typeface="Calibri"/>
+                <a:ea typeface="+mn-ea"/>
+                <a:cs typeface="+mn-cs"/>
+              </a:rPr>
+            </a:br>
+            <a:r>
+              <a:rPr kumimoji="0" lang="fr-FR" sz="1600" b="0" i="0" u="none" strike="noStrike" kern="1200" cap="none" spc="0" normalizeH="0" baseline="0" noProof="0" dirty="0" err="1">
+                <a:ln>
+                  <a:noFill/>
+                </a:ln>
+                <a:solidFill>
+                  <a:srgbClr val="2C2522"/>
+                </a:solidFill>
+                <a:effectLst/>
+                <a:uLnTx/>
+                <a:uFillTx/>
+                <a:latin typeface="Calibri"/>
+                <a:ea typeface="+mn-ea"/>
+                <a:cs typeface="+mn-cs"/>
+              </a:rPr>
+              <a:t>Hashage</a:t>
+            </a:r>
+            <a:r>
+              <a:rPr kumimoji="0" lang="fr-FR" sz="1600" b="0" i="0" u="none" strike="noStrike" kern="1200" cap="none" spc="0" normalizeH="0" baseline="0" noProof="0" dirty="0">
+                <a:ln>
+                  <a:noFill/>
+                </a:ln>
+                <a:solidFill>
+                  <a:srgbClr val="2C2522"/>
+                </a:solidFill>
+                <a:effectLst/>
+                <a:uLnTx/>
+                <a:uFillTx/>
+                <a:latin typeface="Calibri"/>
+                <a:ea typeface="+mn-ea"/>
+                <a:cs typeface="+mn-cs"/>
+              </a:rPr>
+              <a:t> des mots de passe</a:t>
+            </a:r>
+            <a:br>
+              <a:rPr kumimoji="0" lang="fr-FR" sz="1600" b="0" i="0" u="none" strike="noStrike" kern="1200" cap="none" spc="0" normalizeH="0" baseline="0" noProof="0" dirty="0">
+                <a:ln>
+                  <a:noFill/>
+                </a:ln>
+                <a:solidFill>
+                  <a:srgbClr val="2C2522"/>
+                </a:solidFill>
+                <a:effectLst/>
+                <a:uLnTx/>
+                <a:uFillTx/>
+                <a:latin typeface="Calibri"/>
+                <a:ea typeface="+mn-ea"/>
+                <a:cs typeface="+mn-cs"/>
+              </a:rPr>
+            </a:br>
+            <a:r>
+              <a:rPr kumimoji="0" lang="fr-FR" sz="1600" b="0" i="0" u="none" strike="noStrike" kern="1200" cap="none" spc="0" normalizeH="0" baseline="0" noProof="0" dirty="0">
+                <a:ln>
+                  <a:noFill/>
+                </a:ln>
+                <a:solidFill>
+                  <a:srgbClr val="2C2522"/>
+                </a:solidFill>
+                <a:effectLst/>
+                <a:uLnTx/>
+                <a:uFillTx/>
+                <a:latin typeface="Calibri"/>
+                <a:ea typeface="+mn-ea"/>
+                <a:cs typeface="+mn-cs"/>
+              </a:rPr>
+              <a:t>Accès à l'administration</a:t>
+            </a:r>
+          </a:p>
+          <a:p>
+            <a:pPr algn="ctr"/>
+            <a:endParaRPr lang="fr-FR" noProof="0" dirty="0"/>
+          </a:p>
+        </p:txBody>
+      </p:sp>
+      <p:pic>
+        <p:nvPicPr>
+          <p:cNvPr id="9" name="Image 8">
+            <a:extLst>
+              <a:ext uri="{FF2B5EF4-FFF2-40B4-BE49-F238E27FC236}">
+                <a16:creationId xmlns:a16="http://schemas.microsoft.com/office/drawing/2014/main" id="{A5101F6E-F155-3C61-1DBF-A3FC6AD88CDE}"/>
+              </a:ext>
+            </a:extLst>
+          </p:cNvPr>
+          <p:cNvPicPr>
+            <a:picLocks noChangeAspect="1"/>
+          </p:cNvPicPr>
+          <p:nvPr/>
+        </p:nvPicPr>
+        <p:blipFill>
+          <a:blip r:embed="rId3"/>
+          <a:stretch>
+            <a:fillRect/>
+          </a:stretch>
+        </p:blipFill>
+        <p:spPr>
+          <a:xfrm>
+            <a:off x="3759200" y="219457"/>
+            <a:ext cx="7768081" cy="6158055"/>
+          </a:xfrm>
+          <a:prstGeom prst="rect">
+            <a:avLst/>
+          </a:prstGeom>
+          <a:ln>
+            <a:noFill/>
+          </a:ln>
+          <a:effectLst>
+            <a:outerShdw blurRad="190500" algn="tl" rotWithShape="0">
+              <a:srgbClr val="000000">
+                <a:alpha val="70000"/>
+              </a:srgbClr>
+            </a:outerShdw>
+          </a:effectLst>
+        </p:spPr>
+      </p:pic>
+      <p:sp>
+        <p:nvSpPr>
+          <p:cNvPr id="4" name="Espace réservé du numéro de diapositive 3">
+            <a:extLst>
+              <a:ext uri="{FF2B5EF4-FFF2-40B4-BE49-F238E27FC236}">
+                <a16:creationId xmlns:a16="http://schemas.microsoft.com/office/drawing/2014/main" id="{7B89BC96-140C-92BB-78AB-82A39DA62DB2}"/>
+              </a:ext>
+            </a:extLst>
+          </p:cNvPr>
+          <p:cNvSpPr>
+            <a:spLocks noGrp="1"/>
+          </p:cNvSpPr>
+          <p:nvPr>
+            <p:ph type="sldNum" sz="quarter" idx="12"/>
+          </p:nvPr>
+        </p:nvSpPr>
+        <p:spPr/>
+        <p:txBody>
+          <a:bodyPr/>
+          <a:lstStyle/>
+          <a:p>
+            <a:fld id="{C1FF6DA9-008F-8B48-92A6-B652298478BF}" type="slidenum">
+              <a:rPr lang="en-US" smtClean="0"/>
+              <a:t>19</a:t>
+            </a:fld>
+            <a:endParaRPr lang="en-US" dirty="0"/>
+          </a:p>
+        </p:txBody>
+      </p:sp>
+      <p:sp>
+        <p:nvSpPr>
+          <p:cNvPr id="2" name="Rectangle 1">
+            <a:extLst>
+              <a:ext uri="{FF2B5EF4-FFF2-40B4-BE49-F238E27FC236}">
+                <a16:creationId xmlns:a16="http://schemas.microsoft.com/office/drawing/2014/main" id="{7FABD650-A063-6AD4-C81F-990130922EB6}"/>
+              </a:ext>
+            </a:extLst>
+          </p:cNvPr>
+          <p:cNvSpPr/>
+          <p:nvPr/>
+        </p:nvSpPr>
+        <p:spPr>
+          <a:xfrm>
+            <a:off x="807720" y="411480"/>
+            <a:ext cx="8519160" cy="5181600"/>
+          </a:xfrm>
+          <a:prstGeom prst="rect">
+            <a:avLst/>
+          </a:prstGeom>
+        </p:spPr>
+        <p:style>
+          <a:lnRef idx="1">
+            <a:schemeClr val="accent6"/>
+          </a:lnRef>
+          <a:fillRef idx="2">
+            <a:schemeClr val="accent6"/>
+          </a:fillRef>
+          <a:effectRef idx="1">
+            <a:schemeClr val="accent6"/>
+          </a:effectRef>
+          <a:fontRef idx="minor">
+            <a:schemeClr val="dk1"/>
+          </a:fontRef>
+        </p:style>
+        <p:txBody>
+          <a:bodyPr rtlCol="0" anchor="ctr"/>
+          <a:lstStyle/>
+          <a:p>
+            <a:pPr algn="ctr"/>
+            <a:r>
+              <a:rPr lang="pt-BR" dirty="0" err="1"/>
+              <a:t>Security.yaml</a:t>
+            </a:r>
+            <a:endParaRPr lang="pt-BR" dirty="0"/>
+          </a:p>
+          <a:p>
+            <a:pPr algn="ctr"/>
+            <a:endParaRPr lang="pt-BR" dirty="0"/>
+          </a:p>
+          <a:p>
+            <a:pPr algn="ctr"/>
+            <a:r>
+              <a:rPr lang="pt-BR" dirty="0" err="1"/>
+              <a:t>Mot</a:t>
+            </a:r>
+            <a:r>
+              <a:rPr lang="pt-BR" dirty="0"/>
+              <a:t> de </a:t>
+            </a:r>
+            <a:r>
+              <a:rPr lang="pt-BR" dirty="0" err="1"/>
+              <a:t>pass</a:t>
+            </a:r>
+            <a:endParaRPr lang="pt-BR" dirty="0"/>
+          </a:p>
+          <a:p>
+            <a:pPr algn="ctr"/>
+            <a:r>
+              <a:rPr lang="pt-BR" dirty="0" err="1"/>
+              <a:t>Provider</a:t>
+            </a:r>
+            <a:r>
+              <a:rPr lang="pt-BR" dirty="0"/>
+              <a:t> </a:t>
+            </a:r>
+            <a:r>
+              <a:rPr lang="pt-BR" dirty="0" err="1"/>
+              <a:t>manierer</a:t>
+            </a:r>
+            <a:r>
+              <a:rPr lang="pt-BR" dirty="0"/>
+              <a:t> </a:t>
+            </a:r>
+            <a:r>
+              <a:rPr lang="pt-BR" dirty="0" err="1"/>
+              <a:t>conecter</a:t>
+            </a:r>
+            <a:endParaRPr lang="pt-BR" dirty="0"/>
+          </a:p>
+          <a:p>
+            <a:pPr algn="ctr"/>
+            <a:r>
+              <a:rPr lang="fr-FR" dirty="0"/>
+              <a:t>Firewall ??</a:t>
+            </a:r>
+          </a:p>
+          <a:p>
+            <a:pPr algn="ctr"/>
+            <a:endParaRPr lang="fr-FR" dirty="0"/>
+          </a:p>
+          <a:p>
+            <a:pPr algn="ctr"/>
+            <a:endParaRPr lang="fr-FR" dirty="0"/>
+          </a:p>
+        </p:txBody>
+      </p:sp>
+    </p:spTree>
+    <p:extLst>
+      <p:ext uri="{BB962C8B-B14F-4D97-AF65-F5344CB8AC3E}">
+        <p14:creationId xmlns:p14="http://schemas.microsoft.com/office/powerpoint/2010/main" val="2627354903"/>
+      </p:ext>
+    </p:extLst>
+  </p:cSld>
+  <p:clrMapOvr>
+    <a:masterClrMapping/>
+  </p:clrMapOvr>
+</p:sld>
+</file>
+
+<file path=ppt/slides/slide2.xml><?xml version="1.0" encoding="utf-8"?>
+<p:sld xmlns:a="http://schemas.openxmlformats.org/drawingml/2006/main" xmlns:r="http://schemas.openxmlformats.org/officeDocument/2006/relationships" xmlns:p="http://schemas.openxmlformats.org/presentationml/2006/main">
+  <p:cSld>
+    <p:spTree>
+      <p:nvGrpSpPr>
+        <p:cNvPr id="1" name=""/>
+        <p:cNvGrpSpPr/>
+        <p:nvPr/>
+      </p:nvGrpSpPr>
+      <p:grpSpPr>
+        <a:xfrm>
+          <a:off x="0" y="0"/>
+          <a:ext cx="0" cy="0"/>
+          <a:chOff x="0" y="0"/>
+          <a:chExt cx="0" cy="0"/>
+        </a:xfrm>
+      </p:grpSpPr>
+      <p:sp>
+        <p:nvSpPr>
+          <p:cNvPr id="3" name="TextBox 2"/>
+          <p:cNvSpPr txBox="1"/>
+          <p:nvPr/>
+        </p:nvSpPr>
+        <p:spPr>
+          <a:xfrm>
+            <a:off x="640080" y="411480"/>
+            <a:ext cx="1759200" cy="523220"/>
+          </a:xfrm>
+          <a:prstGeom prst="rect">
+            <a:avLst/>
+          </a:prstGeom>
+          <a:noFill/>
+        </p:spPr>
+        <p:txBody>
+          <a:bodyPr wrap="none">
+            <a:spAutoFit/>
+          </a:bodyPr>
+          <a:lstStyle/>
+          <a:p>
+            <a:r>
+              <a:rPr lang="fr-FR" sz="2800" b="1" noProof="0" dirty="0">
+                <a:solidFill>
+                  <a:srgbClr val="2C2522"/>
+                </a:solidFill>
+                <a:latin typeface="Aptos Display"/>
+              </a:rPr>
+              <a:t>Sommaire</a:t>
+            </a:r>
+          </a:p>
+        </p:txBody>
+      </p:sp>
+      <p:sp>
+        <p:nvSpPr>
+          <p:cNvPr id="4" name="Rounded Rectangle 3"/>
+          <p:cNvSpPr/>
+          <p:nvPr/>
+        </p:nvSpPr>
+        <p:spPr>
+          <a:xfrm>
+            <a:off x="1519680" y="934700"/>
+            <a:ext cx="5212080" cy="5374660"/>
+          </a:xfrm>
+          <a:prstGeom prst="roundRect">
+            <a:avLst/>
+          </a:prstGeom>
+          <a:solidFill>
+            <a:srgbClr val="FFFFFF"/>
+          </a:solidFill>
+          <a:ln>
+            <a:solidFill>
+              <a:srgbClr val="EFEAE0"/>
+            </a:solidFill>
+          </a:ln>
+        </p:spPr>
+        <p:style>
+          <a:lnRef idx="1">
+            <a:schemeClr val="accent1"/>
+          </a:lnRef>
+          <a:fillRef idx="3">
+            <a:schemeClr val="accent1"/>
+          </a:fillRef>
+          <a:effectRef idx="2">
+            <a:schemeClr val="accent1"/>
+          </a:effectRef>
+          <a:fontRef idx="minor">
+            <a:schemeClr val="lt1"/>
+          </a:fontRef>
+        </p:style>
+        <p:txBody>
+          <a:bodyPr rtlCol="0" anchor="ctr"/>
+          <a:lstStyle/>
+          <a:p>
+            <a:pPr marL="342900" marR="0" lvl="0" indent="-342900" algn="l" defTabSz="457200" rtl="0" eaLnBrk="1" fontAlgn="auto" latinLnBrk="0" hangingPunct="1">
+              <a:lnSpc>
+                <a:spcPct val="100000"/>
+              </a:lnSpc>
+              <a:spcBef>
+                <a:spcPts val="0"/>
+              </a:spcBef>
+              <a:spcAft>
+                <a:spcPts val="0"/>
+              </a:spcAft>
+              <a:buClrTx/>
+              <a:buSzTx/>
+              <a:buFont typeface="Arial" panose="020B0604020202020204" pitchFamily="34" charset="0"/>
+              <a:buChar char="•"/>
+              <a:tabLst/>
+              <a:defRPr/>
+            </a:pPr>
+            <a:r>
+              <a:rPr kumimoji="0" lang="fr-FR" sz="2200" b="1" i="0" u="none" strike="noStrike" kern="1200" cap="none" spc="0" normalizeH="0" baseline="0" noProof="0" dirty="0">
+                <a:ln>
+                  <a:noFill/>
+                </a:ln>
+                <a:solidFill>
+                  <a:srgbClr val="F79646">
+                    <a:lumMod val="50000"/>
+                  </a:srgbClr>
+                </a:solidFill>
+                <a:effectLst/>
+                <a:uLnTx/>
+                <a:uFillTx/>
+                <a:latin typeface="Calibri"/>
+                <a:ea typeface="+mn-ea"/>
+                <a:cs typeface="+mn-cs"/>
+              </a:rPr>
+              <a:t>Contexte et objectifs</a:t>
+            </a:r>
+          </a:p>
+          <a:p>
+            <a:pPr marL="342900" marR="0" lvl="0" indent="-342900" algn="l" defTabSz="457200" rtl="0" eaLnBrk="1" fontAlgn="auto" latinLnBrk="0" hangingPunct="1">
+              <a:lnSpc>
+                <a:spcPct val="100000"/>
+              </a:lnSpc>
+              <a:spcBef>
+                <a:spcPts val="0"/>
+              </a:spcBef>
+              <a:spcAft>
+                <a:spcPts val="0"/>
+              </a:spcAft>
+              <a:buClrTx/>
+              <a:buSzTx/>
+              <a:buFont typeface="Arial" panose="020B0604020202020204" pitchFamily="34" charset="0"/>
+              <a:buChar char="•"/>
+              <a:tabLst/>
+              <a:defRPr/>
+            </a:pPr>
+            <a:r>
+              <a:rPr kumimoji="0" lang="fr-FR" sz="2200" b="1" i="0" u="none" strike="noStrike" kern="1200" cap="none" spc="0" normalizeH="0" baseline="0" noProof="0" dirty="0">
+                <a:ln>
+                  <a:noFill/>
+                </a:ln>
+                <a:solidFill>
+                  <a:srgbClr val="F79646">
+                    <a:lumMod val="50000"/>
+                  </a:srgbClr>
+                </a:solidFill>
+                <a:effectLst/>
+                <a:uLnTx/>
+                <a:uFillTx/>
+                <a:latin typeface="Calibri"/>
+                <a:ea typeface="+mn-ea"/>
+                <a:cs typeface="+mn-cs"/>
+              </a:rPr>
+              <a:t>Technologies et environnement</a:t>
+            </a:r>
+          </a:p>
+          <a:p>
+            <a:pPr marL="342900" marR="0" lvl="0" indent="-342900" algn="l" defTabSz="457200" rtl="0" eaLnBrk="1" fontAlgn="auto" latinLnBrk="0" hangingPunct="1">
+              <a:lnSpc>
+                <a:spcPct val="100000"/>
+              </a:lnSpc>
+              <a:spcBef>
+                <a:spcPts val="0"/>
+              </a:spcBef>
+              <a:spcAft>
+                <a:spcPts val="0"/>
+              </a:spcAft>
+              <a:buClrTx/>
+              <a:buSzTx/>
+              <a:buFont typeface="Arial" panose="020B0604020202020204" pitchFamily="34" charset="0"/>
+              <a:buChar char="•"/>
+              <a:tabLst/>
+              <a:defRPr/>
+            </a:pPr>
+            <a:r>
+              <a:rPr kumimoji="0" lang="fr-FR" sz="2200" b="1" i="0" u="none" strike="noStrike" kern="1200" cap="none" spc="0" normalizeH="0" baseline="0" noProof="0" dirty="0">
+                <a:ln>
+                  <a:noFill/>
+                </a:ln>
+                <a:solidFill>
+                  <a:srgbClr val="F79646">
+                    <a:lumMod val="50000"/>
+                  </a:srgbClr>
+                </a:solidFill>
+                <a:effectLst/>
+                <a:uLnTx/>
+                <a:uFillTx/>
+                <a:latin typeface="Calibri"/>
+                <a:ea typeface="+mn-ea"/>
+                <a:cs typeface="+mn-cs"/>
+              </a:rPr>
+              <a:t>Schéma UML / BDD</a:t>
+            </a:r>
+          </a:p>
+          <a:p>
+            <a:pPr marL="342900" marR="0" lvl="0" indent="-342900" algn="l" defTabSz="457200" rtl="0" eaLnBrk="1" fontAlgn="auto" latinLnBrk="0" hangingPunct="1">
+              <a:lnSpc>
+                <a:spcPct val="100000"/>
+              </a:lnSpc>
+              <a:spcBef>
+                <a:spcPts val="0"/>
+              </a:spcBef>
+              <a:spcAft>
+                <a:spcPts val="0"/>
+              </a:spcAft>
+              <a:buClrTx/>
+              <a:buSzTx/>
+              <a:buFont typeface="Arial" panose="020B0604020202020204" pitchFamily="34" charset="0"/>
+              <a:buChar char="•"/>
+              <a:tabLst/>
+              <a:defRPr/>
+            </a:pPr>
+            <a:r>
+              <a:rPr kumimoji="0" lang="fr-FR" sz="2200" b="1" i="0" u="none" strike="noStrike" kern="1200" cap="none" spc="0" normalizeH="0" baseline="0" noProof="0" dirty="0">
+                <a:ln>
+                  <a:noFill/>
+                </a:ln>
+                <a:solidFill>
+                  <a:srgbClr val="F79646">
+                    <a:lumMod val="50000"/>
+                  </a:srgbClr>
+                </a:solidFill>
+                <a:effectLst/>
+                <a:uLnTx/>
+                <a:uFillTx/>
+                <a:latin typeface="Calibri"/>
+                <a:ea typeface="+mn-ea"/>
+                <a:cs typeface="+mn-cs"/>
+              </a:rPr>
+              <a:t>Maquette → réalisation</a:t>
+            </a:r>
+          </a:p>
+          <a:p>
+            <a:pPr marL="342900" marR="0" lvl="0" indent="-342900" algn="l" defTabSz="457200" rtl="0" eaLnBrk="1" fontAlgn="auto" latinLnBrk="0" hangingPunct="1">
+              <a:lnSpc>
+                <a:spcPct val="100000"/>
+              </a:lnSpc>
+              <a:spcBef>
+                <a:spcPts val="0"/>
+              </a:spcBef>
+              <a:spcAft>
+                <a:spcPts val="0"/>
+              </a:spcAft>
+              <a:buClrTx/>
+              <a:buSzTx/>
+              <a:buFont typeface="Arial" panose="020B0604020202020204" pitchFamily="34" charset="0"/>
+              <a:buChar char="•"/>
+              <a:tabLst/>
+              <a:defRPr/>
+            </a:pPr>
+            <a:r>
+              <a:rPr kumimoji="0" lang="fr-FR" sz="2200" b="1" i="0" u="none" strike="noStrike" kern="1200" cap="none" spc="0" normalizeH="0" baseline="0" noProof="0" dirty="0">
+                <a:ln>
+                  <a:noFill/>
+                </a:ln>
+                <a:solidFill>
+                  <a:srgbClr val="F79646">
+                    <a:lumMod val="50000"/>
+                  </a:srgbClr>
+                </a:solidFill>
+                <a:effectLst/>
+                <a:uLnTx/>
+                <a:uFillTx/>
+                <a:latin typeface="Calibri"/>
+                <a:ea typeface="+mn-ea"/>
+                <a:cs typeface="+mn-cs"/>
+              </a:rPr>
+              <a:t>Fixtures → Faker</a:t>
+            </a:r>
+          </a:p>
+          <a:p>
+            <a:pPr marL="342900" marR="0" lvl="0" indent="-342900" algn="l" defTabSz="457200" rtl="0" eaLnBrk="1" fontAlgn="auto" latinLnBrk="0" hangingPunct="1">
+              <a:lnSpc>
+                <a:spcPct val="100000"/>
+              </a:lnSpc>
+              <a:spcBef>
+                <a:spcPts val="0"/>
+              </a:spcBef>
+              <a:spcAft>
+                <a:spcPts val="0"/>
+              </a:spcAft>
+              <a:buClrTx/>
+              <a:buSzTx/>
+              <a:buFont typeface="Arial" panose="020B0604020202020204" pitchFamily="34" charset="0"/>
+              <a:buChar char="•"/>
+              <a:tabLst/>
+              <a:defRPr/>
+            </a:pPr>
+            <a:r>
+              <a:rPr kumimoji="0" lang="fr-FR" sz="2200" b="1" i="0" u="none" strike="noStrike" kern="1200" cap="none" spc="0" normalizeH="0" baseline="0" noProof="0" dirty="0" err="1">
+                <a:ln>
+                  <a:noFill/>
+                </a:ln>
+                <a:solidFill>
+                  <a:srgbClr val="F79646">
+                    <a:lumMod val="50000"/>
+                  </a:srgbClr>
+                </a:solidFill>
+                <a:effectLst/>
+                <a:uLnTx/>
+                <a:uFillTx/>
+                <a:latin typeface="Calibri"/>
+                <a:ea typeface="+mn-ea"/>
+                <a:cs typeface="+mn-cs"/>
+              </a:rPr>
+              <a:t>Front-end</a:t>
+            </a:r>
+            <a:endParaRPr kumimoji="0" lang="fr-FR" sz="2200" b="1" i="0" u="none" strike="noStrike" kern="1200" cap="none" spc="0" normalizeH="0" baseline="0" noProof="0" dirty="0">
+              <a:ln>
+                <a:noFill/>
+              </a:ln>
+              <a:solidFill>
+                <a:srgbClr val="F79646">
+                  <a:lumMod val="50000"/>
+                </a:srgbClr>
+              </a:solidFill>
+              <a:effectLst/>
+              <a:uLnTx/>
+              <a:uFillTx/>
+              <a:latin typeface="Calibri"/>
+              <a:ea typeface="+mn-ea"/>
+              <a:cs typeface="+mn-cs"/>
+            </a:endParaRPr>
+          </a:p>
+          <a:p>
+            <a:pPr marL="342900" marR="0" lvl="0" indent="-342900" algn="l" defTabSz="457200" rtl="0" eaLnBrk="1" fontAlgn="auto" latinLnBrk="0" hangingPunct="1">
+              <a:lnSpc>
+                <a:spcPct val="100000"/>
+              </a:lnSpc>
+              <a:spcBef>
+                <a:spcPts val="0"/>
+              </a:spcBef>
+              <a:spcAft>
+                <a:spcPts val="0"/>
+              </a:spcAft>
+              <a:buClrTx/>
+              <a:buSzTx/>
+              <a:buFont typeface="Arial" panose="020B0604020202020204" pitchFamily="34" charset="0"/>
+              <a:buChar char="•"/>
+              <a:tabLst/>
+              <a:defRPr/>
+            </a:pPr>
+            <a:r>
+              <a:rPr kumimoji="0" lang="fr-FR" sz="2200" b="1" i="0" u="none" strike="noStrike" kern="1200" cap="none" spc="0" normalizeH="0" baseline="0" noProof="0" dirty="0" err="1">
+                <a:ln>
+                  <a:noFill/>
+                </a:ln>
+                <a:solidFill>
+                  <a:srgbClr val="F79646">
+                    <a:lumMod val="50000"/>
+                  </a:srgbClr>
+                </a:solidFill>
+                <a:effectLst/>
+                <a:uLnTx/>
+                <a:uFillTx/>
+                <a:latin typeface="Calibri"/>
+                <a:ea typeface="+mn-ea"/>
+                <a:cs typeface="+mn-cs"/>
+              </a:rPr>
+              <a:t>Back-end</a:t>
+            </a:r>
+            <a:r>
+              <a:rPr kumimoji="0" lang="fr-FR" sz="2200" b="1" i="0" u="none" strike="noStrike" kern="1200" cap="none" spc="0" normalizeH="0" baseline="0" noProof="0" dirty="0">
+                <a:ln>
+                  <a:noFill/>
+                </a:ln>
+                <a:solidFill>
+                  <a:srgbClr val="F79646">
+                    <a:lumMod val="50000"/>
+                  </a:srgbClr>
+                </a:solidFill>
+                <a:effectLst/>
+                <a:uLnTx/>
+                <a:uFillTx/>
+                <a:latin typeface="Calibri"/>
+                <a:ea typeface="+mn-ea"/>
+                <a:cs typeface="+mn-cs"/>
+              </a:rPr>
+              <a:t> — MVC</a:t>
+            </a:r>
+          </a:p>
+          <a:p>
+            <a:pPr marL="342900" marR="0" lvl="0" indent="-342900" algn="l" defTabSz="457200" rtl="0" eaLnBrk="1" fontAlgn="auto" latinLnBrk="0" hangingPunct="1">
+              <a:lnSpc>
+                <a:spcPct val="100000"/>
+              </a:lnSpc>
+              <a:spcBef>
+                <a:spcPts val="0"/>
+              </a:spcBef>
+              <a:spcAft>
+                <a:spcPts val="0"/>
+              </a:spcAft>
+              <a:buClrTx/>
+              <a:buSzTx/>
+              <a:buFont typeface="Arial" panose="020B0604020202020204" pitchFamily="34" charset="0"/>
+              <a:buChar char="•"/>
+              <a:tabLst/>
+              <a:defRPr/>
+            </a:pPr>
+            <a:r>
+              <a:rPr kumimoji="0" lang="fr-FR" sz="2200" b="1" i="0" u="none" strike="noStrike" kern="1200" cap="none" spc="0" normalizeH="0" baseline="0" noProof="0" dirty="0">
+                <a:ln>
+                  <a:noFill/>
+                </a:ln>
+                <a:solidFill>
+                  <a:srgbClr val="F79646">
+                    <a:lumMod val="50000"/>
+                  </a:srgbClr>
+                </a:solidFill>
+                <a:effectLst/>
+                <a:uLnTx/>
+                <a:uFillTx/>
+                <a:latin typeface="Calibri"/>
+                <a:ea typeface="+mn-ea"/>
+                <a:cs typeface="+mn-cs"/>
+              </a:rPr>
+              <a:t>Repository → Doctrine → SQL</a:t>
+            </a:r>
+          </a:p>
+          <a:p>
+            <a:pPr marL="342900" marR="0" lvl="0" indent="-342900" algn="l" defTabSz="457200" rtl="0" eaLnBrk="1" fontAlgn="auto" latinLnBrk="0" hangingPunct="1">
+              <a:lnSpc>
+                <a:spcPct val="100000"/>
+              </a:lnSpc>
+              <a:spcBef>
+                <a:spcPts val="0"/>
+              </a:spcBef>
+              <a:spcAft>
+                <a:spcPts val="0"/>
+              </a:spcAft>
+              <a:buClrTx/>
+              <a:buSzTx/>
+              <a:buFont typeface="Arial" panose="020B0604020202020204" pitchFamily="34" charset="0"/>
+              <a:buChar char="•"/>
+              <a:tabLst/>
+              <a:defRPr/>
+            </a:pPr>
+            <a:r>
+              <a:rPr kumimoji="0" lang="fr-FR" sz="2200" b="1" i="0" u="none" strike="noStrike" kern="1200" cap="none" spc="0" normalizeH="0" baseline="0" noProof="0" dirty="0">
+                <a:ln>
+                  <a:noFill/>
+                </a:ln>
+                <a:solidFill>
+                  <a:srgbClr val="F79646">
+                    <a:lumMod val="50000"/>
+                  </a:srgbClr>
+                </a:solidFill>
+                <a:effectLst/>
+                <a:uLnTx/>
+                <a:uFillTx/>
+                <a:latin typeface="Calibri"/>
+                <a:ea typeface="+mn-ea"/>
+                <a:cs typeface="+mn-cs"/>
+              </a:rPr>
+              <a:t>CRUD</a:t>
+            </a:r>
+          </a:p>
+          <a:p>
+            <a:pPr marL="342900" marR="0" lvl="0" indent="-342900" algn="l" defTabSz="457200" rtl="0" eaLnBrk="1" fontAlgn="auto" latinLnBrk="0" hangingPunct="1">
+              <a:lnSpc>
+                <a:spcPct val="100000"/>
+              </a:lnSpc>
+              <a:spcBef>
+                <a:spcPts val="0"/>
+              </a:spcBef>
+              <a:spcAft>
+                <a:spcPts val="0"/>
+              </a:spcAft>
+              <a:buClrTx/>
+              <a:buSzTx/>
+              <a:buFont typeface="Arial" panose="020B0604020202020204" pitchFamily="34" charset="0"/>
+              <a:buChar char="•"/>
+              <a:tabLst/>
+              <a:defRPr/>
+            </a:pPr>
+            <a:r>
+              <a:rPr kumimoji="0" lang="fr-FR" sz="2200" b="1" i="0" u="none" strike="noStrike" kern="1200" cap="none" spc="0" normalizeH="0" baseline="0" noProof="0" dirty="0">
+                <a:ln>
+                  <a:noFill/>
+                </a:ln>
+                <a:solidFill>
+                  <a:srgbClr val="F79646">
+                    <a:lumMod val="50000"/>
+                  </a:srgbClr>
+                </a:solidFill>
+                <a:effectLst/>
+                <a:uLnTx/>
+                <a:uFillTx/>
+                <a:latin typeface="Calibri"/>
+                <a:ea typeface="+mn-ea"/>
+                <a:cs typeface="+mn-cs"/>
+              </a:rPr>
+              <a:t>Forms et sécurité</a:t>
+            </a:r>
+          </a:p>
+          <a:p>
+            <a:pPr marL="342900" marR="0" lvl="0" indent="-342900" algn="l" defTabSz="457200" rtl="0" eaLnBrk="1" fontAlgn="auto" latinLnBrk="0" hangingPunct="1">
+              <a:lnSpc>
+                <a:spcPct val="100000"/>
+              </a:lnSpc>
+              <a:spcBef>
+                <a:spcPts val="0"/>
+              </a:spcBef>
+              <a:spcAft>
+                <a:spcPts val="0"/>
+              </a:spcAft>
+              <a:buClrTx/>
+              <a:buSzTx/>
+              <a:buFont typeface="Arial" panose="020B0604020202020204" pitchFamily="34" charset="0"/>
+              <a:buChar char="•"/>
+              <a:tabLst/>
+              <a:defRPr/>
+            </a:pPr>
+            <a:r>
+              <a:rPr kumimoji="0" lang="fr-FR" sz="2200" b="1" i="0" u="none" strike="noStrike" kern="1200" cap="none" spc="0" normalizeH="0" baseline="0" noProof="0" dirty="0">
+                <a:ln>
+                  <a:noFill/>
+                </a:ln>
+                <a:solidFill>
+                  <a:srgbClr val="F79646">
+                    <a:lumMod val="50000"/>
+                  </a:srgbClr>
+                </a:solidFill>
+                <a:effectLst/>
+                <a:uLnTx/>
+                <a:uFillTx/>
+                <a:latin typeface="Calibri"/>
+                <a:ea typeface="+mn-ea"/>
+                <a:cs typeface="+mn-cs"/>
+              </a:rPr>
+              <a:t>Démonstration</a:t>
+            </a:r>
+          </a:p>
+          <a:p>
+            <a:pPr marL="342900" marR="0" lvl="0" indent="-342900" algn="l" defTabSz="457200" rtl="0" eaLnBrk="1" fontAlgn="auto" latinLnBrk="0" hangingPunct="1">
+              <a:lnSpc>
+                <a:spcPct val="100000"/>
+              </a:lnSpc>
+              <a:spcBef>
+                <a:spcPts val="0"/>
+              </a:spcBef>
+              <a:spcAft>
+                <a:spcPts val="0"/>
+              </a:spcAft>
+              <a:buClrTx/>
+              <a:buSzTx/>
+              <a:buFont typeface="Arial" panose="020B0604020202020204" pitchFamily="34" charset="0"/>
+              <a:buChar char="•"/>
+              <a:tabLst/>
+              <a:defRPr/>
+            </a:pPr>
+            <a:r>
+              <a:rPr kumimoji="0" lang="fr-FR" sz="2200" b="1" i="0" u="none" strike="noStrike" kern="1200" cap="none" spc="0" normalizeH="0" baseline="0" noProof="0" dirty="0">
+                <a:ln>
+                  <a:noFill/>
+                </a:ln>
+                <a:solidFill>
+                  <a:srgbClr val="F79646">
+                    <a:lumMod val="50000"/>
+                  </a:srgbClr>
+                </a:solidFill>
+                <a:effectLst/>
+                <a:uLnTx/>
+                <a:uFillTx/>
+                <a:latin typeface="Calibri"/>
+                <a:ea typeface="+mn-ea"/>
+                <a:cs typeface="+mn-cs"/>
+              </a:rPr>
+              <a:t>Difficultés rencontrées</a:t>
+            </a:r>
+          </a:p>
+          <a:p>
+            <a:pPr marL="342900" marR="0" lvl="0" indent="-342900" algn="l" defTabSz="457200" rtl="0" eaLnBrk="1" fontAlgn="auto" latinLnBrk="0" hangingPunct="1">
+              <a:lnSpc>
+                <a:spcPct val="100000"/>
+              </a:lnSpc>
+              <a:spcBef>
+                <a:spcPts val="0"/>
+              </a:spcBef>
+              <a:spcAft>
+                <a:spcPts val="0"/>
+              </a:spcAft>
+              <a:buClrTx/>
+              <a:buSzTx/>
+              <a:buFont typeface="Arial" panose="020B0604020202020204" pitchFamily="34" charset="0"/>
+              <a:buChar char="•"/>
+              <a:tabLst/>
+              <a:defRPr/>
+            </a:pPr>
+            <a:r>
+              <a:rPr kumimoji="0" lang="fr-FR" sz="2200" b="1" i="0" u="none" strike="noStrike" kern="1200" cap="none" spc="0" normalizeH="0" baseline="0" noProof="0" dirty="0">
+                <a:ln>
+                  <a:noFill/>
+                </a:ln>
+                <a:solidFill>
+                  <a:srgbClr val="F79646">
+                    <a:lumMod val="50000"/>
+                  </a:srgbClr>
+                </a:solidFill>
+                <a:effectLst/>
+                <a:uLnTx/>
+                <a:uFillTx/>
+                <a:latin typeface="Calibri"/>
+                <a:ea typeface="+mn-ea"/>
+                <a:cs typeface="+mn-cs"/>
+              </a:rPr>
+              <a:t>Évolutions prévues</a:t>
+            </a:r>
+          </a:p>
+          <a:p>
+            <a:pPr marL="342900" marR="0" lvl="0" indent="-342900" algn="l" defTabSz="457200" rtl="0" eaLnBrk="1" fontAlgn="auto" latinLnBrk="0" hangingPunct="1">
+              <a:lnSpc>
+                <a:spcPct val="100000"/>
+              </a:lnSpc>
+              <a:spcBef>
+                <a:spcPts val="0"/>
+              </a:spcBef>
+              <a:spcAft>
+                <a:spcPts val="0"/>
+              </a:spcAft>
+              <a:buClrTx/>
+              <a:buSzTx/>
+              <a:buFont typeface="Arial" panose="020B0604020202020204" pitchFamily="34" charset="0"/>
+              <a:buChar char="•"/>
+              <a:tabLst/>
+              <a:defRPr/>
+            </a:pPr>
+            <a:r>
+              <a:rPr kumimoji="0" lang="fr-FR" sz="2200" b="1" i="0" u="none" strike="noStrike" kern="1200" cap="none" spc="0" normalizeH="0" baseline="0" noProof="0" dirty="0">
+                <a:ln>
+                  <a:noFill/>
+                </a:ln>
+                <a:solidFill>
+                  <a:srgbClr val="F79646">
+                    <a:lumMod val="50000"/>
+                  </a:srgbClr>
+                </a:solidFill>
+                <a:effectLst/>
+                <a:uLnTx/>
+                <a:uFillTx/>
+                <a:latin typeface="Calibri"/>
+                <a:ea typeface="+mn-ea"/>
+                <a:cs typeface="+mn-cs"/>
+              </a:rPr>
+              <a:t>Conclusion</a:t>
+            </a:r>
+          </a:p>
+        </p:txBody>
+      </p:sp>
+      <p:sp>
+        <p:nvSpPr>
+          <p:cNvPr id="5" name="Espace réservé du numéro de diapositive 4">
+            <a:extLst>
+              <a:ext uri="{FF2B5EF4-FFF2-40B4-BE49-F238E27FC236}">
+                <a16:creationId xmlns:a16="http://schemas.microsoft.com/office/drawing/2014/main" id="{FBC80B67-F870-D986-9C57-372F98C16AA9}"/>
+              </a:ext>
+            </a:extLst>
+          </p:cNvPr>
+          <p:cNvSpPr>
+            <a:spLocks noGrp="1"/>
+          </p:cNvSpPr>
+          <p:nvPr>
+            <p:ph type="sldNum" sz="quarter" idx="12"/>
+          </p:nvPr>
+        </p:nvSpPr>
+        <p:spPr/>
+        <p:txBody>
+          <a:bodyPr/>
+          <a:lstStyle/>
+          <a:p>
+            <a:fld id="{C1FF6DA9-008F-8B48-92A6-B652298478BF}" type="slidenum">
+              <a:rPr lang="en-US" smtClean="0"/>
+              <a:t>2</a:t>
+            </a:fld>
+            <a:endParaRPr lang="en-US" dirty="0"/>
+          </a:p>
+        </p:txBody>
+      </p:sp>
+    </p:spTree>
+  </p:cSld>
+  <p:clrMapOvr>
+    <a:masterClrMapping/>
+  </p:clrMapOvr>
+</p:sld>
+</file>
+
+<file path=ppt/slides/slide20.xml><?xml version="1.0" encoding="utf-8"?>
 <p:sld xmlns:a="http://schemas.openxmlformats.org/drawingml/2006/main" xmlns:r="http://schemas.openxmlformats.org/officeDocument/2006/relationships" xmlns:p="http://schemas.openxmlformats.org/presentationml/2006/main">
   <p:cSld>
     <p:spTree>
@@ -11805,84 +14534,6 @@
       </p:sp>
       <p:sp>
         <p:nvSpPr>
-          <p:cNvPr id="19" name="Rectangle 18"/>
-          <p:cNvSpPr/>
-          <p:nvPr/>
-        </p:nvSpPr>
-        <p:spPr>
-          <a:xfrm>
-            <a:off x="640080" y="6419088"/>
-            <a:ext cx="10881360" cy="18288"/>
-          </a:xfrm>
-          <a:prstGeom prst="rect">
-            <a:avLst/>
-          </a:prstGeom>
-          <a:solidFill>
-            <a:srgbClr val="EFEAE0"/>
-          </a:solidFill>
-          <a:ln>
-            <a:noFill/>
-          </a:ln>
-        </p:spPr>
-        <p:style>
-          <a:lnRef idx="1">
-            <a:schemeClr val="accent1"/>
-          </a:lnRef>
-          <a:fillRef idx="3">
-            <a:schemeClr val="accent1"/>
-          </a:fillRef>
-          <a:effectRef idx="2">
-            <a:schemeClr val="accent1"/>
-          </a:effectRef>
-          <a:fontRef idx="minor">
-            <a:schemeClr val="lt1"/>
-          </a:fontRef>
-        </p:style>
-        <p:txBody>
-          <a:bodyPr rtlCol="0" anchor="ctr"/>
-          <a:lstStyle/>
-          <a:p>
-            <a:pPr algn="ctr"/>
-            <a:endParaRPr lang="fr-FR" noProof="0" dirty="0"/>
-          </a:p>
-        </p:txBody>
-      </p:sp>
-      <p:sp>
-        <p:nvSpPr>
-          <p:cNvPr id="20" name="TextBox 19"/>
-          <p:cNvSpPr txBox="1"/>
-          <p:nvPr/>
-        </p:nvSpPr>
-        <p:spPr>
-          <a:xfrm>
-            <a:off x="10789920" y="6473952"/>
-            <a:ext cx="640080" cy="182880"/>
-          </a:xfrm>
-          <a:prstGeom prst="rect">
-            <a:avLst/>
-          </a:prstGeom>
-          <a:noFill/>
-        </p:spPr>
-        <p:txBody>
-          <a:bodyPr wrap="none">
-            <a:spAutoFit/>
-          </a:bodyPr>
-          <a:lstStyle/>
-          <a:p>
-            <a:pPr algn="r"/>
-            <a:r>
-              <a:rPr lang="fr-FR" sz="900" noProof="0" dirty="0">
-                <a:solidFill>
-                  <a:srgbClr val="69625E"/>
-                </a:solidFill>
-              </a:rPr>
-              <a:t>11</a:t>
-            </a:r>
-          </a:p>
-        </p:txBody>
-      </p:sp>
-      <p:sp>
-        <p:nvSpPr>
           <p:cNvPr id="22" name="Rounded Rectangle 16">
             <a:extLst>
               <a:ext uri="{FF2B5EF4-FFF2-40B4-BE49-F238E27FC236}">
@@ -11942,6 +14593,35 @@
           </a:p>
         </p:txBody>
       </p:sp>
+      <p:sp>
+        <p:nvSpPr>
+          <p:cNvPr id="4" name="Espace réservé du numéro de diapositive 3">
+            <a:extLst>
+              <a:ext uri="{FF2B5EF4-FFF2-40B4-BE49-F238E27FC236}">
+                <a16:creationId xmlns:a16="http://schemas.microsoft.com/office/drawing/2014/main" id="{FBFD72F4-8BB5-6E6D-C4B4-4E968818F867}"/>
+              </a:ext>
+            </a:extLst>
+          </p:cNvPr>
+          <p:cNvSpPr>
+            <a:spLocks noGrp="1"/>
+          </p:cNvSpPr>
+          <p:nvPr>
+            <p:ph type="sldNum" sz="quarter" idx="12"/>
+          </p:nvPr>
+        </p:nvSpPr>
+        <p:spPr/>
+        <p:txBody>
+          <a:bodyPr/>
+          <a:lstStyle/>
+          <a:p>
+            <a:fld id="{C1FF6DA9-008F-8B48-92A6-B652298478BF}" type="slidenum">
+              <a:rPr lang="en-US" smtClean="0"/>
+              <a:t>20</a:t>
+            </a:fld>
+            <a:endParaRPr lang="en-US" dirty="0"/>
+          </a:p>
+        </p:txBody>
+      </p:sp>
     </p:spTree>
   </p:cSld>
   <p:clrMapOvr>
@@ -11950,7 +14630,7 @@
 </p:sld>
 </file>
 
-<file path=ppt/slides/slide18.xml><?xml version="1.0" encoding="utf-8"?>
+<file path=ppt/slides/slide21.xml><?xml version="1.0" encoding="utf-8"?>
 <p:sld xmlns:a="http://schemas.openxmlformats.org/drawingml/2006/main" xmlns:r="http://schemas.openxmlformats.org/officeDocument/2006/relationships" xmlns:p="http://schemas.openxmlformats.org/presentationml/2006/main">
   <p:cSld>
     <p:spTree>
@@ -11997,84 +14677,6 @@
                 <a:latin typeface="Aptos Display"/>
               </a:rPr>
               <a:t>Difficultés rencontrées</a:t>
-            </a:r>
-          </a:p>
-        </p:txBody>
-      </p:sp>
-      <p:sp>
-        <p:nvSpPr>
-          <p:cNvPr id="5" name="Rectangle 4"/>
-          <p:cNvSpPr/>
-          <p:nvPr/>
-        </p:nvSpPr>
-        <p:spPr>
-          <a:xfrm>
-            <a:off x="640080" y="6419088"/>
-            <a:ext cx="10881360" cy="18288"/>
-          </a:xfrm>
-          <a:prstGeom prst="rect">
-            <a:avLst/>
-          </a:prstGeom>
-          <a:solidFill>
-            <a:srgbClr val="EFEAE0"/>
-          </a:solidFill>
-          <a:ln>
-            <a:noFill/>
-          </a:ln>
-        </p:spPr>
-        <p:style>
-          <a:lnRef idx="1">
-            <a:schemeClr val="accent1"/>
-          </a:lnRef>
-          <a:fillRef idx="3">
-            <a:schemeClr val="accent1"/>
-          </a:fillRef>
-          <a:effectRef idx="2">
-            <a:schemeClr val="accent1"/>
-          </a:effectRef>
-          <a:fontRef idx="minor">
-            <a:schemeClr val="lt1"/>
-          </a:fontRef>
-        </p:style>
-        <p:txBody>
-          <a:bodyPr rtlCol="0" anchor="ctr"/>
-          <a:lstStyle/>
-          <a:p>
-            <a:pPr algn="ctr"/>
-            <a:endParaRPr lang="fr-FR" noProof="0" dirty="0"/>
-          </a:p>
-        </p:txBody>
-      </p:sp>
-      <p:sp>
-        <p:nvSpPr>
-          <p:cNvPr id="6" name="TextBox 5"/>
-          <p:cNvSpPr txBox="1"/>
-          <p:nvPr/>
-        </p:nvSpPr>
-        <p:spPr>
-          <a:xfrm>
-            <a:off x="10789920" y="6473952"/>
-            <a:ext cx="640080" cy="182880"/>
-          </a:xfrm>
-          <a:prstGeom prst="rect">
-            <a:avLst/>
-          </a:prstGeom>
-          <a:noFill/>
-        </p:spPr>
-        <p:txBody>
-          <a:bodyPr wrap="none">
-            <a:spAutoFit/>
-          </a:bodyPr>
-          <a:lstStyle/>
-          <a:p>
-            <a:pPr algn="r"/>
-            <a:r>
-              <a:rPr lang="fr-FR" sz="900" noProof="0" dirty="0">
-                <a:solidFill>
-                  <a:srgbClr val="69625E"/>
-                </a:solidFill>
-              </a:rPr>
-              <a:t>12</a:t>
             </a:r>
           </a:p>
         </p:txBody>
@@ -12152,9 +14754,10 @@
               </a:defRPr>
             </a:pPr>
             <a:r>
-              <a:rPr lang="fr-FR" dirty="0"/>
-              <a:t>Compréhension de l'architecture Symfony avec Docker</a:t>
-            </a:r>
+              <a:rPr lang="fr-FR" sz="2000" dirty="0"/>
+              <a:t>Répondre aux besoins spécifiques d'une autre personne.</a:t>
+            </a:r>
+            <a:endParaRPr lang="fr-FR" dirty="0"/>
           </a:p>
           <a:p>
             <a:pPr marL="342900" indent="-342900">
@@ -12171,7 +14774,7 @@
             </a:pPr>
             <a:r>
               <a:rPr lang="fr-FR" dirty="0"/>
-              <a:t>Relations entre les entités Doctrine</a:t>
+              <a:t>Compréhension de l'architecture Symfony avec Docker</a:t>
             </a:r>
           </a:p>
           <a:p>
@@ -12189,7 +14792,7 @@
             </a:pPr>
             <a:r>
               <a:rPr lang="fr-FR" dirty="0"/>
-              <a:t>Communication Controller ↔ Repository ↔ Twig</a:t>
+              <a:t>Relations entre les entités Doctrine</a:t>
             </a:r>
           </a:p>
           <a:p>
@@ -12207,7 +14810,7 @@
             </a:pPr>
             <a:r>
               <a:rPr lang="fr-FR" dirty="0"/>
-              <a:t>Responsive et intégration de la maquette</a:t>
+              <a:t>Communication Controller ↔ Repository ↔ Twig</a:t>
             </a:r>
           </a:p>
           <a:p>
@@ -12224,10 +14827,9 @@
               </a:defRPr>
             </a:pPr>
             <a:r>
-              <a:rPr lang="fr-FR" sz="2000" dirty="0"/>
-              <a:t>Répondre aux besoins spécifiques d'une autre personne.</a:t>
-            </a:r>
-            <a:endParaRPr lang="fr-FR" dirty="0"/>
+              <a:rPr lang="fr-FR" dirty="0"/>
+              <a:t>Responsive et intégration de la maquette</a:t>
+            </a:r>
           </a:p>
           <a:p>
             <a:pPr>
@@ -12241,6 +14843,35 @@
               </a:defRPr>
             </a:pPr>
             <a:endParaRPr lang="fr-FR" dirty="0"/>
+          </a:p>
+        </p:txBody>
+      </p:sp>
+      <p:sp>
+        <p:nvSpPr>
+          <p:cNvPr id="4" name="Espace réservé du numéro de diapositive 3">
+            <a:extLst>
+              <a:ext uri="{FF2B5EF4-FFF2-40B4-BE49-F238E27FC236}">
+                <a16:creationId xmlns:a16="http://schemas.microsoft.com/office/drawing/2014/main" id="{D671A0EF-9FA1-BA87-6EA9-26946CDA6569}"/>
+              </a:ext>
+            </a:extLst>
+          </p:cNvPr>
+          <p:cNvSpPr>
+            <a:spLocks noGrp="1"/>
+          </p:cNvSpPr>
+          <p:nvPr>
+            <p:ph type="sldNum" sz="quarter" idx="12"/>
+          </p:nvPr>
+        </p:nvSpPr>
+        <p:spPr/>
+        <p:txBody>
+          <a:bodyPr/>
+          <a:lstStyle/>
+          <a:p>
+            <a:fld id="{C1FF6DA9-008F-8B48-92A6-B652298478BF}" type="slidenum">
+              <a:rPr lang="en-US" smtClean="0"/>
+              <a:t>21</a:t>
+            </a:fld>
+            <a:endParaRPr lang="en-US" dirty="0"/>
           </a:p>
         </p:txBody>
       </p:sp>
@@ -12252,7 +14883,7 @@
 </p:sld>
 </file>
 
-<file path=ppt/slides/slide19.xml><?xml version="1.0" encoding="utf-8"?>
+<file path=ppt/slides/slide22.xml><?xml version="1.0" encoding="utf-8"?>
 <p:sld xmlns:a="http://schemas.openxmlformats.org/drawingml/2006/main" xmlns:r="http://schemas.openxmlformats.org/officeDocument/2006/relationships" xmlns:p="http://schemas.openxmlformats.org/presentationml/2006/main">
   <p:cSld>
     <p:spTree>
@@ -12498,7 +15129,7 @@
                 <a:ea typeface="+mn-ea"/>
                 <a:cs typeface="+mn-cs"/>
               </a:rPr>
-              <a:t>Ajouter davantage de tests</a:t>
+              <a:t>Ajouter de tests</a:t>
             </a:r>
           </a:p>
           <a:p>
@@ -13054,79 +15685,30 @@
       </p:sp>
       <p:sp>
         <p:nvSpPr>
-          <p:cNvPr id="10" name="Rectangle 9"/>
-          <p:cNvSpPr/>
-          <p:nvPr/>
-        </p:nvSpPr>
-        <p:spPr>
-          <a:xfrm>
-            <a:off x="640080" y="6419088"/>
-            <a:ext cx="10881360" cy="18288"/>
-          </a:xfrm>
-          <a:prstGeom prst="rect">
-            <a:avLst/>
-          </a:prstGeom>
-          <a:solidFill>
-            <a:srgbClr val="EFEAE0"/>
-          </a:solidFill>
-          <a:ln>
-            <a:noFill/>
-          </a:ln>
-        </p:spPr>
-        <p:style>
-          <a:lnRef idx="1">
-            <a:schemeClr val="accent1"/>
-          </a:lnRef>
-          <a:fillRef idx="3">
-            <a:schemeClr val="accent1"/>
-          </a:fillRef>
-          <a:effectRef idx="2">
-            <a:schemeClr val="accent1"/>
-          </a:effectRef>
-          <a:fontRef idx="minor">
-            <a:schemeClr val="lt1"/>
-          </a:fontRef>
-        </p:style>
-        <p:txBody>
-          <a:bodyPr rtlCol="0" anchor="ctr"/>
+          <p:cNvPr id="5" name="Espace réservé du numéro de diapositive 4">
+            <a:extLst>
+              <a:ext uri="{FF2B5EF4-FFF2-40B4-BE49-F238E27FC236}">
+                <a16:creationId xmlns:a16="http://schemas.microsoft.com/office/drawing/2014/main" id="{A687AFE9-CEBB-9E56-167B-83D86C5602C0}"/>
+              </a:ext>
+            </a:extLst>
+          </p:cNvPr>
+          <p:cNvSpPr>
+            <a:spLocks noGrp="1"/>
+          </p:cNvSpPr>
+          <p:nvPr>
+            <p:ph type="sldNum" sz="quarter" idx="12"/>
+          </p:nvPr>
+        </p:nvSpPr>
+        <p:spPr/>
+        <p:txBody>
+          <a:bodyPr/>
           <a:lstStyle/>
           <a:p>
-            <a:pPr algn="ctr"/>
-            <a:endParaRPr lang="fr-FR" noProof="0" dirty="0"/>
-          </a:p>
-        </p:txBody>
-      </p:sp>
-      <p:sp>
-        <p:nvSpPr>
-          <p:cNvPr id="11" name="TextBox 10"/>
-          <p:cNvSpPr txBox="1"/>
-          <p:nvPr/>
-        </p:nvSpPr>
-        <p:spPr>
-          <a:xfrm>
-            <a:off x="10789920" y="6473952"/>
-            <a:ext cx="640080" cy="182880"/>
-          </a:xfrm>
-          <a:prstGeom prst="rect">
-            <a:avLst/>
-          </a:prstGeom>
-          <a:noFill/>
-        </p:spPr>
-        <p:txBody>
-          <a:bodyPr wrap="none">
-            <a:spAutoFit/>
-          </a:bodyPr>
-          <a:lstStyle/>
-          <a:p>
-            <a:pPr algn="r"/>
-            <a:r>
-              <a:rPr lang="fr-FR" sz="900" noProof="0" dirty="0">
-                <a:solidFill>
-                  <a:srgbClr val="69625E"/>
-                </a:solidFill>
-              </a:rPr>
-              <a:t>14</a:t>
-            </a:r>
+            <a:fld id="{C1FF6DA9-008F-8B48-92A6-B652298478BF}" type="slidenum">
+              <a:rPr lang="en-US" smtClean="0"/>
+              <a:t>22</a:t>
+            </a:fld>
+            <a:endParaRPr lang="en-US" dirty="0"/>
           </a:p>
         </p:txBody>
       </p:sp>
@@ -13138,772 +15720,7 @@
 </p:sld>
 </file>
 
-<file path=ppt/slides/slide2.xml><?xml version="1.0" encoding="utf-8"?>
-<p:sld xmlns:a="http://schemas.openxmlformats.org/drawingml/2006/main" xmlns:r="http://schemas.openxmlformats.org/officeDocument/2006/relationships" xmlns:p="http://schemas.openxmlformats.org/presentationml/2006/main">
-  <p:cSld>
-    <p:spTree>
-      <p:nvGrpSpPr>
-        <p:cNvPr id="1" name=""/>
-        <p:cNvGrpSpPr/>
-        <p:nvPr/>
-      </p:nvGrpSpPr>
-      <p:grpSpPr>
-        <a:xfrm>
-          <a:off x="0" y="0"/>
-          <a:ext cx="0" cy="0"/>
-          <a:chOff x="0" y="0"/>
-          <a:chExt cx="0" cy="0"/>
-        </a:xfrm>
-      </p:grpSpPr>
-      <p:sp>
-        <p:nvSpPr>
-          <p:cNvPr id="3" name="TextBox 2"/>
-          <p:cNvSpPr txBox="1"/>
-          <p:nvPr/>
-        </p:nvSpPr>
-        <p:spPr>
-          <a:xfrm>
-            <a:off x="640080" y="411480"/>
-            <a:ext cx="1759200" cy="523220"/>
-          </a:xfrm>
-          <a:prstGeom prst="rect">
-            <a:avLst/>
-          </a:prstGeom>
-          <a:noFill/>
-        </p:spPr>
-        <p:txBody>
-          <a:bodyPr wrap="none">
-            <a:spAutoFit/>
-          </a:bodyPr>
-          <a:lstStyle/>
-          <a:p>
-            <a:r>
-              <a:rPr lang="fr-FR" sz="2800" b="1" noProof="0" dirty="0">
-                <a:solidFill>
-                  <a:srgbClr val="2C2522"/>
-                </a:solidFill>
-                <a:latin typeface="Aptos Display"/>
-              </a:rPr>
-              <a:t>Sommaire</a:t>
-            </a:r>
-          </a:p>
-        </p:txBody>
-      </p:sp>
-      <p:sp>
-        <p:nvSpPr>
-          <p:cNvPr id="4" name="Rounded Rectangle 3"/>
-          <p:cNvSpPr/>
-          <p:nvPr/>
-        </p:nvSpPr>
-        <p:spPr>
-          <a:xfrm>
-            <a:off x="1519680" y="934700"/>
-            <a:ext cx="5212080" cy="5374660"/>
-          </a:xfrm>
-          <a:prstGeom prst="roundRect">
-            <a:avLst/>
-          </a:prstGeom>
-          <a:solidFill>
-            <a:srgbClr val="FFFFFF"/>
-          </a:solidFill>
-          <a:ln>
-            <a:solidFill>
-              <a:srgbClr val="EFEAE0"/>
-            </a:solidFill>
-          </a:ln>
-        </p:spPr>
-        <p:style>
-          <a:lnRef idx="1">
-            <a:schemeClr val="accent1"/>
-          </a:lnRef>
-          <a:fillRef idx="3">
-            <a:schemeClr val="accent1"/>
-          </a:fillRef>
-          <a:effectRef idx="2">
-            <a:schemeClr val="accent1"/>
-          </a:effectRef>
-          <a:fontRef idx="minor">
-            <a:schemeClr val="lt1"/>
-          </a:fontRef>
-        </p:style>
-        <p:txBody>
-          <a:bodyPr rtlCol="0" anchor="ctr"/>
-          <a:lstStyle/>
-          <a:p>
-            <a:pPr marL="342900" marR="0" lvl="0" indent="-342900" algn="l" defTabSz="457200" rtl="0" eaLnBrk="1" fontAlgn="auto" latinLnBrk="0" hangingPunct="1">
-              <a:lnSpc>
-                <a:spcPct val="100000"/>
-              </a:lnSpc>
-              <a:spcBef>
-                <a:spcPts val="0"/>
-              </a:spcBef>
-              <a:spcAft>
-                <a:spcPts val="0"/>
-              </a:spcAft>
-              <a:buClrTx/>
-              <a:buSzTx/>
-              <a:buFont typeface="Arial" panose="020B0604020202020204" pitchFamily="34" charset="0"/>
-              <a:buChar char="•"/>
-              <a:tabLst/>
-              <a:defRPr/>
-            </a:pPr>
-            <a:r>
-              <a:rPr kumimoji="0" lang="fr-FR" sz="2200" b="1" i="0" u="none" strike="noStrike" kern="1200" cap="none" spc="0" normalizeH="0" baseline="0" noProof="0" dirty="0">
-                <a:ln>
-                  <a:noFill/>
-                </a:ln>
-                <a:solidFill>
-                  <a:srgbClr val="F79646">
-                    <a:lumMod val="50000"/>
-                  </a:srgbClr>
-                </a:solidFill>
-                <a:effectLst/>
-                <a:uLnTx/>
-                <a:uFillTx/>
-                <a:latin typeface="Calibri"/>
-                <a:ea typeface="+mn-ea"/>
-                <a:cs typeface="+mn-cs"/>
-              </a:rPr>
-              <a:t>Contexte et objectifs</a:t>
-            </a:r>
-          </a:p>
-          <a:p>
-            <a:pPr marL="342900" marR="0" lvl="0" indent="-342900" algn="l" defTabSz="457200" rtl="0" eaLnBrk="1" fontAlgn="auto" latinLnBrk="0" hangingPunct="1">
-              <a:lnSpc>
-                <a:spcPct val="100000"/>
-              </a:lnSpc>
-              <a:spcBef>
-                <a:spcPts val="0"/>
-              </a:spcBef>
-              <a:spcAft>
-                <a:spcPts val="0"/>
-              </a:spcAft>
-              <a:buClrTx/>
-              <a:buSzTx/>
-              <a:buFont typeface="Arial" panose="020B0604020202020204" pitchFamily="34" charset="0"/>
-              <a:buChar char="•"/>
-              <a:tabLst/>
-              <a:defRPr/>
-            </a:pPr>
-            <a:r>
-              <a:rPr kumimoji="0" lang="fr-FR" sz="2200" b="1" i="0" u="none" strike="noStrike" kern="1200" cap="none" spc="0" normalizeH="0" baseline="0" noProof="0" dirty="0">
-                <a:ln>
-                  <a:noFill/>
-                </a:ln>
-                <a:solidFill>
-                  <a:srgbClr val="F79646">
-                    <a:lumMod val="50000"/>
-                  </a:srgbClr>
-                </a:solidFill>
-                <a:effectLst/>
-                <a:uLnTx/>
-                <a:uFillTx/>
-                <a:latin typeface="Calibri"/>
-                <a:ea typeface="+mn-ea"/>
-                <a:cs typeface="+mn-cs"/>
-              </a:rPr>
-              <a:t>Technologies et environnement</a:t>
-            </a:r>
-          </a:p>
-          <a:p>
-            <a:pPr marL="342900" marR="0" lvl="0" indent="-342900" algn="l" defTabSz="457200" rtl="0" eaLnBrk="1" fontAlgn="auto" latinLnBrk="0" hangingPunct="1">
-              <a:lnSpc>
-                <a:spcPct val="100000"/>
-              </a:lnSpc>
-              <a:spcBef>
-                <a:spcPts val="0"/>
-              </a:spcBef>
-              <a:spcAft>
-                <a:spcPts val="0"/>
-              </a:spcAft>
-              <a:buClrTx/>
-              <a:buSzTx/>
-              <a:buFont typeface="Arial" panose="020B0604020202020204" pitchFamily="34" charset="0"/>
-              <a:buChar char="•"/>
-              <a:tabLst/>
-              <a:defRPr/>
-            </a:pPr>
-            <a:r>
-              <a:rPr kumimoji="0" lang="fr-FR" sz="2200" b="1" i="0" u="none" strike="noStrike" kern="1200" cap="none" spc="0" normalizeH="0" baseline="0" noProof="0" dirty="0">
-                <a:ln>
-                  <a:noFill/>
-                </a:ln>
-                <a:solidFill>
-                  <a:srgbClr val="F79646">
-                    <a:lumMod val="50000"/>
-                  </a:srgbClr>
-                </a:solidFill>
-                <a:effectLst/>
-                <a:uLnTx/>
-                <a:uFillTx/>
-                <a:latin typeface="Calibri"/>
-                <a:ea typeface="+mn-ea"/>
-                <a:cs typeface="+mn-cs"/>
-              </a:rPr>
-              <a:t>Schéma UML / BDD</a:t>
-            </a:r>
-          </a:p>
-          <a:p>
-            <a:pPr marL="342900" marR="0" lvl="0" indent="-342900" algn="l" defTabSz="457200" rtl="0" eaLnBrk="1" fontAlgn="auto" latinLnBrk="0" hangingPunct="1">
-              <a:lnSpc>
-                <a:spcPct val="100000"/>
-              </a:lnSpc>
-              <a:spcBef>
-                <a:spcPts val="0"/>
-              </a:spcBef>
-              <a:spcAft>
-                <a:spcPts val="0"/>
-              </a:spcAft>
-              <a:buClrTx/>
-              <a:buSzTx/>
-              <a:buFont typeface="Arial" panose="020B0604020202020204" pitchFamily="34" charset="0"/>
-              <a:buChar char="•"/>
-              <a:tabLst/>
-              <a:defRPr/>
-            </a:pPr>
-            <a:r>
-              <a:rPr kumimoji="0" lang="fr-FR" sz="2200" b="1" i="0" u="none" strike="noStrike" kern="1200" cap="none" spc="0" normalizeH="0" baseline="0" noProof="0" dirty="0">
-                <a:ln>
-                  <a:noFill/>
-                </a:ln>
-                <a:solidFill>
-                  <a:srgbClr val="F79646">
-                    <a:lumMod val="50000"/>
-                  </a:srgbClr>
-                </a:solidFill>
-                <a:effectLst/>
-                <a:uLnTx/>
-                <a:uFillTx/>
-                <a:latin typeface="Calibri"/>
-                <a:ea typeface="+mn-ea"/>
-                <a:cs typeface="+mn-cs"/>
-              </a:rPr>
-              <a:t>Maquette → réalisation</a:t>
-            </a:r>
-          </a:p>
-          <a:p>
-            <a:pPr marL="342900" marR="0" lvl="0" indent="-342900" algn="l" defTabSz="457200" rtl="0" eaLnBrk="1" fontAlgn="auto" latinLnBrk="0" hangingPunct="1">
-              <a:lnSpc>
-                <a:spcPct val="100000"/>
-              </a:lnSpc>
-              <a:spcBef>
-                <a:spcPts val="0"/>
-              </a:spcBef>
-              <a:spcAft>
-                <a:spcPts val="0"/>
-              </a:spcAft>
-              <a:buClrTx/>
-              <a:buSzTx/>
-              <a:buFont typeface="Arial" panose="020B0604020202020204" pitchFamily="34" charset="0"/>
-              <a:buChar char="•"/>
-              <a:tabLst/>
-              <a:defRPr/>
-            </a:pPr>
-            <a:r>
-              <a:rPr kumimoji="0" lang="fr-FR" sz="2200" b="1" i="0" u="none" strike="noStrike" kern="1200" cap="none" spc="0" normalizeH="0" baseline="0" noProof="0" dirty="0">
-                <a:ln>
-                  <a:noFill/>
-                </a:ln>
-                <a:solidFill>
-                  <a:srgbClr val="F79646">
-                    <a:lumMod val="50000"/>
-                  </a:srgbClr>
-                </a:solidFill>
-                <a:effectLst/>
-                <a:uLnTx/>
-                <a:uFillTx/>
-                <a:latin typeface="Calibri"/>
-                <a:ea typeface="+mn-ea"/>
-                <a:cs typeface="+mn-cs"/>
-              </a:rPr>
-              <a:t>Fixtures → Faker</a:t>
-            </a:r>
-          </a:p>
-          <a:p>
-            <a:pPr marL="342900" marR="0" lvl="0" indent="-342900" algn="l" defTabSz="457200" rtl="0" eaLnBrk="1" fontAlgn="auto" latinLnBrk="0" hangingPunct="1">
-              <a:lnSpc>
-                <a:spcPct val="100000"/>
-              </a:lnSpc>
-              <a:spcBef>
-                <a:spcPts val="0"/>
-              </a:spcBef>
-              <a:spcAft>
-                <a:spcPts val="0"/>
-              </a:spcAft>
-              <a:buClrTx/>
-              <a:buSzTx/>
-              <a:buFont typeface="Arial" panose="020B0604020202020204" pitchFamily="34" charset="0"/>
-              <a:buChar char="•"/>
-              <a:tabLst/>
-              <a:defRPr/>
-            </a:pPr>
-            <a:r>
-              <a:rPr kumimoji="0" lang="fr-FR" sz="2200" b="1" i="0" u="none" strike="noStrike" kern="1200" cap="none" spc="0" normalizeH="0" baseline="0" noProof="0" dirty="0" err="1">
-                <a:ln>
-                  <a:noFill/>
-                </a:ln>
-                <a:solidFill>
-                  <a:srgbClr val="F79646">
-                    <a:lumMod val="50000"/>
-                  </a:srgbClr>
-                </a:solidFill>
-                <a:effectLst/>
-                <a:uLnTx/>
-                <a:uFillTx/>
-                <a:latin typeface="Calibri"/>
-                <a:ea typeface="+mn-ea"/>
-                <a:cs typeface="+mn-cs"/>
-              </a:rPr>
-              <a:t>Front-end</a:t>
-            </a:r>
-            <a:endParaRPr kumimoji="0" lang="fr-FR" sz="2200" b="1" i="0" u="none" strike="noStrike" kern="1200" cap="none" spc="0" normalizeH="0" baseline="0" noProof="0" dirty="0">
-              <a:ln>
-                <a:noFill/>
-              </a:ln>
-              <a:solidFill>
-                <a:srgbClr val="F79646">
-                  <a:lumMod val="50000"/>
-                </a:srgbClr>
-              </a:solidFill>
-              <a:effectLst/>
-              <a:uLnTx/>
-              <a:uFillTx/>
-              <a:latin typeface="Calibri"/>
-              <a:ea typeface="+mn-ea"/>
-              <a:cs typeface="+mn-cs"/>
-            </a:endParaRPr>
-          </a:p>
-          <a:p>
-            <a:pPr marL="342900" marR="0" lvl="0" indent="-342900" algn="l" defTabSz="457200" rtl="0" eaLnBrk="1" fontAlgn="auto" latinLnBrk="0" hangingPunct="1">
-              <a:lnSpc>
-                <a:spcPct val="100000"/>
-              </a:lnSpc>
-              <a:spcBef>
-                <a:spcPts val="0"/>
-              </a:spcBef>
-              <a:spcAft>
-                <a:spcPts val="0"/>
-              </a:spcAft>
-              <a:buClrTx/>
-              <a:buSzTx/>
-              <a:buFont typeface="Arial" panose="020B0604020202020204" pitchFamily="34" charset="0"/>
-              <a:buChar char="•"/>
-              <a:tabLst/>
-              <a:defRPr/>
-            </a:pPr>
-            <a:r>
-              <a:rPr kumimoji="0" lang="fr-FR" sz="2200" b="1" i="0" u="none" strike="noStrike" kern="1200" cap="none" spc="0" normalizeH="0" baseline="0" noProof="0" dirty="0" err="1">
-                <a:ln>
-                  <a:noFill/>
-                </a:ln>
-                <a:solidFill>
-                  <a:srgbClr val="F79646">
-                    <a:lumMod val="50000"/>
-                  </a:srgbClr>
-                </a:solidFill>
-                <a:effectLst/>
-                <a:uLnTx/>
-                <a:uFillTx/>
-                <a:latin typeface="Calibri"/>
-                <a:ea typeface="+mn-ea"/>
-                <a:cs typeface="+mn-cs"/>
-              </a:rPr>
-              <a:t>Back-end</a:t>
-            </a:r>
-            <a:r>
-              <a:rPr kumimoji="0" lang="fr-FR" sz="2200" b="1" i="0" u="none" strike="noStrike" kern="1200" cap="none" spc="0" normalizeH="0" baseline="0" noProof="0" dirty="0">
-                <a:ln>
-                  <a:noFill/>
-                </a:ln>
-                <a:solidFill>
-                  <a:srgbClr val="F79646">
-                    <a:lumMod val="50000"/>
-                  </a:srgbClr>
-                </a:solidFill>
-                <a:effectLst/>
-                <a:uLnTx/>
-                <a:uFillTx/>
-                <a:latin typeface="Calibri"/>
-                <a:ea typeface="+mn-ea"/>
-                <a:cs typeface="+mn-cs"/>
-              </a:rPr>
-              <a:t> — MVC</a:t>
-            </a:r>
-          </a:p>
-          <a:p>
-            <a:pPr marL="342900" marR="0" lvl="0" indent="-342900" algn="l" defTabSz="457200" rtl="0" eaLnBrk="1" fontAlgn="auto" latinLnBrk="0" hangingPunct="1">
-              <a:lnSpc>
-                <a:spcPct val="100000"/>
-              </a:lnSpc>
-              <a:spcBef>
-                <a:spcPts val="0"/>
-              </a:spcBef>
-              <a:spcAft>
-                <a:spcPts val="0"/>
-              </a:spcAft>
-              <a:buClrTx/>
-              <a:buSzTx/>
-              <a:buFont typeface="Arial" panose="020B0604020202020204" pitchFamily="34" charset="0"/>
-              <a:buChar char="•"/>
-              <a:tabLst/>
-              <a:defRPr/>
-            </a:pPr>
-            <a:r>
-              <a:rPr kumimoji="0" lang="fr-FR" sz="2200" b="1" i="0" u="none" strike="noStrike" kern="1200" cap="none" spc="0" normalizeH="0" baseline="0" noProof="0" dirty="0">
-                <a:ln>
-                  <a:noFill/>
-                </a:ln>
-                <a:solidFill>
-                  <a:srgbClr val="F79646">
-                    <a:lumMod val="50000"/>
-                  </a:srgbClr>
-                </a:solidFill>
-                <a:effectLst/>
-                <a:uLnTx/>
-                <a:uFillTx/>
-                <a:latin typeface="Calibri"/>
-                <a:ea typeface="+mn-ea"/>
-                <a:cs typeface="+mn-cs"/>
-              </a:rPr>
-              <a:t>Repository → Doctrine → SQL</a:t>
-            </a:r>
-          </a:p>
-          <a:p>
-            <a:pPr marL="342900" marR="0" lvl="0" indent="-342900" algn="l" defTabSz="457200" rtl="0" eaLnBrk="1" fontAlgn="auto" latinLnBrk="0" hangingPunct="1">
-              <a:lnSpc>
-                <a:spcPct val="100000"/>
-              </a:lnSpc>
-              <a:spcBef>
-                <a:spcPts val="0"/>
-              </a:spcBef>
-              <a:spcAft>
-                <a:spcPts val="0"/>
-              </a:spcAft>
-              <a:buClrTx/>
-              <a:buSzTx/>
-              <a:buFont typeface="Arial" panose="020B0604020202020204" pitchFamily="34" charset="0"/>
-              <a:buChar char="•"/>
-              <a:tabLst/>
-              <a:defRPr/>
-            </a:pPr>
-            <a:r>
-              <a:rPr kumimoji="0" lang="fr-FR" sz="2200" b="1" i="0" u="none" strike="noStrike" kern="1200" cap="none" spc="0" normalizeH="0" baseline="0" noProof="0" dirty="0">
-                <a:ln>
-                  <a:noFill/>
-                </a:ln>
-                <a:solidFill>
-                  <a:srgbClr val="F79646">
-                    <a:lumMod val="50000"/>
-                  </a:srgbClr>
-                </a:solidFill>
-                <a:effectLst/>
-                <a:uLnTx/>
-                <a:uFillTx/>
-                <a:latin typeface="Calibri"/>
-                <a:ea typeface="+mn-ea"/>
-                <a:cs typeface="+mn-cs"/>
-              </a:rPr>
-              <a:t>CRUD</a:t>
-            </a:r>
-          </a:p>
-          <a:p>
-            <a:pPr marL="342900" marR="0" lvl="0" indent="-342900" algn="l" defTabSz="457200" rtl="0" eaLnBrk="1" fontAlgn="auto" latinLnBrk="0" hangingPunct="1">
-              <a:lnSpc>
-                <a:spcPct val="100000"/>
-              </a:lnSpc>
-              <a:spcBef>
-                <a:spcPts val="0"/>
-              </a:spcBef>
-              <a:spcAft>
-                <a:spcPts val="0"/>
-              </a:spcAft>
-              <a:buClrTx/>
-              <a:buSzTx/>
-              <a:buFont typeface="Arial" panose="020B0604020202020204" pitchFamily="34" charset="0"/>
-              <a:buChar char="•"/>
-              <a:tabLst/>
-              <a:defRPr/>
-            </a:pPr>
-            <a:r>
-              <a:rPr kumimoji="0" lang="fr-FR" sz="2200" b="1" i="0" u="none" strike="noStrike" kern="1200" cap="none" spc="0" normalizeH="0" baseline="0" noProof="0" dirty="0">
-                <a:ln>
-                  <a:noFill/>
-                </a:ln>
-                <a:solidFill>
-                  <a:srgbClr val="F79646">
-                    <a:lumMod val="50000"/>
-                  </a:srgbClr>
-                </a:solidFill>
-                <a:effectLst/>
-                <a:uLnTx/>
-                <a:uFillTx/>
-                <a:latin typeface="Calibri"/>
-                <a:ea typeface="+mn-ea"/>
-                <a:cs typeface="+mn-cs"/>
-              </a:rPr>
-              <a:t>Forms et sécurité</a:t>
-            </a:r>
-          </a:p>
-          <a:p>
-            <a:pPr marL="342900" marR="0" lvl="0" indent="-342900" algn="l" defTabSz="457200" rtl="0" eaLnBrk="1" fontAlgn="auto" latinLnBrk="0" hangingPunct="1">
-              <a:lnSpc>
-                <a:spcPct val="100000"/>
-              </a:lnSpc>
-              <a:spcBef>
-                <a:spcPts val="0"/>
-              </a:spcBef>
-              <a:spcAft>
-                <a:spcPts val="0"/>
-              </a:spcAft>
-              <a:buClrTx/>
-              <a:buSzTx/>
-              <a:buFont typeface="Arial" panose="020B0604020202020204" pitchFamily="34" charset="0"/>
-              <a:buChar char="•"/>
-              <a:tabLst/>
-              <a:defRPr/>
-            </a:pPr>
-            <a:r>
-              <a:rPr kumimoji="0" lang="fr-FR" sz="2200" b="1" i="0" u="none" strike="noStrike" kern="1200" cap="none" spc="0" normalizeH="0" baseline="0" noProof="0" dirty="0">
-                <a:ln>
-                  <a:noFill/>
-                </a:ln>
-                <a:solidFill>
-                  <a:srgbClr val="F79646">
-                    <a:lumMod val="50000"/>
-                  </a:srgbClr>
-                </a:solidFill>
-                <a:effectLst/>
-                <a:uLnTx/>
-                <a:uFillTx/>
-                <a:latin typeface="Calibri"/>
-                <a:ea typeface="+mn-ea"/>
-                <a:cs typeface="+mn-cs"/>
-              </a:rPr>
-              <a:t>Démonstration</a:t>
-            </a:r>
-          </a:p>
-          <a:p>
-            <a:pPr marL="342900" marR="0" lvl="0" indent="-342900" algn="l" defTabSz="457200" rtl="0" eaLnBrk="1" fontAlgn="auto" latinLnBrk="0" hangingPunct="1">
-              <a:lnSpc>
-                <a:spcPct val="100000"/>
-              </a:lnSpc>
-              <a:spcBef>
-                <a:spcPts val="0"/>
-              </a:spcBef>
-              <a:spcAft>
-                <a:spcPts val="0"/>
-              </a:spcAft>
-              <a:buClrTx/>
-              <a:buSzTx/>
-              <a:buFont typeface="Arial" panose="020B0604020202020204" pitchFamily="34" charset="0"/>
-              <a:buChar char="•"/>
-              <a:tabLst/>
-              <a:defRPr/>
-            </a:pPr>
-            <a:r>
-              <a:rPr kumimoji="0" lang="fr-FR" sz="2200" b="1" i="0" u="none" strike="noStrike" kern="1200" cap="none" spc="0" normalizeH="0" baseline="0" noProof="0" dirty="0" err="1">
-                <a:ln>
-                  <a:noFill/>
-                </a:ln>
-                <a:solidFill>
-                  <a:srgbClr val="F79646">
-                    <a:lumMod val="50000"/>
-                  </a:srgbClr>
-                </a:solidFill>
-                <a:effectLst/>
-                <a:uLnTx/>
-                <a:uFillTx/>
-                <a:latin typeface="Calibri"/>
-                <a:ea typeface="+mn-ea"/>
-                <a:cs typeface="+mn-cs"/>
-              </a:rPr>
-              <a:t>Difficultées</a:t>
-            </a:r>
-            <a:r>
-              <a:rPr kumimoji="0" lang="fr-FR" sz="2200" b="1" i="0" u="none" strike="noStrike" kern="1200" cap="none" spc="0" normalizeH="0" baseline="0" noProof="0" dirty="0">
-                <a:ln>
-                  <a:noFill/>
-                </a:ln>
-                <a:solidFill>
-                  <a:srgbClr val="F79646">
-                    <a:lumMod val="50000"/>
-                  </a:srgbClr>
-                </a:solidFill>
-                <a:effectLst/>
-                <a:uLnTx/>
-                <a:uFillTx/>
-                <a:latin typeface="Calibri"/>
-                <a:ea typeface="+mn-ea"/>
-                <a:cs typeface="+mn-cs"/>
-              </a:rPr>
-              <a:t> rencontrés</a:t>
-            </a:r>
-          </a:p>
-          <a:p>
-            <a:pPr marL="342900" marR="0" lvl="0" indent="-342900" algn="l" defTabSz="457200" rtl="0" eaLnBrk="1" fontAlgn="auto" latinLnBrk="0" hangingPunct="1">
-              <a:lnSpc>
-                <a:spcPct val="100000"/>
-              </a:lnSpc>
-              <a:spcBef>
-                <a:spcPts val="0"/>
-              </a:spcBef>
-              <a:spcAft>
-                <a:spcPts val="0"/>
-              </a:spcAft>
-              <a:buClrTx/>
-              <a:buSzTx/>
-              <a:buFont typeface="Arial" panose="020B0604020202020204" pitchFamily="34" charset="0"/>
-              <a:buChar char="•"/>
-              <a:tabLst/>
-              <a:defRPr/>
-            </a:pPr>
-            <a:r>
-              <a:rPr kumimoji="0" lang="fr-FR" sz="2200" b="1" i="0" u="none" strike="noStrike" kern="1200" cap="none" spc="0" normalizeH="0" baseline="0" noProof="0" dirty="0">
-                <a:ln>
-                  <a:noFill/>
-                </a:ln>
-                <a:solidFill>
-                  <a:srgbClr val="F79646">
-                    <a:lumMod val="50000"/>
-                  </a:srgbClr>
-                </a:solidFill>
-                <a:effectLst/>
-                <a:uLnTx/>
-                <a:uFillTx/>
-                <a:latin typeface="Calibri"/>
-                <a:ea typeface="+mn-ea"/>
-                <a:cs typeface="+mn-cs"/>
-              </a:rPr>
-              <a:t>Évolutions prévues</a:t>
-            </a:r>
-          </a:p>
-          <a:p>
-            <a:pPr marL="342900" marR="0" lvl="0" indent="-342900" algn="l" defTabSz="457200" rtl="0" eaLnBrk="1" fontAlgn="auto" latinLnBrk="0" hangingPunct="1">
-              <a:lnSpc>
-                <a:spcPct val="100000"/>
-              </a:lnSpc>
-              <a:spcBef>
-                <a:spcPts val="0"/>
-              </a:spcBef>
-              <a:spcAft>
-                <a:spcPts val="0"/>
-              </a:spcAft>
-              <a:buClrTx/>
-              <a:buSzTx/>
-              <a:buFont typeface="Arial" panose="020B0604020202020204" pitchFamily="34" charset="0"/>
-              <a:buChar char="•"/>
-              <a:tabLst/>
-              <a:defRPr/>
-            </a:pPr>
-            <a:r>
-              <a:rPr kumimoji="0" lang="fr-FR" sz="2200" b="1" i="0" u="none" strike="noStrike" kern="1200" cap="none" spc="0" normalizeH="0" baseline="0" noProof="0" dirty="0">
-                <a:ln>
-                  <a:noFill/>
-                </a:ln>
-                <a:solidFill>
-                  <a:srgbClr val="F79646">
-                    <a:lumMod val="50000"/>
-                  </a:srgbClr>
-                </a:solidFill>
-                <a:effectLst/>
-                <a:uLnTx/>
-                <a:uFillTx/>
-                <a:latin typeface="Calibri"/>
-                <a:ea typeface="+mn-ea"/>
-                <a:cs typeface="+mn-cs"/>
-              </a:rPr>
-              <a:t>Conclusion</a:t>
-            </a:r>
-          </a:p>
-        </p:txBody>
-      </p:sp>
-      <p:sp>
-        <p:nvSpPr>
-          <p:cNvPr id="8" name="Rectangle 7"/>
-          <p:cNvSpPr/>
-          <p:nvPr/>
-        </p:nvSpPr>
-        <p:spPr>
-          <a:xfrm>
-            <a:off x="640080" y="6419088"/>
-            <a:ext cx="10881360" cy="18288"/>
-          </a:xfrm>
-          <a:prstGeom prst="rect">
-            <a:avLst/>
-          </a:prstGeom>
-          <a:solidFill>
-            <a:srgbClr val="EFEAE0"/>
-          </a:solidFill>
-          <a:ln>
-            <a:noFill/>
-          </a:ln>
-        </p:spPr>
-        <p:style>
-          <a:lnRef idx="1">
-            <a:schemeClr val="accent1"/>
-          </a:lnRef>
-          <a:fillRef idx="3">
-            <a:schemeClr val="accent1"/>
-          </a:fillRef>
-          <a:effectRef idx="2">
-            <a:schemeClr val="accent1"/>
-          </a:effectRef>
-          <a:fontRef idx="minor">
-            <a:schemeClr val="lt1"/>
-          </a:fontRef>
-        </p:style>
-        <p:txBody>
-          <a:bodyPr rtlCol="0" anchor="ctr"/>
-          <a:lstStyle/>
-          <a:p>
-            <a:pPr algn="ctr"/>
-            <a:endParaRPr lang="fr-FR" noProof="0" dirty="0"/>
-          </a:p>
-        </p:txBody>
-      </p:sp>
-      <p:sp>
-        <p:nvSpPr>
-          <p:cNvPr id="9" name="TextBox 8"/>
-          <p:cNvSpPr txBox="1"/>
-          <p:nvPr/>
-        </p:nvSpPr>
-        <p:spPr>
-          <a:xfrm>
-            <a:off x="10789920" y="6473952"/>
-            <a:ext cx="640080" cy="182880"/>
-          </a:xfrm>
-          <a:prstGeom prst="rect">
-            <a:avLst/>
-          </a:prstGeom>
-          <a:noFill/>
-        </p:spPr>
-        <p:txBody>
-          <a:bodyPr wrap="none">
-            <a:spAutoFit/>
-          </a:bodyPr>
-          <a:lstStyle/>
-          <a:p>
-            <a:pPr algn="r"/>
-            <a:r>
-              <a:rPr lang="fr-FR" sz="900" noProof="0" dirty="0">
-                <a:solidFill>
-                  <a:srgbClr val="69625E"/>
-                </a:solidFill>
-              </a:rPr>
-              <a:t>2</a:t>
-            </a:r>
-          </a:p>
-        </p:txBody>
-      </p:sp>
-    </p:spTree>
-  </p:cSld>
-  <p:clrMapOvr>
-    <a:masterClrMapping/>
-  </p:clrMapOvr>
-</p:sld>
-</file>
-
-<file path=ppt/slides/slide20.xml><?xml version="1.0" encoding="utf-8"?>
+<file path=ppt/slides/slide23.xml><?xml version="1.0" encoding="utf-8"?>
 <p:sld xmlns:a="http://schemas.openxmlformats.org/drawingml/2006/main" xmlns:r="http://schemas.openxmlformats.org/officeDocument/2006/relationships" xmlns:p="http://schemas.openxmlformats.org/presentationml/2006/main">
   <p:cSld>
     <p:spTree>
@@ -14290,79 +16107,30 @@
       </p:sp>
       <p:sp>
         <p:nvSpPr>
-          <p:cNvPr id="10" name="Rectangle 9"/>
-          <p:cNvSpPr/>
-          <p:nvPr/>
-        </p:nvSpPr>
-        <p:spPr>
-          <a:xfrm>
-            <a:off x="640080" y="6419088"/>
-            <a:ext cx="10881360" cy="18288"/>
-          </a:xfrm>
-          <a:prstGeom prst="rect">
-            <a:avLst/>
-          </a:prstGeom>
-          <a:solidFill>
-            <a:srgbClr val="EFEAE0"/>
-          </a:solidFill>
-          <a:ln>
-            <a:noFill/>
-          </a:ln>
-        </p:spPr>
-        <p:style>
-          <a:lnRef idx="1">
-            <a:schemeClr val="accent1"/>
-          </a:lnRef>
-          <a:fillRef idx="3">
-            <a:schemeClr val="accent1"/>
-          </a:fillRef>
-          <a:effectRef idx="2">
-            <a:schemeClr val="accent1"/>
-          </a:effectRef>
-          <a:fontRef idx="minor">
-            <a:schemeClr val="lt1"/>
-          </a:fontRef>
-        </p:style>
-        <p:txBody>
-          <a:bodyPr rtlCol="0" anchor="ctr"/>
+          <p:cNvPr id="12" name="Espace réservé du numéro de diapositive 11">
+            <a:extLst>
+              <a:ext uri="{FF2B5EF4-FFF2-40B4-BE49-F238E27FC236}">
+                <a16:creationId xmlns:a16="http://schemas.microsoft.com/office/drawing/2014/main" id="{30F055C5-3205-65CE-8FCF-24FF77C24A3F}"/>
+              </a:ext>
+            </a:extLst>
+          </p:cNvPr>
+          <p:cNvSpPr>
+            <a:spLocks noGrp="1"/>
+          </p:cNvSpPr>
+          <p:nvPr>
+            <p:ph type="sldNum" sz="quarter" idx="12"/>
+          </p:nvPr>
+        </p:nvSpPr>
+        <p:spPr/>
+        <p:txBody>
+          <a:bodyPr/>
           <a:lstStyle/>
           <a:p>
-            <a:pPr algn="ctr"/>
-            <a:endParaRPr lang="fr-FR" noProof="0" dirty="0"/>
-          </a:p>
-        </p:txBody>
-      </p:sp>
-      <p:sp>
-        <p:nvSpPr>
-          <p:cNvPr id="11" name="TextBox 10"/>
-          <p:cNvSpPr txBox="1"/>
-          <p:nvPr/>
-        </p:nvSpPr>
-        <p:spPr>
-          <a:xfrm>
-            <a:off x="10789920" y="6473952"/>
-            <a:ext cx="640080" cy="182880"/>
-          </a:xfrm>
-          <a:prstGeom prst="rect">
-            <a:avLst/>
-          </a:prstGeom>
-          <a:noFill/>
-        </p:spPr>
-        <p:txBody>
-          <a:bodyPr wrap="none">
-            <a:spAutoFit/>
-          </a:bodyPr>
-          <a:lstStyle/>
-          <a:p>
-            <a:pPr algn="r"/>
-            <a:r>
-              <a:rPr lang="fr-FR" sz="900" noProof="0" dirty="0">
-                <a:solidFill>
-                  <a:srgbClr val="69625E"/>
-                </a:solidFill>
-              </a:rPr>
-              <a:t>15</a:t>
-            </a:r>
+            <a:fld id="{C1FF6DA9-008F-8B48-92A6-B652298478BF}" type="slidenum">
+              <a:rPr lang="en-US" smtClean="0"/>
+              <a:t>23</a:t>
+            </a:fld>
+            <a:endParaRPr lang="en-US" dirty="0"/>
           </a:p>
         </p:txBody>
       </p:sp>
@@ -15007,91 +16775,30 @@
       </p:sp>
       <p:sp>
         <p:nvSpPr>
-          <p:cNvPr id="8" name="Rectangle 7">
+          <p:cNvPr id="5" name="Espace réservé du numéro de diapositive 4">
             <a:extLst>
               <a:ext uri="{FF2B5EF4-FFF2-40B4-BE49-F238E27FC236}">
-                <a16:creationId xmlns:a16="http://schemas.microsoft.com/office/drawing/2014/main" id="{423882F0-988D-F151-EBCF-983C8D8E209D}"/>
+                <a16:creationId xmlns:a16="http://schemas.microsoft.com/office/drawing/2014/main" id="{E0DC280F-F4AC-9DEF-3F5F-5B1E831BC953}"/>
               </a:ext>
             </a:extLst>
           </p:cNvPr>
-          <p:cNvSpPr/>
-          <p:nvPr/>
-        </p:nvSpPr>
-        <p:spPr>
-          <a:xfrm>
-            <a:off x="640080" y="6419088"/>
-            <a:ext cx="10881360" cy="18288"/>
-          </a:xfrm>
-          <a:prstGeom prst="rect">
-            <a:avLst/>
-          </a:prstGeom>
-          <a:solidFill>
-            <a:srgbClr val="EFEAE0"/>
-          </a:solidFill>
-          <a:ln>
-            <a:noFill/>
-          </a:ln>
-        </p:spPr>
-        <p:style>
-          <a:lnRef idx="1">
-            <a:schemeClr val="accent1"/>
-          </a:lnRef>
-          <a:fillRef idx="3">
-            <a:schemeClr val="accent1"/>
-          </a:fillRef>
-          <a:effectRef idx="2">
-            <a:schemeClr val="accent1"/>
-          </a:effectRef>
-          <a:fontRef idx="minor">
-            <a:schemeClr val="lt1"/>
-          </a:fontRef>
-        </p:style>
-        <p:txBody>
-          <a:bodyPr rtlCol="0" anchor="ctr"/>
+          <p:cNvSpPr>
+            <a:spLocks noGrp="1"/>
+          </p:cNvSpPr>
+          <p:nvPr>
+            <p:ph type="sldNum" sz="quarter" idx="12"/>
+          </p:nvPr>
+        </p:nvSpPr>
+        <p:spPr/>
+        <p:txBody>
+          <a:bodyPr/>
           <a:lstStyle/>
           <a:p>
-            <a:pPr algn="ctr"/>
-            <a:endParaRPr lang="fr-FR" noProof="0" dirty="0"/>
-          </a:p>
-        </p:txBody>
-      </p:sp>
-      <p:sp>
-        <p:nvSpPr>
-          <p:cNvPr id="9" name="TextBox 8">
-            <a:extLst>
-              <a:ext uri="{FF2B5EF4-FFF2-40B4-BE49-F238E27FC236}">
-                <a16:creationId xmlns:a16="http://schemas.microsoft.com/office/drawing/2014/main" id="{42A7A643-BC93-0873-D7D0-DC706EB87DC4}"/>
-              </a:ext>
-            </a:extLst>
-          </p:cNvPr>
-          <p:cNvSpPr txBox="1"/>
-          <p:nvPr/>
-        </p:nvSpPr>
-        <p:spPr>
-          <a:xfrm>
-            <a:off x="10789920" y="6473952"/>
-            <a:ext cx="640080" cy="182880"/>
-          </a:xfrm>
-          <a:prstGeom prst="rect">
-            <a:avLst/>
-          </a:prstGeom>
-          <a:noFill/>
-        </p:spPr>
-        <p:txBody>
-          <a:bodyPr wrap="none">
-            <a:spAutoFit/>
-          </a:bodyPr>
-          <a:lstStyle/>
-          <a:p>
-            <a:pPr algn="r"/>
-            <a:r>
-              <a:rPr lang="fr-FR" sz="900" noProof="0" dirty="0">
-                <a:solidFill>
-                  <a:srgbClr val="69625E"/>
-                </a:solidFill>
-              </a:rPr>
-              <a:t>2</a:t>
-            </a:r>
+            <a:fld id="{C1FF6DA9-008F-8B48-92A6-B652298478BF}" type="slidenum">
+              <a:rPr lang="en-US" smtClean="0"/>
+              <a:t>3</a:t>
+            </a:fld>
+            <a:endParaRPr lang="en-US" dirty="0"/>
           </a:p>
         </p:txBody>
       </p:sp>
@@ -16357,79 +18064,30 @@
       </p:sp>
       <p:sp>
         <p:nvSpPr>
-          <p:cNvPr id="28" name="Rectangle 27"/>
-          <p:cNvSpPr/>
-          <p:nvPr/>
-        </p:nvSpPr>
-        <p:spPr>
-          <a:xfrm>
-            <a:off x="640080" y="6419088"/>
-            <a:ext cx="10881360" cy="18288"/>
-          </a:xfrm>
-          <a:prstGeom prst="rect">
-            <a:avLst/>
-          </a:prstGeom>
-          <a:solidFill>
-            <a:srgbClr val="EFEAE0"/>
-          </a:solidFill>
-          <a:ln>
-            <a:noFill/>
-          </a:ln>
-        </p:spPr>
-        <p:style>
-          <a:lnRef idx="1">
-            <a:schemeClr val="accent1"/>
-          </a:lnRef>
-          <a:fillRef idx="3">
-            <a:schemeClr val="accent1"/>
-          </a:fillRef>
-          <a:effectRef idx="2">
-            <a:schemeClr val="accent1"/>
-          </a:effectRef>
-          <a:fontRef idx="minor">
-            <a:schemeClr val="lt1"/>
-          </a:fontRef>
-        </p:style>
-        <p:txBody>
-          <a:bodyPr rtlCol="0" anchor="ctr"/>
+          <p:cNvPr id="30" name="Espace réservé du numéro de diapositive 29">
+            <a:extLst>
+              <a:ext uri="{FF2B5EF4-FFF2-40B4-BE49-F238E27FC236}">
+                <a16:creationId xmlns:a16="http://schemas.microsoft.com/office/drawing/2014/main" id="{E4A9B039-B4C4-AC3D-5114-3E3B4481391E}"/>
+              </a:ext>
+            </a:extLst>
+          </p:cNvPr>
+          <p:cNvSpPr>
+            <a:spLocks noGrp="1"/>
+          </p:cNvSpPr>
+          <p:nvPr>
+            <p:ph type="sldNum" sz="quarter" idx="12"/>
+          </p:nvPr>
+        </p:nvSpPr>
+        <p:spPr/>
+        <p:txBody>
+          <a:bodyPr/>
           <a:lstStyle/>
           <a:p>
-            <a:pPr algn="ctr"/>
-            <a:endParaRPr lang="fr-FR" noProof="0" dirty="0"/>
-          </a:p>
-        </p:txBody>
-      </p:sp>
-      <p:sp>
-        <p:nvSpPr>
-          <p:cNvPr id="29" name="TextBox 28"/>
-          <p:cNvSpPr txBox="1"/>
-          <p:nvPr/>
-        </p:nvSpPr>
-        <p:spPr>
-          <a:xfrm>
-            <a:off x="10789920" y="6473952"/>
-            <a:ext cx="640080" cy="182880"/>
-          </a:xfrm>
-          <a:prstGeom prst="rect">
-            <a:avLst/>
-          </a:prstGeom>
-          <a:noFill/>
-        </p:spPr>
-        <p:txBody>
-          <a:bodyPr wrap="none">
-            <a:spAutoFit/>
-          </a:bodyPr>
-          <a:lstStyle/>
-          <a:p>
-            <a:pPr algn="r"/>
-            <a:r>
-              <a:rPr lang="fr-FR" sz="900" noProof="0" dirty="0">
-                <a:solidFill>
-                  <a:srgbClr val="69625E"/>
-                </a:solidFill>
-              </a:rPr>
-              <a:t>3</a:t>
-            </a:r>
+            <a:fld id="{C1FF6DA9-008F-8B48-92A6-B652298478BF}" type="slidenum">
+              <a:rPr lang="en-US" smtClean="0"/>
+              <a:t>4</a:t>
+            </a:fld>
+            <a:endParaRPr lang="en-US" dirty="0"/>
           </a:p>
         </p:txBody>
       </p:sp>
@@ -16488,84 +18146,6 @@
                 <a:latin typeface="Aptos Display"/>
               </a:rPr>
               <a:t>Schéma UML</a:t>
-            </a:r>
-          </a:p>
-        </p:txBody>
-      </p:sp>
-      <p:sp>
-        <p:nvSpPr>
-          <p:cNvPr id="12" name="Rectangle 11"/>
-          <p:cNvSpPr/>
-          <p:nvPr/>
-        </p:nvSpPr>
-        <p:spPr>
-          <a:xfrm>
-            <a:off x="640080" y="6419088"/>
-            <a:ext cx="10881360" cy="18288"/>
-          </a:xfrm>
-          <a:prstGeom prst="rect">
-            <a:avLst/>
-          </a:prstGeom>
-          <a:solidFill>
-            <a:srgbClr val="EFEAE0"/>
-          </a:solidFill>
-          <a:ln>
-            <a:noFill/>
-          </a:ln>
-        </p:spPr>
-        <p:style>
-          <a:lnRef idx="1">
-            <a:schemeClr val="accent1"/>
-          </a:lnRef>
-          <a:fillRef idx="3">
-            <a:schemeClr val="accent1"/>
-          </a:fillRef>
-          <a:effectRef idx="2">
-            <a:schemeClr val="accent1"/>
-          </a:effectRef>
-          <a:fontRef idx="minor">
-            <a:schemeClr val="lt1"/>
-          </a:fontRef>
-        </p:style>
-        <p:txBody>
-          <a:bodyPr rtlCol="0" anchor="ctr"/>
-          <a:lstStyle/>
-          <a:p>
-            <a:pPr algn="ctr"/>
-            <a:endParaRPr lang="fr-FR" noProof="0" dirty="0"/>
-          </a:p>
-        </p:txBody>
-      </p:sp>
-      <p:sp>
-        <p:nvSpPr>
-          <p:cNvPr id="13" name="TextBox 12"/>
-          <p:cNvSpPr txBox="1"/>
-          <p:nvPr/>
-        </p:nvSpPr>
-        <p:spPr>
-          <a:xfrm>
-            <a:off x="10789920" y="6473952"/>
-            <a:ext cx="640080" cy="182880"/>
-          </a:xfrm>
-          <a:prstGeom prst="rect">
-            <a:avLst/>
-          </a:prstGeom>
-          <a:noFill/>
-        </p:spPr>
-        <p:txBody>
-          <a:bodyPr wrap="none">
-            <a:spAutoFit/>
-          </a:bodyPr>
-          <a:lstStyle/>
-          <a:p>
-            <a:pPr algn="r"/>
-            <a:r>
-              <a:rPr lang="fr-FR" sz="900" noProof="0" dirty="0">
-                <a:solidFill>
-                  <a:srgbClr val="69625E"/>
-                </a:solidFill>
-              </a:rPr>
-              <a:t>5</a:t>
             </a:r>
           </a:p>
         </p:txBody>
@@ -16610,6 +18190,35 @@
           </a:effectLst>
         </p:spPr>
       </p:pic>
+      <p:sp>
+        <p:nvSpPr>
+          <p:cNvPr id="4" name="Espace réservé du numéro de diapositive 3">
+            <a:extLst>
+              <a:ext uri="{FF2B5EF4-FFF2-40B4-BE49-F238E27FC236}">
+                <a16:creationId xmlns:a16="http://schemas.microsoft.com/office/drawing/2014/main" id="{6151C1EC-F12C-3A93-9563-224CCEDBEC09}"/>
+              </a:ext>
+            </a:extLst>
+          </p:cNvPr>
+          <p:cNvSpPr>
+            <a:spLocks noGrp="1"/>
+          </p:cNvSpPr>
+          <p:nvPr>
+            <p:ph type="sldNum" sz="quarter" idx="12"/>
+          </p:nvPr>
+        </p:nvSpPr>
+        <p:spPr/>
+        <p:txBody>
+          <a:bodyPr/>
+          <a:lstStyle/>
+          <a:p>
+            <a:fld id="{C1FF6DA9-008F-8B48-92A6-B652298478BF}" type="slidenum">
+              <a:rPr lang="en-US" smtClean="0"/>
+              <a:t>5</a:t>
+            </a:fld>
+            <a:endParaRPr lang="en-US" dirty="0"/>
+          </a:p>
+        </p:txBody>
+      </p:sp>
     </p:spTree>
   </p:cSld>
   <p:clrMapOvr>
@@ -16677,96 +18286,6 @@
                 <a:latin typeface="Aptos Display"/>
               </a:rPr>
               <a:t>Schéma BDD</a:t>
-            </a:r>
-          </a:p>
-        </p:txBody>
-      </p:sp>
-      <p:sp>
-        <p:nvSpPr>
-          <p:cNvPr id="12" name="Rectangle 11">
-            <a:extLst>
-              <a:ext uri="{FF2B5EF4-FFF2-40B4-BE49-F238E27FC236}">
-                <a16:creationId xmlns:a16="http://schemas.microsoft.com/office/drawing/2014/main" id="{7E6E397B-E1F9-45A2-3178-660CCF56B665}"/>
-              </a:ext>
-            </a:extLst>
-          </p:cNvPr>
-          <p:cNvSpPr/>
-          <p:nvPr/>
-        </p:nvSpPr>
-        <p:spPr>
-          <a:xfrm>
-            <a:off x="640080" y="6419088"/>
-            <a:ext cx="10881360" cy="18288"/>
-          </a:xfrm>
-          <a:prstGeom prst="rect">
-            <a:avLst/>
-          </a:prstGeom>
-          <a:solidFill>
-            <a:srgbClr val="EFEAE0"/>
-          </a:solidFill>
-          <a:ln>
-            <a:noFill/>
-          </a:ln>
-        </p:spPr>
-        <p:style>
-          <a:lnRef idx="1">
-            <a:schemeClr val="accent1"/>
-          </a:lnRef>
-          <a:fillRef idx="3">
-            <a:schemeClr val="accent1"/>
-          </a:fillRef>
-          <a:effectRef idx="2">
-            <a:schemeClr val="accent1"/>
-          </a:effectRef>
-          <a:fontRef idx="minor">
-            <a:schemeClr val="lt1"/>
-          </a:fontRef>
-        </p:style>
-        <p:txBody>
-          <a:bodyPr rtlCol="0" anchor="ctr"/>
-          <a:lstStyle/>
-          <a:p>
-            <a:pPr algn="ctr"/>
-            <a:endParaRPr lang="fr-FR" noProof="0" dirty="0"/>
-          </a:p>
-        </p:txBody>
-      </p:sp>
-      <p:sp>
-        <p:nvSpPr>
-          <p:cNvPr id="13" name="TextBox 12">
-            <a:extLst>
-              <a:ext uri="{FF2B5EF4-FFF2-40B4-BE49-F238E27FC236}">
-                <a16:creationId xmlns:a16="http://schemas.microsoft.com/office/drawing/2014/main" id="{CE047F64-5530-77CC-5518-C86EB2473C7B}"/>
-              </a:ext>
-            </a:extLst>
-          </p:cNvPr>
-          <p:cNvSpPr txBox="1"/>
-          <p:nvPr/>
-        </p:nvSpPr>
-        <p:spPr>
-          <a:xfrm>
-            <a:off x="10789920" y="6473952"/>
-            <a:ext cx="640080" cy="182880"/>
-          </a:xfrm>
-          <a:prstGeom prst="rect">
-            <a:avLst/>
-          </a:prstGeom>
-          <a:noFill/>
-        </p:spPr>
-        <p:txBody>
-          <a:bodyPr wrap="none">
-            <a:spAutoFit/>
-          </a:bodyPr>
-          <a:lstStyle/>
-          <a:p>
-            <a:pPr algn="r"/>
-            <a:r>
-              <a:rPr lang="fr-FR" sz="900" noProof="0" dirty="0">
-                <a:solidFill>
-                  <a:srgbClr val="69625E"/>
-                </a:solidFill>
-              </a:rPr>
-              <a:t>5</a:t>
             </a:r>
           </a:p>
         </p:txBody>
@@ -16811,6 +18330,35 @@
           </a:effectLst>
         </p:spPr>
       </p:pic>
+      <p:sp>
+        <p:nvSpPr>
+          <p:cNvPr id="5" name="Espace réservé du numéro de diapositive 4">
+            <a:extLst>
+              <a:ext uri="{FF2B5EF4-FFF2-40B4-BE49-F238E27FC236}">
+                <a16:creationId xmlns:a16="http://schemas.microsoft.com/office/drawing/2014/main" id="{A30A4946-4809-ECDF-0BE1-705053B374E6}"/>
+              </a:ext>
+            </a:extLst>
+          </p:cNvPr>
+          <p:cNvSpPr>
+            <a:spLocks noGrp="1"/>
+          </p:cNvSpPr>
+          <p:nvPr>
+            <p:ph type="sldNum" sz="quarter" idx="12"/>
+          </p:nvPr>
+        </p:nvSpPr>
+        <p:spPr/>
+        <p:txBody>
+          <a:bodyPr/>
+          <a:lstStyle/>
+          <a:p>
+            <a:fld id="{C1FF6DA9-008F-8B48-92A6-B652298478BF}" type="slidenum">
+              <a:rPr lang="en-US" smtClean="0"/>
+              <a:t>6</a:t>
+            </a:fld>
+            <a:endParaRPr lang="en-US" dirty="0"/>
+          </a:p>
+        </p:txBody>
+      </p:sp>
     </p:spTree>
     <p:extLst>
       <p:ext uri="{BB962C8B-B14F-4D97-AF65-F5344CB8AC3E}">
@@ -16871,84 +18419,6 @@
                 <a:latin typeface="Aptos Display"/>
               </a:rPr>
               <a:t>Maquette → réalisation</a:t>
-            </a:r>
-          </a:p>
-        </p:txBody>
-      </p:sp>
-      <p:sp>
-        <p:nvSpPr>
-          <p:cNvPr id="7" name="Rectangle 6"/>
-          <p:cNvSpPr/>
-          <p:nvPr/>
-        </p:nvSpPr>
-        <p:spPr>
-          <a:xfrm>
-            <a:off x="640080" y="6419088"/>
-            <a:ext cx="10881360" cy="18288"/>
-          </a:xfrm>
-          <a:prstGeom prst="rect">
-            <a:avLst/>
-          </a:prstGeom>
-          <a:solidFill>
-            <a:srgbClr val="EFEAE0"/>
-          </a:solidFill>
-          <a:ln>
-            <a:noFill/>
-          </a:ln>
-        </p:spPr>
-        <p:style>
-          <a:lnRef idx="1">
-            <a:schemeClr val="accent1"/>
-          </a:lnRef>
-          <a:fillRef idx="3">
-            <a:schemeClr val="accent1"/>
-          </a:fillRef>
-          <a:effectRef idx="2">
-            <a:schemeClr val="accent1"/>
-          </a:effectRef>
-          <a:fontRef idx="minor">
-            <a:schemeClr val="lt1"/>
-          </a:fontRef>
-        </p:style>
-        <p:txBody>
-          <a:bodyPr rtlCol="0" anchor="ctr"/>
-          <a:lstStyle/>
-          <a:p>
-            <a:pPr algn="ctr"/>
-            <a:endParaRPr lang="fr-FR" noProof="0" dirty="0"/>
-          </a:p>
-        </p:txBody>
-      </p:sp>
-      <p:sp>
-        <p:nvSpPr>
-          <p:cNvPr id="8" name="TextBox 7"/>
-          <p:cNvSpPr txBox="1"/>
-          <p:nvPr/>
-        </p:nvSpPr>
-        <p:spPr>
-          <a:xfrm>
-            <a:off x="10789920" y="6473952"/>
-            <a:ext cx="640080" cy="182880"/>
-          </a:xfrm>
-          <a:prstGeom prst="rect">
-            <a:avLst/>
-          </a:prstGeom>
-          <a:noFill/>
-        </p:spPr>
-        <p:txBody>
-          <a:bodyPr wrap="none">
-            <a:spAutoFit/>
-          </a:bodyPr>
-          <a:lstStyle/>
-          <a:p>
-            <a:pPr algn="r"/>
-            <a:r>
-              <a:rPr lang="fr-FR" sz="900" noProof="0" dirty="0">
-                <a:solidFill>
-                  <a:srgbClr val="69625E"/>
-                </a:solidFill>
-              </a:rPr>
-              <a:t>6</a:t>
             </a:r>
           </a:p>
         </p:txBody>
@@ -17033,6 +18503,35 @@
           </a:effectLst>
         </p:spPr>
       </p:pic>
+      <p:sp>
+        <p:nvSpPr>
+          <p:cNvPr id="4" name="Espace réservé du numéro de diapositive 3">
+            <a:extLst>
+              <a:ext uri="{FF2B5EF4-FFF2-40B4-BE49-F238E27FC236}">
+                <a16:creationId xmlns:a16="http://schemas.microsoft.com/office/drawing/2014/main" id="{85D68271-D6CF-BF7B-10F6-31E62F8B7549}"/>
+              </a:ext>
+            </a:extLst>
+          </p:cNvPr>
+          <p:cNvSpPr>
+            <a:spLocks noGrp="1"/>
+          </p:cNvSpPr>
+          <p:nvPr>
+            <p:ph type="sldNum" sz="quarter" idx="12"/>
+          </p:nvPr>
+        </p:nvSpPr>
+        <p:spPr/>
+        <p:txBody>
+          <a:bodyPr/>
+          <a:lstStyle/>
+          <a:p>
+            <a:fld id="{C1FF6DA9-008F-8B48-92A6-B652298478BF}" type="slidenum">
+              <a:rPr lang="en-US" smtClean="0"/>
+              <a:t>7</a:t>
+            </a:fld>
+            <a:endParaRPr lang="en-US" dirty="0"/>
+          </a:p>
+        </p:txBody>
+      </p:sp>
     </p:spTree>
   </p:cSld>
   <p:clrMapOvr>
@@ -17100,96 +18599,6 @@
                 <a:latin typeface="Aptos Display"/>
               </a:rPr>
               <a:t>Fixtures → Faker</a:t>
-            </a:r>
-          </a:p>
-        </p:txBody>
-      </p:sp>
-      <p:sp>
-        <p:nvSpPr>
-          <p:cNvPr id="7" name="Rectangle 6">
-            <a:extLst>
-              <a:ext uri="{FF2B5EF4-FFF2-40B4-BE49-F238E27FC236}">
-                <a16:creationId xmlns:a16="http://schemas.microsoft.com/office/drawing/2014/main" id="{AD139115-B5CD-603C-2A41-29032CFE0F6F}"/>
-              </a:ext>
-            </a:extLst>
-          </p:cNvPr>
-          <p:cNvSpPr/>
-          <p:nvPr/>
-        </p:nvSpPr>
-        <p:spPr>
-          <a:xfrm>
-            <a:off x="640080" y="6419088"/>
-            <a:ext cx="10881360" cy="18288"/>
-          </a:xfrm>
-          <a:prstGeom prst="rect">
-            <a:avLst/>
-          </a:prstGeom>
-          <a:solidFill>
-            <a:srgbClr val="EFEAE0"/>
-          </a:solidFill>
-          <a:ln>
-            <a:noFill/>
-          </a:ln>
-        </p:spPr>
-        <p:style>
-          <a:lnRef idx="1">
-            <a:schemeClr val="accent1"/>
-          </a:lnRef>
-          <a:fillRef idx="3">
-            <a:schemeClr val="accent1"/>
-          </a:fillRef>
-          <a:effectRef idx="2">
-            <a:schemeClr val="accent1"/>
-          </a:effectRef>
-          <a:fontRef idx="minor">
-            <a:schemeClr val="lt1"/>
-          </a:fontRef>
-        </p:style>
-        <p:txBody>
-          <a:bodyPr rtlCol="0" anchor="ctr"/>
-          <a:lstStyle/>
-          <a:p>
-            <a:pPr algn="ctr"/>
-            <a:endParaRPr lang="fr-FR" noProof="0" dirty="0"/>
-          </a:p>
-        </p:txBody>
-      </p:sp>
-      <p:sp>
-        <p:nvSpPr>
-          <p:cNvPr id="8" name="TextBox 7">
-            <a:extLst>
-              <a:ext uri="{FF2B5EF4-FFF2-40B4-BE49-F238E27FC236}">
-                <a16:creationId xmlns:a16="http://schemas.microsoft.com/office/drawing/2014/main" id="{95CD6FE7-541F-B9B3-D349-D5B39644CADB}"/>
-              </a:ext>
-            </a:extLst>
-          </p:cNvPr>
-          <p:cNvSpPr txBox="1"/>
-          <p:nvPr/>
-        </p:nvSpPr>
-        <p:spPr>
-          <a:xfrm>
-            <a:off x="10789920" y="6473952"/>
-            <a:ext cx="640080" cy="182880"/>
-          </a:xfrm>
-          <a:prstGeom prst="rect">
-            <a:avLst/>
-          </a:prstGeom>
-          <a:noFill/>
-        </p:spPr>
-        <p:txBody>
-          <a:bodyPr wrap="none">
-            <a:spAutoFit/>
-          </a:bodyPr>
-          <a:lstStyle/>
-          <a:p>
-            <a:pPr algn="r"/>
-            <a:r>
-              <a:rPr lang="fr-FR" sz="900" noProof="0" dirty="0">
-                <a:solidFill>
-                  <a:srgbClr val="69625E"/>
-                </a:solidFill>
-              </a:rPr>
-              <a:t>6</a:t>
             </a:r>
           </a:p>
         </p:txBody>
@@ -17274,6 +18683,35 @@
           </a:effectLst>
         </p:spPr>
       </p:pic>
+      <p:sp>
+        <p:nvSpPr>
+          <p:cNvPr id="5" name="Espace réservé du numéro de diapositive 4">
+            <a:extLst>
+              <a:ext uri="{FF2B5EF4-FFF2-40B4-BE49-F238E27FC236}">
+                <a16:creationId xmlns:a16="http://schemas.microsoft.com/office/drawing/2014/main" id="{9846BE13-7690-3450-B75B-C8DB9D83C3A6}"/>
+              </a:ext>
+            </a:extLst>
+          </p:cNvPr>
+          <p:cNvSpPr>
+            <a:spLocks noGrp="1"/>
+          </p:cNvSpPr>
+          <p:nvPr>
+            <p:ph type="sldNum" sz="quarter" idx="12"/>
+          </p:nvPr>
+        </p:nvSpPr>
+        <p:spPr/>
+        <p:txBody>
+          <a:bodyPr/>
+          <a:lstStyle/>
+          <a:p>
+            <a:fld id="{C1FF6DA9-008F-8B48-92A6-B652298478BF}" type="slidenum">
+              <a:rPr lang="en-US" smtClean="0"/>
+              <a:t>8</a:t>
+            </a:fld>
+            <a:endParaRPr lang="en-US" dirty="0"/>
+          </a:p>
+        </p:txBody>
+      </p:sp>
     </p:spTree>
     <p:extLst>
       <p:ext uri="{BB962C8B-B14F-4D97-AF65-F5344CB8AC3E}">
@@ -17341,84 +18779,6 @@
               </a:solidFill>
               <a:latin typeface="Aptos Display"/>
             </a:endParaRPr>
-          </a:p>
-        </p:txBody>
-      </p:sp>
-      <p:sp>
-        <p:nvSpPr>
-          <p:cNvPr id="10" name="Rectangle 9"/>
-          <p:cNvSpPr/>
-          <p:nvPr/>
-        </p:nvSpPr>
-        <p:spPr>
-          <a:xfrm>
-            <a:off x="640080" y="6419088"/>
-            <a:ext cx="10881360" cy="18288"/>
-          </a:xfrm>
-          <a:prstGeom prst="rect">
-            <a:avLst/>
-          </a:prstGeom>
-          <a:solidFill>
-            <a:srgbClr val="EFEAE0"/>
-          </a:solidFill>
-          <a:ln>
-            <a:noFill/>
-          </a:ln>
-        </p:spPr>
-        <p:style>
-          <a:lnRef idx="1">
-            <a:schemeClr val="accent1"/>
-          </a:lnRef>
-          <a:fillRef idx="3">
-            <a:schemeClr val="accent1"/>
-          </a:fillRef>
-          <a:effectRef idx="2">
-            <a:schemeClr val="accent1"/>
-          </a:effectRef>
-          <a:fontRef idx="minor">
-            <a:schemeClr val="lt1"/>
-          </a:fontRef>
-        </p:style>
-        <p:txBody>
-          <a:bodyPr rtlCol="0" anchor="ctr"/>
-          <a:lstStyle/>
-          <a:p>
-            <a:pPr algn="ctr"/>
-            <a:endParaRPr lang="fr-FR" noProof="0" dirty="0"/>
-          </a:p>
-        </p:txBody>
-      </p:sp>
-      <p:sp>
-        <p:nvSpPr>
-          <p:cNvPr id="11" name="TextBox 10"/>
-          <p:cNvSpPr txBox="1"/>
-          <p:nvPr/>
-        </p:nvSpPr>
-        <p:spPr>
-          <a:xfrm>
-            <a:off x="10789920" y="6473952"/>
-            <a:ext cx="640080" cy="182880"/>
-          </a:xfrm>
-          <a:prstGeom prst="rect">
-            <a:avLst/>
-          </a:prstGeom>
-          <a:noFill/>
-        </p:spPr>
-        <p:txBody>
-          <a:bodyPr wrap="none">
-            <a:spAutoFit/>
-          </a:bodyPr>
-          <a:lstStyle/>
-          <a:p>
-            <a:pPr algn="r"/>
-            <a:r>
-              <a:rPr lang="fr-FR" sz="900" noProof="0" dirty="0">
-                <a:solidFill>
-                  <a:srgbClr val="69625E"/>
-                </a:solidFill>
-              </a:rPr>
-              <a:t>7</a:t>
-            </a:r>
           </a:p>
         </p:txBody>
       </p:sp>
@@ -17672,6 +19032,35 @@
           </a:prstGeom>
         </p:spPr>
       </p:pic>
+      <p:sp>
+        <p:nvSpPr>
+          <p:cNvPr id="5" name="Espace réservé du numéro de diapositive 4">
+            <a:extLst>
+              <a:ext uri="{FF2B5EF4-FFF2-40B4-BE49-F238E27FC236}">
+                <a16:creationId xmlns:a16="http://schemas.microsoft.com/office/drawing/2014/main" id="{BC3656C5-1B8E-3CCA-3ECE-832D6D50FCA3}"/>
+              </a:ext>
+            </a:extLst>
+          </p:cNvPr>
+          <p:cNvSpPr>
+            <a:spLocks noGrp="1"/>
+          </p:cNvSpPr>
+          <p:nvPr>
+            <p:ph type="sldNum" sz="quarter" idx="12"/>
+          </p:nvPr>
+        </p:nvSpPr>
+        <p:spPr/>
+        <p:txBody>
+          <a:bodyPr/>
+          <a:lstStyle/>
+          <a:p>
+            <a:fld id="{C1FF6DA9-008F-8B48-92A6-B652298478BF}" type="slidenum">
+              <a:rPr lang="en-US" smtClean="0"/>
+              <a:t>9</a:t>
+            </a:fld>
+            <a:endParaRPr lang="en-US" dirty="0"/>
+          </a:p>
+        </p:txBody>
+      </p:sp>
     </p:spTree>
   </p:cSld>
   <p:clrMapOvr>
